--- a/TemanJourney_Growth_Recommendation.pptx
+++ b/TemanJourney_Growth_Recommendation.pptx
@@ -45,6 +45,8 @@
     <p:sldId id="293" r:id="rId45"/>
     <p:sldId id="294" r:id="rId46"/>
     <p:sldId id="295" r:id="rId47"/>
+    <p:sldId id="296" r:id="rId48"/>
+    <p:sldId id="297" r:id="rId49"/>
   </p:sldIdLst>
   <p:sldSz cx="12191695" cy="6858000" type="screen4x3"/>
   <p:notesSz cx="6858000" cy="9144000"/>
@@ -10770,7 +10772,7 @@
           <a:lstStyle/>
           <a:p>
             <a:r>
-              <a:t>The four areas cover any service contract without overlap: how we pay, what time they promise, how we check their work, and how we protect ourselves.</a:t>
+              <a:t>Program first, numbers second. Program A lowers what it costs to win a client: referral and the channels we already own (EAP vouchers, head office to branches) cost far less than ads, and a before/after report makes the next sale easier. Program B treats trainers as our most important supply: we grow them from our own participants and psychologist pool, keep the loyal ones, and let clients pay for trainer certification. The next slide shows what both programs do to our profit.</a:t>
             </a:r>
           </a:p>
         </p:txBody>
@@ -10840,7 +10842,77 @@
           <a:lstStyle/>
           <a:p>
             <a:r>
-              <a:t>B2C clients mostly book evenings and weekends; EAP sessions are mostly in office hours. So the two paid part-timers split days and evenings, and the pool takes Friday evening and Sunday. Confirm how the pool of 20 is paid (per session).</a:t>
+              <a:t>This is the DuPont logic from the procurement course, applied to us. In the factory example, bought materials are about half of sales and the margin is 6%, so a $1 saving equals about $16 of extra sales. Our delivery cost is only 32% of sales and most of our cost is fixed, so one extra rupiah of sales keeps 67%: a rupiah saved is worth about Rp1.5 of sales (by the textbook rule, dividing by net margin, it would be Rp3.8). The asset side of the DuPont tree matters little for us: we hold no stock or machines. Our assets are cash and money clients owe us; a down payment moves money from one to the other, so it protects cash (slide 27) rather than changing the return. Estimates: same ad money wins twice the clients (Rp27M), clients pay half of trainer certification (Rp7.5M).</a:t>
+            </a:r>
+          </a:p>
+        </p:txBody>
+      </p:sp>
+      <p:sp>
+        <p:nvSpPr>
+          <p:cNvPr id="4" name="Slide Number Placeholder 3"/>
+          <p:cNvSpPr>
+            <a:spLocks noGrp="1"/>
+          </p:cNvSpPr>
+          <p:nvPr>
+            <p:ph type="sldNum" idx="5" sz="quarter"/>
+          </p:nvPr>
+        </p:nvSpPr>
+        <p:spPr/>
+      </p:sp>
+    </p:spTree>
+  </p:cSld>
+  <p:clrMapOvr>
+    <a:masterClrMapping/>
+  </p:clrMapOvr>
+</p:notes>
+</file>
+
+<file path=ppt/notesSlides/notesSlide29.xml><?xml version="1.0" encoding="utf-8"?>
+<p:notes xmlns:a="http://schemas.openxmlformats.org/drawingml/2006/main" xmlns:p="http://schemas.openxmlformats.org/presentationml/2006/main" xmlns:r="http://schemas.openxmlformats.org/officeDocument/2006/relationships">
+  <p:cSld>
+    <p:spTree>
+      <p:nvGrpSpPr>
+        <p:cNvPr id="1" name=""/>
+        <p:cNvGrpSpPr/>
+        <p:nvPr/>
+      </p:nvGrpSpPr>
+      <p:grpSpPr>
+        <a:xfrm>
+          <a:off x="0" y="0"/>
+          <a:ext cx="0" cy="0"/>
+          <a:chOff x="0" y="0"/>
+          <a:chExt cx="0" cy="0"/>
+        </a:xfrm>
+      </p:grpSpPr>
+      <p:sp>
+        <p:nvSpPr>
+          <p:cNvPr id="2" name="Slide Image Placeholder 1"/>
+          <p:cNvSpPr>
+            <a:spLocks noGrp="1"/>
+          </p:cNvSpPr>
+          <p:nvPr>
+            <p:ph type="sldImg" idx="2"/>
+          </p:nvPr>
+        </p:nvSpPr>
+        <p:spPr/>
+      </p:sp>
+      <p:sp>
+        <p:nvSpPr>
+          <p:cNvPr id="3" name="Notes Placeholder 2"/>
+          <p:cNvSpPr>
+            <a:spLocks noGrp="1"/>
+          </p:cNvSpPr>
+          <p:nvPr>
+            <p:ph type="body" idx="3" sz="quarter"/>
+          </p:nvPr>
+        </p:nvSpPr>
+        <p:spPr/>
+        <p:txBody>
+          <a:bodyPr/>
+          <a:lstStyle/>
+          <a:p>
+            <a:r>
+              <a:t>The four areas cover any service contract without overlap: how we pay, what time they promise, how we check their work, and how we protect ourselves.</a:t>
             </a:r>
           </a:p>
         </p:txBody>
@@ -10935,6 +11007,76 @@
 </p:notes>
 </file>
 
+<file path=ppt/notesSlides/notesSlide30.xml><?xml version="1.0" encoding="utf-8"?>
+<p:notes xmlns:a="http://schemas.openxmlformats.org/drawingml/2006/main" xmlns:p="http://schemas.openxmlformats.org/presentationml/2006/main" xmlns:r="http://schemas.openxmlformats.org/officeDocument/2006/relationships">
+  <p:cSld>
+    <p:spTree>
+      <p:nvGrpSpPr>
+        <p:cNvPr id="1" name=""/>
+        <p:cNvGrpSpPr/>
+        <p:nvPr/>
+      </p:nvGrpSpPr>
+      <p:grpSpPr>
+        <a:xfrm>
+          <a:off x="0" y="0"/>
+          <a:ext cx="0" cy="0"/>
+          <a:chOff x="0" y="0"/>
+          <a:chExt cx="0" cy="0"/>
+        </a:xfrm>
+      </p:grpSpPr>
+      <p:sp>
+        <p:nvSpPr>
+          <p:cNvPr id="2" name="Slide Image Placeholder 1"/>
+          <p:cNvSpPr>
+            <a:spLocks noGrp="1"/>
+          </p:cNvSpPr>
+          <p:nvPr>
+            <p:ph type="sldImg" idx="2"/>
+          </p:nvPr>
+        </p:nvSpPr>
+        <p:spPr/>
+      </p:sp>
+      <p:sp>
+        <p:nvSpPr>
+          <p:cNvPr id="3" name="Notes Placeholder 2"/>
+          <p:cNvSpPr>
+            <a:spLocks noGrp="1"/>
+          </p:cNvSpPr>
+          <p:nvPr>
+            <p:ph type="body" idx="3" sz="quarter"/>
+          </p:nvPr>
+        </p:nvSpPr>
+        <p:spPr/>
+        <p:txBody>
+          <a:bodyPr/>
+          <a:lstStyle/>
+          <a:p>
+            <a:r>
+              <a:t>B2C clients mostly book evenings and weekends; EAP sessions are mostly in office hours. So the two paid part-timers split days and evenings, and the pool takes Friday evening and Sunday. Confirm how the pool of 20 is paid (per session).</a:t>
+            </a:r>
+          </a:p>
+        </p:txBody>
+      </p:sp>
+      <p:sp>
+        <p:nvSpPr>
+          <p:cNvPr id="4" name="Slide Number Placeholder 3"/>
+          <p:cNvSpPr>
+            <a:spLocks noGrp="1"/>
+          </p:cNvSpPr>
+          <p:nvPr>
+            <p:ph type="sldNum" idx="5" sz="quarter"/>
+          </p:nvPr>
+        </p:nvSpPr>
+        <p:spPr/>
+      </p:sp>
+    </p:spTree>
+  </p:cSld>
+  <p:clrMapOvr>
+    <a:masterClrMapping/>
+  </p:clrMapOvr>
+</p:notes>
+</file>
+
 <file path=ppt/notesSlides/notesSlide4.xml><?xml version="1.0" encoding="utf-8"?>
 <p:notes xmlns:a="http://schemas.openxmlformats.org/drawingml/2006/main" xmlns:p="http://schemas.openxmlformats.org/presentationml/2006/main" xmlns:r="http://schemas.openxmlformats.org/officeDocument/2006/relationships">
   <p:cSld>
@@ -11050,7 +11192,7 @@
           <a:lstStyle/>
           <a:p>
             <a:r>
-              <a:t>Full-time staff are underpaid: this plan fixes it. Part-time staff are paid enough: we keep their rates and only change how their contracts work (slides 24 and 35). Each EAP contract adds about 5 to 7 points of margin: 0 new = 7%, 1 new = 13%, 2 new = 18%, 3 new = 22%, 4 new = 26%.</a:t>
+              <a:t>Full-time staff are underpaid: this plan fixes it. Part-time staff are paid enough: we keep their rates and only change how their contracts work (slides 24 and 37). Each EAP contract adds about 5 to 7 points of margin: 0 new = 7%, 1 new = 13%, 2 new = 18%, 3 new = 22%, 4 new = 26%.</a:t>
             </a:r>
           </a:p>
         </p:txBody>
@@ -43789,6 +43931,31 @@
                 <a:latin typeface="Arial"/>
               </a:rPr>
               <a:t>How are running cost, contracts and capacity set?</a:t>
+            </a:r>
+          </a:p>
+          <a:p>
+            <a:pPr algn="l">
+              <a:spcAft>
+                <a:spcPts val="300"/>
+              </a:spcAft>
+            </a:pPr>
+            <a:r>
+              <a:rPr sz="1200" b="1" i="0">
+                <a:solidFill>
+                  <a:srgbClr val="E8904A"/>
+                </a:solidFill>
+                <a:latin typeface="Arial"/>
+              </a:rPr>
+              <a:t>•  </a:t>
+            </a:r>
+            <a:r>
+              <a:rPr sz="1200" b="0" i="0">
+                <a:solidFill>
+                  <a:srgbClr val="C9D2E3"/>
+                </a:solidFill>
+                <a:latin typeface="Arial"/>
+              </a:rPr>
+              <a:t>How do we win clients and trainers for less?</a:t>
             </a:r>
           </a:p>
           <a:p>
@@ -47511,7 +47678,7 @@
                 </a:solidFill>
                 <a:latin typeface="Georgia"/>
               </a:rPr>
-              <a:t>Better contracts in </a:t>
+              <a:t>Two programs: win clients and trainers </a:t>
             </a:r>
             <a:r>
               <a:rPr sz="2800" b="1" i="0">
@@ -47520,7 +47687,7 @@
                 </a:solidFill>
                 <a:latin typeface="Georgia"/>
               </a:rPr>
-              <a:t>four areas</a:t>
+              <a:t>for less</a:t>
             </a:r>
             <a:r>
               <a:rPr sz="2800" b="1" i="0">
@@ -47568,7 +47735,7 @@
                 </a:solidFill>
                 <a:latin typeface="Arial"/>
               </a:rPr>
-              <a:t>We keep part-time pay levels. We change how the contracts work.</a:t>
+              <a:t>Cheaper growth, not lower pay: each lever also brings sales or trainers we need.</a:t>
             </a:r>
           </a:p>
         </p:txBody>
@@ -47666,7 +47833,7 @@
                 </a:solidFill>
                 <a:latin typeface="Arial"/>
               </a:rPr>
-              <a:t>Source: Session fees and day rates are estimates; compare them with the market before you sign.</a:t>
+              <a:t>Source: Our model, current estimate for 2027, month by month (B2C sheet, Capacity_OPEX). Program effects are targets, not yet in the model.</a:t>
             </a:r>
           </a:p>
         </p:txBody>
@@ -47706,6 +47873,2958 @@
                 <a:latin typeface="Arial"/>
               </a:rPr>
               <a:t>35</a:t>
+            </a:r>
+          </a:p>
+        </p:txBody>
+      </p:sp>
+      <p:sp>
+        <p:nvSpPr>
+          <p:cNvPr id="7" name="Rounded Rectangle 6"/>
+          <p:cNvSpPr/>
+          <p:nvPr/>
+        </p:nvSpPr>
+        <p:spPr>
+          <a:xfrm>
+            <a:off x="457200" y="1371600"/>
+            <a:ext cx="5532120" cy="4160520"/>
+          </a:xfrm>
+          <a:prstGeom prst="roundRect">
+            <a:avLst>
+              <a:gd name="adj" fmla="val 6000"/>
+            </a:avLst>
+          </a:prstGeom>
+          <a:solidFill>
+            <a:srgbClr val="EAF2FF"/>
+          </a:solidFill>
+          <a:ln>
+            <a:noFill/>
+          </a:ln>
+          <a:effectLst/>
+        </p:spPr>
+        <p:style>
+          <a:lnRef idx="1">
+            <a:schemeClr val="accent1"/>
+          </a:lnRef>
+          <a:fillRef idx="3">
+            <a:schemeClr val="accent1"/>
+          </a:fillRef>
+          <a:effectRef idx="2">
+            <a:schemeClr val="accent1"/>
+          </a:effectRef>
+          <a:fontRef idx="minor">
+            <a:schemeClr val="lt1"/>
+          </a:fontRef>
+        </p:style>
+        <p:txBody>
+          <a:bodyPr rtlCol="0" anchor="t" wrap="square" lIns="182880" rIns="182880" tIns="36576" bIns="36576"/>
+          <a:lstStyle/>
+          <a:p>
+            <a:pPr algn="l">
+              <a:spcAft>
+                <a:spcPts val="400"/>
+              </a:spcAft>
+            </a:pPr>
+            <a:r>
+              <a:rPr sz="1300" b="0" i="0">
+                <a:solidFill>
+                  <a:srgbClr val="3D4F6A"/>
+                </a:solidFill>
+                <a:latin typeface="Arial"/>
+              </a:rPr>
+              <a:t/>
+            </a:r>
+          </a:p>
+        </p:txBody>
+      </p:sp>
+      <p:sp>
+        <p:nvSpPr>
+          <p:cNvPr id="8" name="Oval 7"/>
+          <p:cNvSpPr/>
+          <p:nvPr/>
+        </p:nvSpPr>
+        <p:spPr>
+          <a:xfrm>
+            <a:off x="640080" y="1508760"/>
+            <a:ext cx="548640" cy="548640"/>
+          </a:xfrm>
+          <a:prstGeom prst="ellipse">
+            <a:avLst/>
+          </a:prstGeom>
+          <a:solidFill>
+            <a:srgbClr val="1E2A3A"/>
+          </a:solidFill>
+          <a:ln>
+            <a:noFill/>
+          </a:ln>
+          <a:effectLst/>
+        </p:spPr>
+        <p:style>
+          <a:lnRef idx="1">
+            <a:schemeClr val="accent1"/>
+          </a:lnRef>
+          <a:fillRef idx="3">
+            <a:schemeClr val="accent1"/>
+          </a:fillRef>
+          <a:effectRef idx="2">
+            <a:schemeClr val="accent1"/>
+          </a:effectRef>
+          <a:fontRef idx="minor">
+            <a:schemeClr val="lt1"/>
+          </a:fontRef>
+        </p:style>
+        <p:txBody>
+          <a:bodyPr rtlCol="0" anchor="ctr" wrap="square" lIns="0" rIns="0" tIns="36576" bIns="36576"/>
+          <a:lstStyle/>
+          <a:p>
+            <a:pPr algn="ctr">
+              <a:spcAft>
+                <a:spcPts val="400"/>
+              </a:spcAft>
+            </a:pPr>
+            <a:r>
+              <a:rPr sz="2000" b="1" i="0">
+                <a:solidFill>
+                  <a:srgbClr val="FFFFFF"/>
+                </a:solidFill>
+                <a:latin typeface="Georgia"/>
+              </a:rPr>
+              <a:t>A</a:t>
+            </a:r>
+          </a:p>
+        </p:txBody>
+      </p:sp>
+      <p:sp>
+        <p:nvSpPr>
+          <p:cNvPr id="9" name="TextBox 8"/>
+          <p:cNvSpPr txBox="1"/>
+          <p:nvPr/>
+        </p:nvSpPr>
+        <p:spPr>
+          <a:xfrm>
+            <a:off x="1325880" y="1463040"/>
+            <a:ext cx="4480560" cy="640080"/>
+          </a:xfrm>
+          <a:prstGeom prst="rect">
+            <a:avLst/>
+          </a:prstGeom>
+          <a:noFill/>
+        </p:spPr>
+        <p:txBody>
+          <a:bodyPr wrap="square" anchor="ctr" lIns="18288" rIns="18288" tIns="36576" bIns="36576">
+            <a:spAutoFit/>
+          </a:bodyPr>
+          <a:lstStyle/>
+          <a:p>
+            <a:pPr algn="l">
+              <a:spcAft>
+                <a:spcPts val="0"/>
+              </a:spcAft>
+            </a:pPr>
+            <a:r>
+              <a:rPr sz="1800" b="1" i="0">
+                <a:solidFill>
+                  <a:srgbClr val="1E2A3A"/>
+                </a:solidFill>
+                <a:latin typeface="Georgia"/>
+              </a:rPr>
+              <a:t>Win clients for less</a:t>
+            </a:r>
+          </a:p>
+          <a:p>
+            <a:pPr algn="l">
+              <a:spcAft>
+                <a:spcPts val="0"/>
+              </a:spcAft>
+            </a:pPr>
+            <a:r>
+              <a:rPr sz="1100" b="0" i="0">
+                <a:solidFill>
+                  <a:srgbClr val="6B7A99"/>
+                </a:solidFill>
+                <a:latin typeface="Arial"/>
+              </a:rPr>
+              <a:t>Cost to win one new client</a:t>
+            </a:r>
+          </a:p>
+        </p:txBody>
+      </p:sp>
+      <p:sp>
+        <p:nvSpPr>
+          <p:cNvPr id="10" name="TextBox 9"/>
+          <p:cNvSpPr txBox="1"/>
+          <p:nvPr/>
+        </p:nvSpPr>
+        <p:spPr>
+          <a:xfrm>
+            <a:off x="685800" y="2240280"/>
+            <a:ext cx="5120640" cy="2148840"/>
+          </a:xfrm>
+          <a:prstGeom prst="rect">
+            <a:avLst/>
+          </a:prstGeom>
+          <a:noFill/>
+        </p:spPr>
+        <p:txBody>
+          <a:bodyPr wrap="square" anchor="t" lIns="18288" rIns="18288" tIns="36576" bIns="36576">
+            <a:spAutoFit/>
+          </a:bodyPr>
+          <a:lstStyle/>
+          <a:p>
+            <a:pPr algn="l">
+              <a:spcAft>
+                <a:spcPts val="600"/>
+              </a:spcAft>
+            </a:pPr>
+            <a:r>
+              <a:rPr sz="1200" b="1" i="0">
+                <a:solidFill>
+                  <a:srgbClr val="9B3809"/>
+                </a:solidFill>
+                <a:latin typeface="Arial"/>
+              </a:rPr>
+              <a:t>•  </a:t>
+            </a:r>
+            <a:r>
+              <a:rPr sz="1200" b="1" i="0">
+                <a:solidFill>
+                  <a:srgbClr val="1E2A3A"/>
+                </a:solidFill>
+                <a:latin typeface="Arial"/>
+              </a:rPr>
+              <a:t>Referral: </a:t>
+            </a:r>
+            <a:r>
+              <a:rPr sz="1200" b="0" i="0">
+                <a:solidFill>
+                  <a:srgbClr val="3D4F6A"/>
+                </a:solidFill>
+                <a:latin typeface="Arial"/>
+              </a:rPr>
+              <a:t>Rp100k session credit to each side; 20% of new clients by Q4 2027 (slide 18)</a:t>
+            </a:r>
+          </a:p>
+          <a:p>
+            <a:pPr algn="l">
+              <a:spcAft>
+                <a:spcPts val="600"/>
+              </a:spcAft>
+            </a:pPr>
+            <a:r>
+              <a:rPr sz="1200" b="1" i="0">
+                <a:solidFill>
+                  <a:srgbClr val="9B3809"/>
+                </a:solidFill>
+                <a:latin typeface="Arial"/>
+              </a:rPr>
+              <a:t>•  </a:t>
+            </a:r>
+            <a:r>
+              <a:rPr sz="1200" b="1" i="0">
+                <a:solidFill>
+                  <a:srgbClr val="1E2A3A"/>
+                </a:solidFill>
+                <a:latin typeface="Arial"/>
+              </a:rPr>
+              <a:t>Channels we already own: </a:t>
+            </a:r>
+            <a:r>
+              <a:rPr sz="1200" b="0" i="0">
+                <a:solidFill>
+                  <a:srgbClr val="3D4F6A"/>
+                </a:solidFill>
+                <a:latin typeface="Arial"/>
+              </a:rPr>
+              <a:t>EAP staff come through Theta vouchers; one head office opens many branches</a:t>
+            </a:r>
+          </a:p>
+          <a:p>
+            <a:pPr algn="l">
+              <a:spcAft>
+                <a:spcPts val="600"/>
+              </a:spcAft>
+            </a:pPr>
+            <a:r>
+              <a:rPr sz="1200" b="1" i="0">
+                <a:solidFill>
+                  <a:srgbClr val="9B3809"/>
+                </a:solidFill>
+                <a:latin typeface="Arial"/>
+              </a:rPr>
+              <a:t>•  </a:t>
+            </a:r>
+            <a:r>
+              <a:rPr sz="1200" b="1" i="0">
+                <a:solidFill>
+                  <a:srgbClr val="1E2A3A"/>
+                </a:solidFill>
+                <a:latin typeface="Arial"/>
+              </a:rPr>
+              <a:t>Proof of impact: </a:t>
+            </a:r>
+            <a:r>
+              <a:rPr sz="1200" b="0" i="0">
+                <a:solidFill>
+                  <a:srgbClr val="3D4F6A"/>
+                </a:solidFill>
+                <a:latin typeface="Arial"/>
+              </a:rPr>
+              <a:t>Before/after report on every training: easier re-orders, real stories for Instagram</a:t>
+            </a:r>
+          </a:p>
+          <a:p>
+            <a:pPr algn="l">
+              <a:spcAft>
+                <a:spcPts val="600"/>
+              </a:spcAft>
+            </a:pPr>
+            <a:r>
+              <a:rPr sz="1200" b="1" i="0">
+                <a:solidFill>
+                  <a:srgbClr val="9B3809"/>
+                </a:solidFill>
+                <a:latin typeface="Arial"/>
+              </a:rPr>
+              <a:t>•  </a:t>
+            </a:r>
+            <a:r>
+              <a:rPr sz="1200" b="1" i="0">
+                <a:solidFill>
+                  <a:srgbClr val="1E2A3A"/>
+                </a:solidFill>
+                <a:latin typeface="Arial"/>
+              </a:rPr>
+              <a:t>Ads discipline: </a:t>
+            </a:r>
+            <a:r>
+              <a:rPr sz="1200" b="0" i="0">
+                <a:solidFill>
+                  <a:srgbClr val="3D4F6A"/>
+                </a:solidFill>
+                <a:latin typeface="Arial"/>
+              </a:rPr>
+              <a:t>Each month, pause any ad that costs more per client than the Rp0.84M profit a client brings</a:t>
+            </a:r>
+          </a:p>
+        </p:txBody>
+      </p:sp>
+      <p:sp>
+        <p:nvSpPr>
+          <p:cNvPr id="11" name="Rounded Rectangle 10"/>
+          <p:cNvSpPr/>
+          <p:nvPr/>
+        </p:nvSpPr>
+        <p:spPr>
+          <a:xfrm>
+            <a:off x="685800" y="4434840"/>
+            <a:ext cx="2468880" cy="960120"/>
+          </a:xfrm>
+          <a:prstGeom prst="roundRect">
+            <a:avLst>
+              <a:gd name="adj" fmla="val 6000"/>
+            </a:avLst>
+          </a:prstGeom>
+          <a:solidFill>
+            <a:srgbClr val="FFFFFF"/>
+          </a:solidFill>
+          <a:ln>
+            <a:noFill/>
+          </a:ln>
+          <a:effectLst/>
+        </p:spPr>
+        <p:style>
+          <a:lnRef idx="1">
+            <a:schemeClr val="accent1"/>
+          </a:lnRef>
+          <a:fillRef idx="3">
+            <a:schemeClr val="accent1"/>
+          </a:fillRef>
+          <a:effectRef idx="2">
+            <a:schemeClr val="accent1"/>
+          </a:effectRef>
+          <a:fontRef idx="minor">
+            <a:schemeClr val="lt1"/>
+          </a:fontRef>
+        </p:style>
+        <p:txBody>
+          <a:bodyPr rtlCol="0" anchor="ctr" wrap="square" lIns="164592" rIns="164592" tIns="36576" bIns="36576"/>
+          <a:lstStyle/>
+          <a:p>
+            <a:pPr algn="l">
+              <a:spcAft>
+                <a:spcPts val="200"/>
+              </a:spcAft>
+            </a:pPr>
+            <a:r>
+              <a:rPr sz="2200" b="1" i="0">
+                <a:solidFill>
+                  <a:srgbClr val="9B3809"/>
+                </a:solidFill>
+                <a:latin typeface="Georgia"/>
+              </a:rPr>
+              <a:t>Rp1.5M</a:t>
+            </a:r>
+          </a:p>
+          <a:p>
+            <a:pPr algn="l">
+              <a:spcAft>
+                <a:spcPts val="200"/>
+              </a:spcAft>
+            </a:pPr>
+            <a:r>
+              <a:rPr sz="1000" b="0" i="0">
+                <a:solidFill>
+                  <a:srgbClr val="3D4F6A"/>
+                </a:solidFill>
+                <a:latin typeface="Arial"/>
+              </a:rPr>
+              <a:t>per client from Instagram, Jan 2027</a:t>
+            </a:r>
+          </a:p>
+        </p:txBody>
+      </p:sp>
+      <p:sp>
+        <p:nvSpPr>
+          <p:cNvPr id="12" name="Rounded Rectangle 11"/>
+          <p:cNvSpPr/>
+          <p:nvPr/>
+        </p:nvSpPr>
+        <p:spPr>
+          <a:xfrm>
+            <a:off x="3291840" y="4434840"/>
+            <a:ext cx="2468880" cy="960120"/>
+          </a:xfrm>
+          <a:prstGeom prst="roundRect">
+            <a:avLst>
+              <a:gd name="adj" fmla="val 6000"/>
+            </a:avLst>
+          </a:prstGeom>
+          <a:solidFill>
+            <a:srgbClr val="FFFFFF"/>
+          </a:solidFill>
+          <a:ln>
+            <a:noFill/>
+          </a:ln>
+          <a:effectLst/>
+        </p:spPr>
+        <p:style>
+          <a:lnRef idx="1">
+            <a:schemeClr val="accent1"/>
+          </a:lnRef>
+          <a:fillRef idx="3">
+            <a:schemeClr val="accent1"/>
+          </a:fillRef>
+          <a:effectRef idx="2">
+            <a:schemeClr val="accent1"/>
+          </a:effectRef>
+          <a:fontRef idx="minor">
+            <a:schemeClr val="lt1"/>
+          </a:fontRef>
+        </p:style>
+        <p:txBody>
+          <a:bodyPr rtlCol="0" anchor="ctr" wrap="square" lIns="164592" rIns="164592" tIns="36576" bIns="36576"/>
+          <a:lstStyle/>
+          <a:p>
+            <a:pPr algn="l">
+              <a:spcAft>
+                <a:spcPts val="200"/>
+              </a:spcAft>
+            </a:pPr>
+            <a:r>
+              <a:rPr sz="2200" b="1" i="0">
+                <a:solidFill>
+                  <a:srgbClr val="9B3809"/>
+                </a:solidFill>
+                <a:latin typeface="Georgia"/>
+              </a:rPr>
+              <a:t>Rp0.2M</a:t>
+            </a:r>
+          </a:p>
+          <a:p>
+            <a:pPr algn="l">
+              <a:spcAft>
+                <a:spcPts val="200"/>
+              </a:spcAft>
+            </a:pPr>
+            <a:r>
+              <a:rPr sz="1000" b="0" i="0">
+                <a:solidFill>
+                  <a:srgbClr val="3D4F6A"/>
+                </a:solidFill>
+                <a:latin typeface="Arial"/>
+              </a:rPr>
+              <a:t>per client from referral</a:t>
+            </a:r>
+          </a:p>
+        </p:txBody>
+      </p:sp>
+      <p:sp>
+        <p:nvSpPr>
+          <p:cNvPr id="13" name="Rounded Rectangle 12"/>
+          <p:cNvSpPr/>
+          <p:nvPr/>
+        </p:nvSpPr>
+        <p:spPr>
+          <a:xfrm>
+            <a:off x="6172200" y="1371600"/>
+            <a:ext cx="5532120" cy="4160520"/>
+          </a:xfrm>
+          <a:prstGeom prst="roundRect">
+            <a:avLst>
+              <a:gd name="adj" fmla="val 6000"/>
+            </a:avLst>
+          </a:prstGeom>
+          <a:solidFill>
+            <a:srgbClr val="EAF2FF"/>
+          </a:solidFill>
+          <a:ln>
+            <a:noFill/>
+          </a:ln>
+          <a:effectLst/>
+        </p:spPr>
+        <p:style>
+          <a:lnRef idx="1">
+            <a:schemeClr val="accent1"/>
+          </a:lnRef>
+          <a:fillRef idx="3">
+            <a:schemeClr val="accent1"/>
+          </a:fillRef>
+          <a:effectRef idx="2">
+            <a:schemeClr val="accent1"/>
+          </a:effectRef>
+          <a:fontRef idx="minor">
+            <a:schemeClr val="lt1"/>
+          </a:fontRef>
+        </p:style>
+        <p:txBody>
+          <a:bodyPr rtlCol="0" anchor="t" wrap="square" lIns="182880" rIns="182880" tIns="36576" bIns="36576"/>
+          <a:lstStyle/>
+          <a:p>
+            <a:pPr algn="l">
+              <a:spcAft>
+                <a:spcPts val="400"/>
+              </a:spcAft>
+            </a:pPr>
+            <a:r>
+              <a:rPr sz="1300" b="0" i="0">
+                <a:solidFill>
+                  <a:srgbClr val="3D4F6A"/>
+                </a:solidFill>
+                <a:latin typeface="Arial"/>
+              </a:rPr>
+              <a:t/>
+            </a:r>
+          </a:p>
+        </p:txBody>
+      </p:sp>
+      <p:sp>
+        <p:nvSpPr>
+          <p:cNvPr id="14" name="Oval 13"/>
+          <p:cNvSpPr/>
+          <p:nvPr/>
+        </p:nvSpPr>
+        <p:spPr>
+          <a:xfrm>
+            <a:off x="6355080" y="1508760"/>
+            <a:ext cx="548640" cy="548640"/>
+          </a:xfrm>
+          <a:prstGeom prst="ellipse">
+            <a:avLst/>
+          </a:prstGeom>
+          <a:solidFill>
+            <a:srgbClr val="9B3809"/>
+          </a:solidFill>
+          <a:ln>
+            <a:noFill/>
+          </a:ln>
+          <a:effectLst/>
+        </p:spPr>
+        <p:style>
+          <a:lnRef idx="1">
+            <a:schemeClr val="accent1"/>
+          </a:lnRef>
+          <a:fillRef idx="3">
+            <a:schemeClr val="accent1"/>
+          </a:fillRef>
+          <a:effectRef idx="2">
+            <a:schemeClr val="accent1"/>
+          </a:effectRef>
+          <a:fontRef idx="minor">
+            <a:schemeClr val="lt1"/>
+          </a:fontRef>
+        </p:style>
+        <p:txBody>
+          <a:bodyPr rtlCol="0" anchor="ctr" wrap="square" lIns="0" rIns="0" tIns="36576" bIns="36576"/>
+          <a:lstStyle/>
+          <a:p>
+            <a:pPr algn="ctr">
+              <a:spcAft>
+                <a:spcPts val="400"/>
+              </a:spcAft>
+            </a:pPr>
+            <a:r>
+              <a:rPr sz="2000" b="1" i="0">
+                <a:solidFill>
+                  <a:srgbClr val="FFFFFF"/>
+                </a:solidFill>
+                <a:latin typeface="Georgia"/>
+              </a:rPr>
+              <a:t>B</a:t>
+            </a:r>
+          </a:p>
+        </p:txBody>
+      </p:sp>
+      <p:sp>
+        <p:nvSpPr>
+          <p:cNvPr id="15" name="TextBox 14"/>
+          <p:cNvSpPr txBox="1"/>
+          <p:nvPr/>
+        </p:nvSpPr>
+        <p:spPr>
+          <a:xfrm>
+            <a:off x="7040880" y="1463040"/>
+            <a:ext cx="4480560" cy="640080"/>
+          </a:xfrm>
+          <a:prstGeom prst="rect">
+            <a:avLst/>
+          </a:prstGeom>
+          <a:noFill/>
+        </p:spPr>
+        <p:txBody>
+          <a:bodyPr wrap="square" anchor="ctr" lIns="18288" rIns="18288" tIns="36576" bIns="36576">
+            <a:spAutoFit/>
+          </a:bodyPr>
+          <a:lstStyle/>
+          <a:p>
+            <a:pPr algn="l">
+              <a:spcAft>
+                <a:spcPts val="0"/>
+              </a:spcAft>
+            </a:pPr>
+            <a:r>
+              <a:rPr sz="1800" b="1" i="0">
+                <a:solidFill>
+                  <a:srgbClr val="1E2A3A"/>
+                </a:solidFill>
+                <a:latin typeface="Georgia"/>
+              </a:rPr>
+              <a:t>Grow and keep good trainers</a:t>
+            </a:r>
+          </a:p>
+          <a:p>
+            <a:pPr algn="l">
+              <a:spcAft>
+                <a:spcPts val="0"/>
+              </a:spcAft>
+            </a:pPr>
+            <a:r>
+              <a:rPr sz="1100" b="0" i="0">
+                <a:solidFill>
+                  <a:srgbClr val="6B7A99"/>
+                </a:solidFill>
+                <a:latin typeface="Arial"/>
+              </a:rPr>
+              <a:t>Cost to find, train and keep one trainer</a:t>
+            </a:r>
+          </a:p>
+        </p:txBody>
+      </p:sp>
+      <p:sp>
+        <p:nvSpPr>
+          <p:cNvPr id="16" name="TextBox 15"/>
+          <p:cNvSpPr txBox="1"/>
+          <p:nvPr/>
+        </p:nvSpPr>
+        <p:spPr>
+          <a:xfrm>
+            <a:off x="6400800" y="2240280"/>
+            <a:ext cx="5120640" cy="2148840"/>
+          </a:xfrm>
+          <a:prstGeom prst="rect">
+            <a:avLst/>
+          </a:prstGeom>
+          <a:noFill/>
+        </p:spPr>
+        <p:txBody>
+          <a:bodyPr wrap="square" anchor="t" lIns="18288" rIns="18288" tIns="36576" bIns="36576">
+            <a:spAutoFit/>
+          </a:bodyPr>
+          <a:lstStyle/>
+          <a:p>
+            <a:pPr algn="l">
+              <a:spcAft>
+                <a:spcPts val="600"/>
+              </a:spcAft>
+            </a:pPr>
+            <a:r>
+              <a:rPr sz="1200" b="1" i="0">
+                <a:solidFill>
+                  <a:srgbClr val="9B3809"/>
+                </a:solidFill>
+                <a:latin typeface="Arial"/>
+              </a:rPr>
+              <a:t>•  </a:t>
+            </a:r>
+            <a:r>
+              <a:rPr sz="1200" b="1" i="0">
+                <a:solidFill>
+                  <a:srgbClr val="1E2A3A"/>
+                </a:solidFill>
+                <a:latin typeface="Arial"/>
+              </a:rPr>
+              <a:t>Grow our own: </a:t>
+            </a:r>
+            <a:r>
+              <a:rPr sz="1200" b="0" i="0">
+                <a:solidFill>
+                  <a:srgbClr val="3D4F6A"/>
+                </a:solidFill>
+                <a:latin typeface="Arial"/>
+              </a:rPr>
+              <a:t>Best training participants and our pool of 20 psychologists: observe → co-lead → lead</a:t>
+            </a:r>
+          </a:p>
+          <a:p>
+            <a:pPr algn="l">
+              <a:spcAft>
+                <a:spcPts val="600"/>
+              </a:spcAft>
+            </a:pPr>
+            <a:r>
+              <a:rPr sz="1200" b="1" i="0">
+                <a:solidFill>
+                  <a:srgbClr val="9B3809"/>
+                </a:solidFill>
+                <a:latin typeface="Arial"/>
+              </a:rPr>
+              <a:t>•  </a:t>
+            </a:r>
+            <a:r>
+              <a:rPr sz="1200" b="1" i="0">
+                <a:solidFill>
+                  <a:srgbClr val="1E2A3A"/>
+                </a:solidFill>
+                <a:latin typeface="Arial"/>
+              </a:rPr>
+              <a:t>Keep the loyal few: </a:t>
+            </a:r>
+            <a:r>
+              <a:rPr sz="1200" b="0" i="0">
+                <a:solidFill>
+                  <a:srgbClr val="3D4F6A"/>
+                </a:solidFill>
+                <a:latin typeface="Arial"/>
+              </a:rPr>
+              <a:t>Minimum days a year, paid within days of handover, a 'Certified TJ Trainer' title</a:t>
+            </a:r>
+          </a:p>
+          <a:p>
+            <a:pPr algn="l">
+              <a:spcAft>
+                <a:spcPts val="600"/>
+              </a:spcAft>
+            </a:pPr>
+            <a:r>
+              <a:rPr sz="1200" b="1" i="0">
+                <a:solidFill>
+                  <a:srgbClr val="9B3809"/>
+                </a:solidFill>
+                <a:latin typeface="Arial"/>
+              </a:rPr>
+              <a:t>•  </a:t>
+            </a:r>
+            <a:r>
+              <a:rPr sz="1200" b="1" i="0">
+                <a:solidFill>
+                  <a:srgbClr val="1E2A3A"/>
+                </a:solidFill>
+                <a:latin typeface="Arial"/>
+              </a:rPr>
+              <a:t>Certification as a product: </a:t>
+            </a:r>
+            <a:r>
+              <a:rPr sz="1200" b="0" i="0">
+                <a:solidFill>
+                  <a:srgbClr val="3D4F6A"/>
+                </a:solidFill>
+                <a:latin typeface="Arial"/>
+              </a:rPr>
+              <a:t>Clients pay for a trainer licence (Bank Elite); the best join our pool</a:t>
+            </a:r>
+          </a:p>
+          <a:p>
+            <a:pPr algn="l">
+              <a:spcAft>
+                <a:spcPts val="600"/>
+              </a:spcAft>
+            </a:pPr>
+            <a:r>
+              <a:rPr sz="1200" b="1" i="0">
+                <a:solidFill>
+                  <a:srgbClr val="9B3809"/>
+                </a:solidFill>
+                <a:latin typeface="Arial"/>
+              </a:rPr>
+              <a:t>•  </a:t>
+            </a:r>
+            <a:r>
+              <a:rPr sz="1200" b="1" i="0">
+                <a:solidFill>
+                  <a:srgbClr val="1E2A3A"/>
+                </a:solidFill>
+                <a:latin typeface="Arial"/>
+              </a:rPr>
+              <a:t>Trust that sells: </a:t>
+            </a:r>
+            <a:r>
+              <a:rPr sz="1200" b="0" i="0">
+                <a:solidFill>
+                  <a:srgbClr val="3D4F6A"/>
+                </a:solidFill>
+                <a:latin typeface="Arial"/>
+              </a:rPr>
+              <a:t>Lead trainers that regulators trust help win the next deal (slide 24)</a:t>
+            </a:r>
+          </a:p>
+        </p:txBody>
+      </p:sp>
+      <p:sp>
+        <p:nvSpPr>
+          <p:cNvPr id="17" name="Rounded Rectangle 16"/>
+          <p:cNvSpPr/>
+          <p:nvPr/>
+        </p:nvSpPr>
+        <p:spPr>
+          <a:xfrm>
+            <a:off x="6400800" y="4434840"/>
+            <a:ext cx="2468880" cy="960120"/>
+          </a:xfrm>
+          <a:prstGeom prst="roundRect">
+            <a:avLst>
+              <a:gd name="adj" fmla="val 6000"/>
+            </a:avLst>
+          </a:prstGeom>
+          <a:solidFill>
+            <a:srgbClr val="FFFFFF"/>
+          </a:solidFill>
+          <a:ln>
+            <a:noFill/>
+          </a:ln>
+          <a:effectLst/>
+        </p:spPr>
+        <p:style>
+          <a:lnRef idx="1">
+            <a:schemeClr val="accent1"/>
+          </a:lnRef>
+          <a:fillRef idx="3">
+            <a:schemeClr val="accent1"/>
+          </a:fillRef>
+          <a:effectRef idx="2">
+            <a:schemeClr val="accent1"/>
+          </a:effectRef>
+          <a:fontRef idx="minor">
+            <a:schemeClr val="lt1"/>
+          </a:fontRef>
+        </p:style>
+        <p:txBody>
+          <a:bodyPr rtlCol="0" anchor="ctr" wrap="square" lIns="164592" rIns="164592" tIns="36576" bIns="36576"/>
+          <a:lstStyle/>
+          <a:p>
+            <a:pPr algn="l">
+              <a:spcAft>
+                <a:spcPts val="200"/>
+              </a:spcAft>
+            </a:pPr>
+            <a:r>
+              <a:rPr sz="2200" b="1" i="0">
+                <a:solidFill>
+                  <a:srgbClr val="9B3809"/>
+                </a:solidFill>
+                <a:latin typeface="Georgia"/>
+              </a:rPr>
+              <a:t>Rp2.5M</a:t>
+            </a:r>
+          </a:p>
+          <a:p>
+            <a:pPr algn="l">
+              <a:spcAft>
+                <a:spcPts val="200"/>
+              </a:spcAft>
+            </a:pPr>
+            <a:r>
+              <a:rPr sz="1000" b="0" i="0">
+                <a:solidFill>
+                  <a:srgbClr val="3D4F6A"/>
+                </a:solidFill>
+                <a:latin typeface="Arial"/>
+              </a:rPr>
+              <a:t>to certify one trainer we grow ourselves</a:t>
+            </a:r>
+          </a:p>
+        </p:txBody>
+      </p:sp>
+      <p:sp>
+        <p:nvSpPr>
+          <p:cNvPr id="18" name="Rounded Rectangle 17"/>
+          <p:cNvSpPr/>
+          <p:nvPr/>
+        </p:nvSpPr>
+        <p:spPr>
+          <a:xfrm>
+            <a:off x="9006840" y="4434840"/>
+            <a:ext cx="2468880" cy="960120"/>
+          </a:xfrm>
+          <a:prstGeom prst="roundRect">
+            <a:avLst>
+              <a:gd name="adj" fmla="val 6000"/>
+            </a:avLst>
+          </a:prstGeom>
+          <a:solidFill>
+            <a:srgbClr val="FFFFFF"/>
+          </a:solidFill>
+          <a:ln>
+            <a:noFill/>
+          </a:ln>
+          <a:effectLst/>
+        </p:spPr>
+        <p:style>
+          <a:lnRef idx="1">
+            <a:schemeClr val="accent1"/>
+          </a:lnRef>
+          <a:fillRef idx="3">
+            <a:schemeClr val="accent1"/>
+          </a:fillRef>
+          <a:effectRef idx="2">
+            <a:schemeClr val="accent1"/>
+          </a:effectRef>
+          <a:fontRef idx="minor">
+            <a:schemeClr val="lt1"/>
+          </a:fontRef>
+        </p:style>
+        <p:txBody>
+          <a:bodyPr rtlCol="0" anchor="ctr" wrap="square" lIns="164592" rIns="164592" tIns="36576" bIns="36576"/>
+          <a:lstStyle/>
+          <a:p>
+            <a:pPr algn="l">
+              <a:spcAft>
+                <a:spcPts val="200"/>
+              </a:spcAft>
+            </a:pPr>
+            <a:r>
+              <a:rPr sz="2200" b="1" i="0">
+                <a:solidFill>
+                  <a:srgbClr val="9B3809"/>
+                </a:solidFill>
+                <a:latin typeface="Georgia"/>
+              </a:rPr>
+              <a:t>2.5x</a:t>
+            </a:r>
+          </a:p>
+          <a:p>
+            <a:pPr algn="l">
+              <a:spcAft>
+                <a:spcPts val="200"/>
+              </a:spcAft>
+            </a:pPr>
+            <a:r>
+              <a:rPr sz="1000" b="0" i="0">
+                <a:solidFill>
+                  <a:srgbClr val="3D4F6A"/>
+                </a:solidFill>
+                <a:latin typeface="Arial"/>
+              </a:rPr>
+              <a:t>what big-name trainers charge banks, vs our old rate</a:t>
+            </a:r>
+          </a:p>
+        </p:txBody>
+      </p:sp>
+      <p:sp>
+        <p:nvSpPr>
+          <p:cNvPr id="19" name="Rounded Rectangle 18"/>
+          <p:cNvSpPr/>
+          <p:nvPr/>
+        </p:nvSpPr>
+        <p:spPr>
+          <a:xfrm>
+            <a:off x="457200" y="5669280"/>
+            <a:ext cx="11247120" cy="621792"/>
+          </a:xfrm>
+          <a:prstGeom prst="roundRect">
+            <a:avLst>
+              <a:gd name="adj" fmla="val 6000"/>
+            </a:avLst>
+          </a:prstGeom>
+          <a:solidFill>
+            <a:srgbClr val="F5EDD8"/>
+          </a:solidFill>
+          <a:ln>
+            <a:noFill/>
+          </a:ln>
+          <a:effectLst/>
+        </p:spPr>
+        <p:style>
+          <a:lnRef idx="1">
+            <a:schemeClr val="accent1"/>
+          </a:lnRef>
+          <a:fillRef idx="3">
+            <a:schemeClr val="accent1"/>
+          </a:fillRef>
+          <a:effectRef idx="2">
+            <a:schemeClr val="accent1"/>
+          </a:effectRef>
+          <a:fontRef idx="minor">
+            <a:schemeClr val="lt1"/>
+          </a:fontRef>
+        </p:style>
+        <p:txBody>
+          <a:bodyPr rtlCol="0" anchor="ctr" wrap="square" lIns="182880" rIns="182880" tIns="36576" bIns="36576"/>
+          <a:lstStyle/>
+          <a:p>
+            <a:pPr algn="l">
+              <a:spcAft>
+                <a:spcPts val="400"/>
+              </a:spcAft>
+            </a:pPr>
+            <a:r>
+              <a:rPr sz="1200" b="1" i="0">
+                <a:solidFill>
+                  <a:srgbClr val="1E2A3A"/>
+                </a:solidFill>
+                <a:latin typeface="Arial"/>
+              </a:rPr>
+              <a:t>Guardrail: </a:t>
+            </a:r>
+            <a:r>
+              <a:rPr sz="1200" b="0" i="0">
+                <a:solidFill>
+                  <a:srgbClr val="3D4F6A"/>
+                </a:solidFill>
+                <a:latin typeface="Arial"/>
+              </a:rPr>
+              <a:t>we never cut what we pay trainers and psychologists. That is the People pillar and our fair-pay floor (slide 4). We cut the cost of finding them, and of finding clients.</a:t>
+            </a:r>
+          </a:p>
+        </p:txBody>
+      </p:sp>
+    </p:spTree>
+  </p:cSld>
+  <p:clrMapOvr>
+    <a:masterClrMapping/>
+  </p:clrMapOvr>
+</p:sld>
+</file>
+
+<file path=ppt/slides/slide36.xml><?xml version="1.0" encoding="utf-8"?>
+<p:sld xmlns:a="http://schemas.openxmlformats.org/drawingml/2006/main" xmlns:p="http://schemas.openxmlformats.org/presentationml/2006/main" xmlns:r="http://schemas.openxmlformats.org/officeDocument/2006/relationships">
+  <p:cSld>
+    <p:bg>
+      <p:bgPr>
+        <a:solidFill>
+          <a:srgbClr val="FAF7F2"/>
+        </a:solidFill>
+        <a:effectLst/>
+      </p:bgPr>
+    </p:bg>
+    <p:spTree>
+      <p:nvGrpSpPr>
+        <p:cNvPr id="1" name=""/>
+        <p:cNvGrpSpPr/>
+        <p:nvPr/>
+      </p:nvGrpSpPr>
+      <p:grpSpPr/>
+      <p:sp>
+        <p:nvSpPr>
+          <p:cNvPr id="2" name="Title"/>
+          <p:cNvSpPr txBox="1"/>
+          <p:nvPr/>
+        </p:nvSpPr>
+        <p:spPr>
+          <a:xfrm>
+            <a:off x="457200" y="329184"/>
+            <a:ext cx="9875520" cy="566928"/>
+          </a:xfrm>
+          <a:prstGeom prst="rect">
+            <a:avLst/>
+          </a:prstGeom>
+          <a:noFill/>
+        </p:spPr>
+        <p:txBody>
+          <a:bodyPr wrap="square" anchor="ctr" lIns="18288" rIns="18288" tIns="36576" bIns="36576">
+            <a:spAutoFit/>
+          </a:bodyPr>
+          <a:lstStyle/>
+          <a:p>
+            <a:pPr algn="l">
+              <a:spcAft>
+                <a:spcPts val="400"/>
+              </a:spcAft>
+            </a:pPr>
+            <a:r>
+              <a:rPr sz="2800" b="1" i="0">
+                <a:solidFill>
+                  <a:srgbClr val="1E2A3A"/>
+                </a:solidFill>
+                <a:latin typeface="Georgia"/>
+              </a:rPr>
+              <a:t>Lower acquisition cost lifts our margin to </a:t>
+            </a:r>
+            <a:r>
+              <a:rPr sz="2800" b="1" i="0">
+                <a:solidFill>
+                  <a:srgbClr val="9B3809"/>
+                </a:solidFill>
+                <a:latin typeface="Georgia"/>
+              </a:rPr>
+              <a:t>27.8%</a:t>
+            </a:r>
+            <a:r>
+              <a:rPr sz="2800" b="1" i="0">
+                <a:solidFill>
+                  <a:srgbClr val="1E2A3A"/>
+                </a:solidFill>
+                <a:latin typeface="Georgia"/>
+              </a:rPr>
+              <a:t/>
+            </a:r>
+          </a:p>
+        </p:txBody>
+      </p:sp>
+      <p:sp>
+        <p:nvSpPr>
+          <p:cNvPr id="3" name="Subtitle"/>
+          <p:cNvSpPr txBox="1"/>
+          <p:nvPr/>
+        </p:nvSpPr>
+        <p:spPr>
+          <a:xfrm>
+            <a:off x="457200" y="877824"/>
+            <a:ext cx="9875520" cy="365760"/>
+          </a:xfrm>
+          <a:prstGeom prst="rect">
+            <a:avLst/>
+          </a:prstGeom>
+          <a:noFill/>
+        </p:spPr>
+        <p:txBody>
+          <a:bodyPr wrap="square" anchor="t" lIns="18288" rIns="18288" tIns="36576" bIns="36576">
+            <a:spAutoFit/>
+          </a:bodyPr>
+          <a:lstStyle/>
+          <a:p>
+            <a:pPr algn="l">
+              <a:spcAft>
+                <a:spcPts val="400"/>
+              </a:spcAft>
+            </a:pPr>
+            <a:r>
+              <a:rPr sz="1400" b="0" i="0">
+                <a:solidFill>
+                  <a:srgbClr val="3D4F6A"/>
+                </a:solidFill>
+                <a:latin typeface="Arial"/>
+              </a:rPr>
+              <a:t>Our profit tree, read like a DuPont tree: black is the 2027 plan, red is after programs A and B.</a:t>
+            </a:r>
+          </a:p>
+        </p:txBody>
+      </p:sp>
+      <p:sp>
+        <p:nvSpPr>
+          <p:cNvPr id="4" name="Tag"/>
+          <p:cNvSpPr/>
+          <p:nvPr/>
+        </p:nvSpPr>
+        <p:spPr>
+          <a:xfrm>
+            <a:off x="10469880" y="420624"/>
+            <a:ext cx="1280160" cy="310896"/>
+          </a:xfrm>
+          <a:prstGeom prst="roundRect">
+            <a:avLst>
+              <a:gd name="adj" fmla="val 50000"/>
+            </a:avLst>
+          </a:prstGeom>
+          <a:solidFill>
+            <a:srgbClr val="EEE9DF"/>
+          </a:solidFill>
+          <a:ln>
+            <a:noFill/>
+          </a:ln>
+          <a:effectLst/>
+        </p:spPr>
+        <p:style>
+          <a:lnRef idx="1">
+            <a:schemeClr val="accent1"/>
+          </a:lnRef>
+          <a:fillRef idx="3">
+            <a:schemeClr val="accent1"/>
+          </a:fillRef>
+          <a:effectRef idx="2">
+            <a:schemeClr val="accent1"/>
+          </a:effectRef>
+          <a:fontRef idx="minor">
+            <a:schemeClr val="lt1"/>
+          </a:fontRef>
+        </p:style>
+        <p:txBody>
+          <a:bodyPr rtlCol="0" anchor="ctr" wrap="square" lIns="18288" rIns="18288" tIns="36576" bIns="36576"/>
+          <a:lstStyle/>
+          <a:p>
+            <a:pPr algn="ctr">
+              <a:spcAft>
+                <a:spcPts val="400"/>
+              </a:spcAft>
+            </a:pPr>
+            <a:r>
+              <a:rPr sz="1000" b="1" i="0">
+                <a:solidFill>
+                  <a:srgbClr val="6B7A99"/>
+                </a:solidFill>
+                <a:latin typeface="Arial"/>
+              </a:rPr>
+              <a:t>APPENDIX</a:t>
+            </a:r>
+          </a:p>
+        </p:txBody>
+      </p:sp>
+      <p:sp>
+        <p:nvSpPr>
+          <p:cNvPr id="5" name="Source"/>
+          <p:cNvSpPr txBox="1"/>
+          <p:nvPr/>
+        </p:nvSpPr>
+        <p:spPr>
+          <a:xfrm>
+            <a:off x="457200" y="6419088"/>
+            <a:ext cx="10607040" cy="292608"/>
+          </a:xfrm>
+          <a:prstGeom prst="rect">
+            <a:avLst/>
+          </a:prstGeom>
+          <a:noFill/>
+        </p:spPr>
+        <p:txBody>
+          <a:bodyPr wrap="square" anchor="t" lIns="73152" rIns="73152" tIns="36576" bIns="36576">
+            <a:spAutoFit/>
+          </a:bodyPr>
+          <a:lstStyle/>
+          <a:p>
+            <a:pPr algn="l">
+              <a:spcAft>
+                <a:spcPts val="400"/>
+              </a:spcAft>
+            </a:pPr>
+            <a:r>
+              <a:rPr sz="900" b="0" i="0">
+                <a:solidFill>
+                  <a:srgbClr val="6B7A99"/>
+                </a:solidFill>
+                <a:latin typeface="Arial"/>
+              </a:rPr>
+              <a:t>Source: Our model, current estimate for 2027, month by month. Program effects are estimates: same ad money wins twice the clients; clients pay half of trainer certification.</a:t>
+            </a:r>
+          </a:p>
+        </p:txBody>
+      </p:sp>
+      <p:sp>
+        <p:nvSpPr>
+          <p:cNvPr id="6" name="Page"/>
+          <p:cNvSpPr txBox="1"/>
+          <p:nvPr/>
+        </p:nvSpPr>
+        <p:spPr>
+          <a:xfrm>
+            <a:off x="11247120" y="6419088"/>
+            <a:ext cx="502920" cy="292608"/>
+          </a:xfrm>
+          <a:prstGeom prst="rect">
+            <a:avLst/>
+          </a:prstGeom>
+          <a:noFill/>
+        </p:spPr>
+        <p:txBody>
+          <a:bodyPr wrap="square" anchor="t" lIns="73152" rIns="73152" tIns="36576" bIns="36576">
+            <a:spAutoFit/>
+          </a:bodyPr>
+          <a:lstStyle/>
+          <a:p>
+            <a:pPr algn="r">
+              <a:spcAft>
+                <a:spcPts val="400"/>
+              </a:spcAft>
+            </a:pPr>
+            <a:r>
+              <a:rPr sz="1000" b="1" i="0">
+                <a:solidFill>
+                  <a:srgbClr val="6B7A99"/>
+                </a:solidFill>
+                <a:latin typeface="Arial"/>
+              </a:rPr>
+              <a:t>36</a:t>
+            </a:r>
+          </a:p>
+        </p:txBody>
+      </p:sp>
+      <p:sp>
+        <p:nvSpPr>
+          <p:cNvPr id="7" name="Rounded Rectangle 6"/>
+          <p:cNvSpPr/>
+          <p:nvPr/>
+        </p:nvSpPr>
+        <p:spPr>
+          <a:xfrm>
+            <a:off x="2194560" y="1371600"/>
+            <a:ext cx="3840480" cy="960120"/>
+          </a:xfrm>
+          <a:prstGeom prst="roundRect">
+            <a:avLst>
+              <a:gd name="adj" fmla="val 12000"/>
+            </a:avLst>
+          </a:prstGeom>
+          <a:solidFill>
+            <a:srgbClr val="EAF2FF"/>
+          </a:solidFill>
+          <a:ln>
+            <a:noFill/>
+          </a:ln>
+          <a:effectLst/>
+        </p:spPr>
+        <p:style>
+          <a:lnRef idx="1">
+            <a:schemeClr val="accent1"/>
+          </a:lnRef>
+          <a:fillRef idx="3">
+            <a:schemeClr val="accent1"/>
+          </a:fillRef>
+          <a:effectRef idx="2">
+            <a:schemeClr val="accent1"/>
+          </a:effectRef>
+          <a:fontRef idx="minor">
+            <a:schemeClr val="lt1"/>
+          </a:fontRef>
+        </p:style>
+        <p:txBody>
+          <a:bodyPr rtlCol="0" anchor="ctr" wrap="square" lIns="45720" rIns="45720" tIns="36576" bIns="36576"/>
+          <a:lstStyle/>
+          <a:p>
+            <a:pPr algn="ctr">
+              <a:spcAft>
+                <a:spcPts val="0"/>
+              </a:spcAft>
+            </a:pPr>
+            <a:r>
+              <a:rPr sz="1200" b="1" i="0">
+                <a:solidFill>
+                  <a:srgbClr val="1E2A3A"/>
+                </a:solidFill>
+                <a:latin typeface="Arial"/>
+              </a:rPr>
+              <a:t>Net profit (net margin)</a:t>
+            </a:r>
+          </a:p>
+          <a:p>
+            <a:pPr algn="ctr">
+              <a:spcAft>
+                <a:spcPts val="0"/>
+              </a:spcAft>
+            </a:pPr>
+            <a:r>
+              <a:rPr sz="1800" b="1" i="0">
+                <a:solidFill>
+                  <a:srgbClr val="1E2A3A"/>
+                </a:solidFill>
+                <a:latin typeface="Georgia"/>
+              </a:rPr>
+              <a:t>532 (26.1%)</a:t>
+            </a:r>
+            <a:r>
+              <a:rPr sz="1800" b="1" i="0">
+                <a:solidFill>
+                  <a:srgbClr val="9B3809"/>
+                </a:solidFill>
+                <a:latin typeface="Georgia"/>
+              </a:rPr>
+              <a:t>  →  567 (27.8%)</a:t>
+            </a:r>
+          </a:p>
+        </p:txBody>
+      </p:sp>
+      <p:cxnSp>
+        <p:nvCxnSpPr>
+          <p:cNvPr id="8" name="Connector 7"/>
+          <p:cNvCxnSpPr/>
+          <p:nvPr/>
+        </p:nvCxnSpPr>
+        <p:spPr>
+          <a:xfrm>
+            <a:off x="4114800" y="2331720"/>
+            <a:ext cx="0" cy="228600"/>
+          </a:xfrm>
+          <a:prstGeom prst="line">
+            <a:avLst/>
+          </a:prstGeom>
+          <a:ln w="15875">
+            <a:solidFill>
+              <a:srgbClr val="6B7A99"/>
+            </a:solidFill>
+          </a:ln>
+        </p:spPr>
+        <p:style>
+          <a:lnRef idx="2">
+            <a:schemeClr val="accent1"/>
+          </a:lnRef>
+          <a:fillRef idx="0">
+            <a:schemeClr val="accent1"/>
+          </a:fillRef>
+          <a:effectRef idx="1">
+            <a:schemeClr val="accent1"/>
+          </a:effectRef>
+          <a:fontRef idx="minor">
+            <a:schemeClr val="tx1"/>
+          </a:fontRef>
+        </p:style>
+      </p:cxnSp>
+      <p:cxnSp>
+        <p:nvCxnSpPr>
+          <p:cNvPr id="9" name="Connector 8"/>
+          <p:cNvCxnSpPr/>
+          <p:nvPr/>
+        </p:nvCxnSpPr>
+        <p:spPr>
+          <a:xfrm>
+            <a:off x="1280160" y="2560320"/>
+            <a:ext cx="5623560" cy="0"/>
+          </a:xfrm>
+          <a:prstGeom prst="line">
+            <a:avLst/>
+          </a:prstGeom>
+          <a:ln w="15875">
+            <a:solidFill>
+              <a:srgbClr val="6B7A99"/>
+            </a:solidFill>
+          </a:ln>
+        </p:spPr>
+        <p:style>
+          <a:lnRef idx="2">
+            <a:schemeClr val="accent1"/>
+          </a:lnRef>
+          <a:fillRef idx="0">
+            <a:schemeClr val="accent1"/>
+          </a:fillRef>
+          <a:effectRef idx="1">
+            <a:schemeClr val="accent1"/>
+          </a:effectRef>
+          <a:fontRef idx="minor">
+            <a:schemeClr val="tx1"/>
+          </a:fontRef>
+        </p:style>
+      </p:cxnSp>
+      <p:cxnSp>
+        <p:nvCxnSpPr>
+          <p:cNvPr id="10" name="Connector 9"/>
+          <p:cNvCxnSpPr/>
+          <p:nvPr/>
+        </p:nvCxnSpPr>
+        <p:spPr>
+          <a:xfrm>
+            <a:off x="1280160" y="2560320"/>
+            <a:ext cx="0" cy="228600"/>
+          </a:xfrm>
+          <a:prstGeom prst="line">
+            <a:avLst/>
+          </a:prstGeom>
+          <a:ln w="15875">
+            <a:solidFill>
+              <a:srgbClr val="6B7A99"/>
+            </a:solidFill>
+          </a:ln>
+        </p:spPr>
+        <p:style>
+          <a:lnRef idx="2">
+            <a:schemeClr val="accent1"/>
+          </a:lnRef>
+          <a:fillRef idx="0">
+            <a:schemeClr val="accent1"/>
+          </a:fillRef>
+          <a:effectRef idx="1">
+            <a:schemeClr val="accent1"/>
+          </a:effectRef>
+          <a:fontRef idx="minor">
+            <a:schemeClr val="tx1"/>
+          </a:fontRef>
+        </p:style>
+      </p:cxnSp>
+      <p:sp>
+        <p:nvSpPr>
+          <p:cNvPr id="11" name="Rounded Rectangle 10"/>
+          <p:cNvSpPr/>
+          <p:nvPr/>
+        </p:nvSpPr>
+        <p:spPr>
+          <a:xfrm>
+            <a:off x="457200" y="2788920"/>
+            <a:ext cx="1645920" cy="1051560"/>
+          </a:xfrm>
+          <a:prstGeom prst="roundRect">
+            <a:avLst>
+              <a:gd name="adj" fmla="val 12000"/>
+            </a:avLst>
+          </a:prstGeom>
+          <a:solidFill>
+            <a:srgbClr val="EAF2FF"/>
+          </a:solidFill>
+          <a:ln>
+            <a:noFill/>
+          </a:ln>
+          <a:effectLst/>
+        </p:spPr>
+        <p:style>
+          <a:lnRef idx="1">
+            <a:schemeClr val="accent1"/>
+          </a:lnRef>
+          <a:fillRef idx="3">
+            <a:schemeClr val="accent1"/>
+          </a:fillRef>
+          <a:effectRef idx="2">
+            <a:schemeClr val="accent1"/>
+          </a:effectRef>
+          <a:fontRef idx="minor">
+            <a:schemeClr val="lt1"/>
+          </a:fontRef>
+        </p:style>
+        <p:txBody>
+          <a:bodyPr rtlCol="0" anchor="ctr" wrap="square" lIns="45720" rIns="45720" tIns="36576" bIns="36576"/>
+          <a:lstStyle/>
+          <a:p>
+            <a:pPr algn="ctr">
+              <a:spcAft>
+                <a:spcPts val="0"/>
+              </a:spcAft>
+            </a:pPr>
+            <a:r>
+              <a:rPr sz="1200" b="1" i="0">
+                <a:solidFill>
+                  <a:srgbClr val="1E2A3A"/>
+                </a:solidFill>
+                <a:latin typeface="Arial"/>
+              </a:rPr>
+              <a:t>Sales</a:t>
+            </a:r>
+          </a:p>
+          <a:p>
+            <a:pPr algn="ctr">
+              <a:spcAft>
+                <a:spcPts val="0"/>
+              </a:spcAft>
+            </a:pPr>
+            <a:r>
+              <a:rPr sz="1800" b="1" i="0">
+                <a:solidFill>
+                  <a:srgbClr val="1E2A3A"/>
+                </a:solidFill>
+                <a:latin typeface="Georgia"/>
+              </a:rPr>
+              <a:t>2,040</a:t>
+            </a:r>
+          </a:p>
+          <a:p>
+            <a:pPr algn="ctr">
+              <a:spcAft>
+                <a:spcPts val="0"/>
+              </a:spcAft>
+            </a:pPr>
+            <a:r>
+              <a:rPr sz="1000" b="0" i="0">
+                <a:solidFill>
+                  <a:srgbClr val="6B7A99"/>
+                </a:solidFill>
+                <a:latin typeface="Arial"/>
+              </a:rPr>
+              <a:t>same</a:t>
+            </a:r>
+          </a:p>
+        </p:txBody>
+      </p:sp>
+      <p:cxnSp>
+        <p:nvCxnSpPr>
+          <p:cNvPr id="12" name="Connector 11"/>
+          <p:cNvCxnSpPr/>
+          <p:nvPr/>
+        </p:nvCxnSpPr>
+        <p:spPr>
+          <a:xfrm>
+            <a:off x="3154679" y="2560320"/>
+            <a:ext cx="0" cy="228600"/>
+          </a:xfrm>
+          <a:prstGeom prst="line">
+            <a:avLst/>
+          </a:prstGeom>
+          <a:ln w="15875">
+            <a:solidFill>
+              <a:srgbClr val="6B7A99"/>
+            </a:solidFill>
+          </a:ln>
+        </p:spPr>
+        <p:style>
+          <a:lnRef idx="2">
+            <a:schemeClr val="accent1"/>
+          </a:lnRef>
+          <a:fillRef idx="0">
+            <a:schemeClr val="accent1"/>
+          </a:fillRef>
+          <a:effectRef idx="1">
+            <a:schemeClr val="accent1"/>
+          </a:effectRef>
+          <a:fontRef idx="minor">
+            <a:schemeClr val="tx1"/>
+          </a:fontRef>
+        </p:style>
+      </p:cxnSp>
+      <p:sp>
+        <p:nvSpPr>
+          <p:cNvPr id="13" name="Rounded Rectangle 12"/>
+          <p:cNvSpPr/>
+          <p:nvPr/>
+        </p:nvSpPr>
+        <p:spPr>
+          <a:xfrm>
+            <a:off x="2331720" y="2788920"/>
+            <a:ext cx="1645920" cy="1051560"/>
+          </a:xfrm>
+          <a:prstGeom prst="roundRect">
+            <a:avLst>
+              <a:gd name="adj" fmla="val 12000"/>
+            </a:avLst>
+          </a:prstGeom>
+          <a:solidFill>
+            <a:srgbClr val="EAF2FF"/>
+          </a:solidFill>
+          <a:ln>
+            <a:noFill/>
+          </a:ln>
+          <a:effectLst/>
+        </p:spPr>
+        <p:style>
+          <a:lnRef idx="1">
+            <a:schemeClr val="accent1"/>
+          </a:lnRef>
+          <a:fillRef idx="3">
+            <a:schemeClr val="accent1"/>
+          </a:fillRef>
+          <a:effectRef idx="2">
+            <a:schemeClr val="accent1"/>
+          </a:effectRef>
+          <a:fontRef idx="minor">
+            <a:schemeClr val="lt1"/>
+          </a:fontRef>
+        </p:style>
+        <p:txBody>
+          <a:bodyPr rtlCol="0" anchor="ctr" wrap="square" lIns="45720" rIns="45720" tIns="36576" bIns="36576"/>
+          <a:lstStyle/>
+          <a:p>
+            <a:pPr algn="ctr">
+              <a:spcAft>
+                <a:spcPts val="0"/>
+              </a:spcAft>
+            </a:pPr>
+            <a:r>
+              <a:rPr sz="1200" b="1" i="0">
+                <a:solidFill>
+                  <a:srgbClr val="1E2A3A"/>
+                </a:solidFill>
+                <a:latin typeface="Arial"/>
+              </a:rPr>
+              <a:t>Delivery cost</a:t>
+            </a:r>
+          </a:p>
+          <a:p>
+            <a:pPr algn="ctr">
+              <a:spcAft>
+                <a:spcPts val="0"/>
+              </a:spcAft>
+            </a:pPr>
+            <a:r>
+              <a:rPr sz="1800" b="1" i="0">
+                <a:solidFill>
+                  <a:srgbClr val="1E2A3A"/>
+                </a:solidFill>
+                <a:latin typeface="Georgia"/>
+              </a:rPr>
+              <a:t>663</a:t>
+            </a:r>
+          </a:p>
+          <a:p>
+            <a:pPr algn="ctr">
+              <a:spcAft>
+                <a:spcPts val="0"/>
+              </a:spcAft>
+            </a:pPr>
+            <a:r>
+              <a:rPr sz="1000" b="0" i="0">
+                <a:solidFill>
+                  <a:srgbClr val="6B7A99"/>
+                </a:solidFill>
+                <a:latin typeface="Arial"/>
+              </a:rPr>
+              <a:t>trainer and psychologist fees: never cut</a:t>
+            </a:r>
+          </a:p>
+        </p:txBody>
+      </p:sp>
+      <p:cxnSp>
+        <p:nvCxnSpPr>
+          <p:cNvPr id="14" name="Connector 13"/>
+          <p:cNvCxnSpPr/>
+          <p:nvPr/>
+        </p:nvCxnSpPr>
+        <p:spPr>
+          <a:xfrm>
+            <a:off x="5029200" y="2560320"/>
+            <a:ext cx="0" cy="228600"/>
+          </a:xfrm>
+          <a:prstGeom prst="line">
+            <a:avLst/>
+          </a:prstGeom>
+          <a:ln w="15875">
+            <a:solidFill>
+              <a:srgbClr val="6B7A99"/>
+            </a:solidFill>
+          </a:ln>
+        </p:spPr>
+        <p:style>
+          <a:lnRef idx="2">
+            <a:schemeClr val="accent1"/>
+          </a:lnRef>
+          <a:fillRef idx="0">
+            <a:schemeClr val="accent1"/>
+          </a:fillRef>
+          <a:effectRef idx="1">
+            <a:schemeClr val="accent1"/>
+          </a:effectRef>
+          <a:fontRef idx="minor">
+            <a:schemeClr val="tx1"/>
+          </a:fontRef>
+        </p:style>
+      </p:cxnSp>
+      <p:sp>
+        <p:nvSpPr>
+          <p:cNvPr id="15" name="Rounded Rectangle 14"/>
+          <p:cNvSpPr/>
+          <p:nvPr/>
+        </p:nvSpPr>
+        <p:spPr>
+          <a:xfrm>
+            <a:off x="4206240" y="2788920"/>
+            <a:ext cx="1645920" cy="1051560"/>
+          </a:xfrm>
+          <a:prstGeom prst="roundRect">
+            <a:avLst>
+              <a:gd name="adj" fmla="val 12000"/>
+            </a:avLst>
+          </a:prstGeom>
+          <a:solidFill>
+            <a:srgbClr val="EAF2FF"/>
+          </a:solidFill>
+          <a:ln>
+            <a:noFill/>
+          </a:ln>
+          <a:effectLst/>
+        </p:spPr>
+        <p:style>
+          <a:lnRef idx="1">
+            <a:schemeClr val="accent1"/>
+          </a:lnRef>
+          <a:fillRef idx="3">
+            <a:schemeClr val="accent1"/>
+          </a:fillRef>
+          <a:effectRef idx="2">
+            <a:schemeClr val="accent1"/>
+          </a:effectRef>
+          <a:fontRef idx="minor">
+            <a:schemeClr val="lt1"/>
+          </a:fontRef>
+        </p:style>
+        <p:txBody>
+          <a:bodyPr rtlCol="0" anchor="ctr" wrap="square" lIns="45720" rIns="45720" tIns="36576" bIns="36576"/>
+          <a:lstStyle/>
+          <a:p>
+            <a:pPr algn="ctr">
+              <a:spcAft>
+                <a:spcPts val="0"/>
+              </a:spcAft>
+            </a:pPr>
+            <a:r>
+              <a:rPr sz="1200" b="1" i="0">
+                <a:solidFill>
+                  <a:srgbClr val="1E2A3A"/>
+                </a:solidFill>
+                <a:latin typeface="Arial"/>
+              </a:rPr>
+              <a:t>Running cost</a:t>
+            </a:r>
+          </a:p>
+          <a:p>
+            <a:pPr algn="ctr">
+              <a:spcAft>
+                <a:spcPts val="0"/>
+              </a:spcAft>
+            </a:pPr>
+            <a:r>
+              <a:rPr sz="1800" b="1" i="0">
+                <a:solidFill>
+                  <a:srgbClr val="1E2A3A"/>
+                </a:solidFill>
+                <a:latin typeface="Georgia"/>
+              </a:rPr>
+              <a:t>835</a:t>
+            </a:r>
+            <a:r>
+              <a:rPr sz="1800" b="1" i="0">
+                <a:solidFill>
+                  <a:srgbClr val="9B3809"/>
+                </a:solidFill>
+                <a:latin typeface="Georgia"/>
+              </a:rPr>
+              <a:t>  →  800</a:t>
+            </a:r>
+          </a:p>
+        </p:txBody>
+      </p:sp>
+      <p:cxnSp>
+        <p:nvCxnSpPr>
+          <p:cNvPr id="16" name="Connector 15"/>
+          <p:cNvCxnSpPr/>
+          <p:nvPr/>
+        </p:nvCxnSpPr>
+        <p:spPr>
+          <a:xfrm>
+            <a:off x="6903720" y="2560320"/>
+            <a:ext cx="0" cy="228600"/>
+          </a:xfrm>
+          <a:prstGeom prst="line">
+            <a:avLst/>
+          </a:prstGeom>
+          <a:ln w="15875">
+            <a:solidFill>
+              <a:srgbClr val="6B7A99"/>
+            </a:solidFill>
+          </a:ln>
+        </p:spPr>
+        <p:style>
+          <a:lnRef idx="2">
+            <a:schemeClr val="accent1"/>
+          </a:lnRef>
+          <a:fillRef idx="0">
+            <a:schemeClr val="accent1"/>
+          </a:fillRef>
+          <a:effectRef idx="1">
+            <a:schemeClr val="accent1"/>
+          </a:effectRef>
+          <a:fontRef idx="minor">
+            <a:schemeClr val="tx1"/>
+          </a:fontRef>
+        </p:style>
+      </p:cxnSp>
+      <p:sp>
+        <p:nvSpPr>
+          <p:cNvPr id="17" name="Rounded Rectangle 16"/>
+          <p:cNvSpPr/>
+          <p:nvPr/>
+        </p:nvSpPr>
+        <p:spPr>
+          <a:xfrm>
+            <a:off x="6080759" y="2788920"/>
+            <a:ext cx="1645920" cy="1051560"/>
+          </a:xfrm>
+          <a:prstGeom prst="roundRect">
+            <a:avLst>
+              <a:gd name="adj" fmla="val 12000"/>
+            </a:avLst>
+          </a:prstGeom>
+          <a:solidFill>
+            <a:srgbClr val="EAF2FF"/>
+          </a:solidFill>
+          <a:ln>
+            <a:noFill/>
+          </a:ln>
+          <a:effectLst/>
+        </p:spPr>
+        <p:style>
+          <a:lnRef idx="1">
+            <a:schemeClr val="accent1"/>
+          </a:lnRef>
+          <a:fillRef idx="3">
+            <a:schemeClr val="accent1"/>
+          </a:fillRef>
+          <a:effectRef idx="2">
+            <a:schemeClr val="accent1"/>
+          </a:effectRef>
+          <a:fontRef idx="minor">
+            <a:schemeClr val="lt1"/>
+          </a:fontRef>
+        </p:style>
+        <p:txBody>
+          <a:bodyPr rtlCol="0" anchor="ctr" wrap="square" lIns="45720" rIns="45720" tIns="36576" bIns="36576"/>
+          <a:lstStyle/>
+          <a:p>
+            <a:pPr algn="ctr">
+              <a:spcAft>
+                <a:spcPts val="0"/>
+              </a:spcAft>
+            </a:pPr>
+            <a:r>
+              <a:rPr sz="1200" b="1" i="0">
+                <a:solidFill>
+                  <a:srgbClr val="1E2A3A"/>
+                </a:solidFill>
+                <a:latin typeface="Arial"/>
+              </a:rPr>
+              <a:t>Tax</a:t>
+            </a:r>
+          </a:p>
+          <a:p>
+            <a:pPr algn="ctr">
+              <a:spcAft>
+                <a:spcPts val="0"/>
+              </a:spcAft>
+            </a:pPr>
+            <a:r>
+              <a:rPr sz="1800" b="1" i="0">
+                <a:solidFill>
+                  <a:srgbClr val="1E2A3A"/>
+                </a:solidFill>
+                <a:latin typeface="Georgia"/>
+              </a:rPr>
+              <a:t>10</a:t>
+            </a:r>
+          </a:p>
+          <a:p>
+            <a:pPr algn="ctr">
+              <a:spcAft>
+                <a:spcPts val="0"/>
+              </a:spcAft>
+            </a:pPr>
+            <a:r>
+              <a:rPr sz="1000" b="0" i="0">
+                <a:solidFill>
+                  <a:srgbClr val="6B7A99"/>
+                </a:solidFill>
+                <a:latin typeface="Arial"/>
+              </a:rPr>
+              <a:t>0.5% of sales</a:t>
+            </a:r>
+          </a:p>
+        </p:txBody>
+      </p:sp>
+      <p:cxnSp>
+        <p:nvCxnSpPr>
+          <p:cNvPr id="18" name="Connector 17"/>
+          <p:cNvCxnSpPr/>
+          <p:nvPr/>
+        </p:nvCxnSpPr>
+        <p:spPr>
+          <a:xfrm>
+            <a:off x="5029200" y="3840480"/>
+            <a:ext cx="0" cy="365760"/>
+          </a:xfrm>
+          <a:prstGeom prst="line">
+            <a:avLst/>
+          </a:prstGeom>
+          <a:ln w="15875">
+            <a:solidFill>
+              <a:srgbClr val="6B7A99"/>
+            </a:solidFill>
+          </a:ln>
+        </p:spPr>
+        <p:style>
+          <a:lnRef idx="2">
+            <a:schemeClr val="accent1"/>
+          </a:lnRef>
+          <a:fillRef idx="0">
+            <a:schemeClr val="accent1"/>
+          </a:fillRef>
+          <a:effectRef idx="1">
+            <a:schemeClr val="accent1"/>
+          </a:effectRef>
+          <a:fontRef idx="minor">
+            <a:schemeClr val="tx1"/>
+          </a:fontRef>
+        </p:style>
+      </p:cxnSp>
+      <p:cxnSp>
+        <p:nvCxnSpPr>
+          <p:cNvPr id="19" name="Connector 18"/>
+          <p:cNvCxnSpPr/>
+          <p:nvPr/>
+        </p:nvCxnSpPr>
+        <p:spPr>
+          <a:xfrm>
+            <a:off x="3154679" y="4206240"/>
+            <a:ext cx="3749041" cy="0"/>
+          </a:xfrm>
+          <a:prstGeom prst="line">
+            <a:avLst/>
+          </a:prstGeom>
+          <a:ln w="15875">
+            <a:solidFill>
+              <a:srgbClr val="6B7A99"/>
+            </a:solidFill>
+          </a:ln>
+        </p:spPr>
+        <p:style>
+          <a:lnRef idx="2">
+            <a:schemeClr val="accent1"/>
+          </a:lnRef>
+          <a:fillRef idx="0">
+            <a:schemeClr val="accent1"/>
+          </a:fillRef>
+          <a:effectRef idx="1">
+            <a:schemeClr val="accent1"/>
+          </a:effectRef>
+          <a:fontRef idx="minor">
+            <a:schemeClr val="tx1"/>
+          </a:fontRef>
+        </p:style>
+      </p:cxnSp>
+      <p:cxnSp>
+        <p:nvCxnSpPr>
+          <p:cNvPr id="20" name="Connector 19"/>
+          <p:cNvCxnSpPr/>
+          <p:nvPr/>
+        </p:nvCxnSpPr>
+        <p:spPr>
+          <a:xfrm>
+            <a:off x="3154679" y="4206240"/>
+            <a:ext cx="0" cy="137160"/>
+          </a:xfrm>
+          <a:prstGeom prst="line">
+            <a:avLst/>
+          </a:prstGeom>
+          <a:ln w="15875">
+            <a:solidFill>
+              <a:srgbClr val="6B7A99"/>
+            </a:solidFill>
+          </a:ln>
+        </p:spPr>
+        <p:style>
+          <a:lnRef idx="2">
+            <a:schemeClr val="accent1"/>
+          </a:lnRef>
+          <a:fillRef idx="0">
+            <a:schemeClr val="accent1"/>
+          </a:fillRef>
+          <a:effectRef idx="1">
+            <a:schemeClr val="accent1"/>
+          </a:effectRef>
+          <a:fontRef idx="minor">
+            <a:schemeClr val="tx1"/>
+          </a:fontRef>
+        </p:style>
+      </p:cxnSp>
+      <p:sp>
+        <p:nvSpPr>
+          <p:cNvPr id="21" name="Rounded Rectangle 20"/>
+          <p:cNvSpPr/>
+          <p:nvPr/>
+        </p:nvSpPr>
+        <p:spPr>
+          <a:xfrm>
+            <a:off x="2331720" y="4343400"/>
+            <a:ext cx="1645920" cy="1051560"/>
+          </a:xfrm>
+          <a:prstGeom prst="roundRect">
+            <a:avLst>
+              <a:gd name="adj" fmla="val 12000"/>
+            </a:avLst>
+          </a:prstGeom>
+          <a:solidFill>
+            <a:srgbClr val="F5EDD8"/>
+          </a:solidFill>
+          <a:ln>
+            <a:noFill/>
+          </a:ln>
+          <a:effectLst/>
+        </p:spPr>
+        <p:style>
+          <a:lnRef idx="1">
+            <a:schemeClr val="accent1"/>
+          </a:lnRef>
+          <a:fillRef idx="3">
+            <a:schemeClr val="accent1"/>
+          </a:fillRef>
+          <a:effectRef idx="2">
+            <a:schemeClr val="accent1"/>
+          </a:effectRef>
+          <a:fontRef idx="minor">
+            <a:schemeClr val="lt1"/>
+          </a:fontRef>
+        </p:style>
+        <p:txBody>
+          <a:bodyPr rtlCol="0" anchor="ctr" wrap="square" lIns="45720" rIns="45720" tIns="36576" bIns="36576"/>
+          <a:lstStyle/>
+          <a:p>
+            <a:pPr algn="ctr">
+              <a:spcAft>
+                <a:spcPts val="0"/>
+              </a:spcAft>
+            </a:pPr>
+            <a:r>
+              <a:rPr sz="1200" b="1" i="0">
+                <a:solidFill>
+                  <a:srgbClr val="1E2A3A"/>
+                </a:solidFill>
+                <a:latin typeface="Arial"/>
+              </a:rPr>
+              <a:t>Winning clients: ads</a:t>
+            </a:r>
+          </a:p>
+          <a:p>
+            <a:pPr algn="ctr">
+              <a:spcAft>
+                <a:spcPts val="0"/>
+              </a:spcAft>
+            </a:pPr>
+            <a:r>
+              <a:rPr sz="1800" b="1" i="0">
+                <a:solidFill>
+                  <a:srgbClr val="1E2A3A"/>
+                </a:solidFill>
+                <a:latin typeface="Georgia"/>
+              </a:rPr>
+              <a:t>54</a:t>
+            </a:r>
+            <a:r>
+              <a:rPr sz="1800" b="1" i="0">
+                <a:solidFill>
+                  <a:srgbClr val="9B3809"/>
+                </a:solidFill>
+                <a:latin typeface="Georgia"/>
+              </a:rPr>
+              <a:t>  →  27</a:t>
+            </a:r>
+          </a:p>
+          <a:p>
+            <a:pPr algn="ctr">
+              <a:spcAft>
+                <a:spcPts val="0"/>
+              </a:spcAft>
+            </a:pPr>
+            <a:r>
+              <a:rPr sz="1000" b="0" i="0">
+                <a:solidFill>
+                  <a:srgbClr val="6B7A99"/>
+                </a:solidFill>
+                <a:latin typeface="Arial"/>
+              </a:rPr>
+              <a:t>program A</a:t>
+            </a:r>
+          </a:p>
+        </p:txBody>
+      </p:sp>
+      <p:cxnSp>
+        <p:nvCxnSpPr>
+          <p:cNvPr id="22" name="Connector 21"/>
+          <p:cNvCxnSpPr/>
+          <p:nvPr/>
+        </p:nvCxnSpPr>
+        <p:spPr>
+          <a:xfrm>
+            <a:off x="5029200" y="4206240"/>
+            <a:ext cx="0" cy="137160"/>
+          </a:xfrm>
+          <a:prstGeom prst="line">
+            <a:avLst/>
+          </a:prstGeom>
+          <a:ln w="15875">
+            <a:solidFill>
+              <a:srgbClr val="6B7A99"/>
+            </a:solidFill>
+          </a:ln>
+        </p:spPr>
+        <p:style>
+          <a:lnRef idx="2">
+            <a:schemeClr val="accent1"/>
+          </a:lnRef>
+          <a:fillRef idx="0">
+            <a:schemeClr val="accent1"/>
+          </a:fillRef>
+          <a:effectRef idx="1">
+            <a:schemeClr val="accent1"/>
+          </a:effectRef>
+          <a:fontRef idx="minor">
+            <a:schemeClr val="tx1"/>
+          </a:fontRef>
+        </p:style>
+      </p:cxnSp>
+      <p:sp>
+        <p:nvSpPr>
+          <p:cNvPr id="23" name="Rounded Rectangle 22"/>
+          <p:cNvSpPr/>
+          <p:nvPr/>
+        </p:nvSpPr>
+        <p:spPr>
+          <a:xfrm>
+            <a:off x="4206240" y="4343400"/>
+            <a:ext cx="1645920" cy="1051560"/>
+          </a:xfrm>
+          <a:prstGeom prst="roundRect">
+            <a:avLst>
+              <a:gd name="adj" fmla="val 12000"/>
+            </a:avLst>
+          </a:prstGeom>
+          <a:solidFill>
+            <a:srgbClr val="F5EDD8"/>
+          </a:solidFill>
+          <a:ln>
+            <a:noFill/>
+          </a:ln>
+          <a:effectLst/>
+        </p:spPr>
+        <p:style>
+          <a:lnRef idx="1">
+            <a:schemeClr val="accent1"/>
+          </a:lnRef>
+          <a:fillRef idx="3">
+            <a:schemeClr val="accent1"/>
+          </a:fillRef>
+          <a:effectRef idx="2">
+            <a:schemeClr val="accent1"/>
+          </a:effectRef>
+          <a:fontRef idx="minor">
+            <a:schemeClr val="lt1"/>
+          </a:fontRef>
+        </p:style>
+        <p:txBody>
+          <a:bodyPr rtlCol="0" anchor="ctr" wrap="square" lIns="45720" rIns="45720" tIns="36576" bIns="36576"/>
+          <a:lstStyle/>
+          <a:p>
+            <a:pPr algn="ctr">
+              <a:spcAft>
+                <a:spcPts val="0"/>
+              </a:spcAft>
+            </a:pPr>
+            <a:r>
+              <a:rPr sz="1200" b="1" i="0">
+                <a:solidFill>
+                  <a:srgbClr val="1E2A3A"/>
+                </a:solidFill>
+                <a:latin typeface="Arial"/>
+              </a:rPr>
+              <a:t>Certifying trainers</a:t>
+            </a:r>
+          </a:p>
+          <a:p>
+            <a:pPr algn="ctr">
+              <a:spcAft>
+                <a:spcPts val="0"/>
+              </a:spcAft>
+            </a:pPr>
+            <a:r>
+              <a:rPr sz="1800" b="1" i="0">
+                <a:solidFill>
+                  <a:srgbClr val="1E2A3A"/>
+                </a:solidFill>
+                <a:latin typeface="Georgia"/>
+              </a:rPr>
+              <a:t>15</a:t>
+            </a:r>
+            <a:r>
+              <a:rPr sz="1800" b="1" i="0">
+                <a:solidFill>
+                  <a:srgbClr val="9B3809"/>
+                </a:solidFill>
+                <a:latin typeface="Georgia"/>
+              </a:rPr>
+              <a:t>  →  7.5</a:t>
+            </a:r>
+          </a:p>
+          <a:p>
+            <a:pPr algn="ctr">
+              <a:spcAft>
+                <a:spcPts val="0"/>
+              </a:spcAft>
+            </a:pPr>
+            <a:r>
+              <a:rPr sz="1000" b="0" i="0">
+                <a:solidFill>
+                  <a:srgbClr val="6B7A99"/>
+                </a:solidFill>
+                <a:latin typeface="Arial"/>
+              </a:rPr>
+              <a:t>program B</a:t>
+            </a:r>
+          </a:p>
+        </p:txBody>
+      </p:sp>
+      <p:cxnSp>
+        <p:nvCxnSpPr>
+          <p:cNvPr id="24" name="Connector 23"/>
+          <p:cNvCxnSpPr/>
+          <p:nvPr/>
+        </p:nvCxnSpPr>
+        <p:spPr>
+          <a:xfrm>
+            <a:off x="6903720" y="4206240"/>
+            <a:ext cx="0" cy="137160"/>
+          </a:xfrm>
+          <a:prstGeom prst="line">
+            <a:avLst/>
+          </a:prstGeom>
+          <a:ln w="15875">
+            <a:solidFill>
+              <a:srgbClr val="6B7A99"/>
+            </a:solidFill>
+          </a:ln>
+        </p:spPr>
+        <p:style>
+          <a:lnRef idx="2">
+            <a:schemeClr val="accent1"/>
+          </a:lnRef>
+          <a:fillRef idx="0">
+            <a:schemeClr val="accent1"/>
+          </a:fillRef>
+          <a:effectRef idx="1">
+            <a:schemeClr val="accent1"/>
+          </a:effectRef>
+          <a:fontRef idx="minor">
+            <a:schemeClr val="tx1"/>
+          </a:fontRef>
+        </p:style>
+      </p:cxnSp>
+      <p:sp>
+        <p:nvSpPr>
+          <p:cNvPr id="25" name="Rounded Rectangle 24"/>
+          <p:cNvSpPr/>
+          <p:nvPr/>
+        </p:nvSpPr>
+        <p:spPr>
+          <a:xfrm>
+            <a:off x="6080759" y="4343400"/>
+            <a:ext cx="1645920" cy="1051560"/>
+          </a:xfrm>
+          <a:prstGeom prst="roundRect">
+            <a:avLst>
+              <a:gd name="adj" fmla="val 12000"/>
+            </a:avLst>
+          </a:prstGeom>
+          <a:solidFill>
+            <a:srgbClr val="EAF2FF"/>
+          </a:solidFill>
+          <a:ln>
+            <a:noFill/>
+          </a:ln>
+          <a:effectLst/>
+        </p:spPr>
+        <p:style>
+          <a:lnRef idx="1">
+            <a:schemeClr val="accent1"/>
+          </a:lnRef>
+          <a:fillRef idx="3">
+            <a:schemeClr val="accent1"/>
+          </a:fillRef>
+          <a:effectRef idx="2">
+            <a:schemeClr val="accent1"/>
+          </a:effectRef>
+          <a:fontRef idx="minor">
+            <a:schemeClr val="lt1"/>
+          </a:fontRef>
+        </p:style>
+        <p:txBody>
+          <a:bodyPr rtlCol="0" anchor="ctr" wrap="square" lIns="45720" rIns="45720" tIns="36576" bIns="36576"/>
+          <a:lstStyle/>
+          <a:p>
+            <a:pPr algn="ctr">
+              <a:spcAft>
+                <a:spcPts val="0"/>
+              </a:spcAft>
+            </a:pPr>
+            <a:r>
+              <a:rPr sz="1200" b="1" i="0">
+                <a:solidFill>
+                  <a:srgbClr val="1E2A3A"/>
+                </a:solidFill>
+                <a:latin typeface="Arial"/>
+              </a:rPr>
+              <a:t>Everything else</a:t>
+            </a:r>
+          </a:p>
+          <a:p>
+            <a:pPr algn="ctr">
+              <a:spcAft>
+                <a:spcPts val="0"/>
+              </a:spcAft>
+            </a:pPr>
+            <a:r>
+              <a:rPr sz="1800" b="1" i="0">
+                <a:solidFill>
+                  <a:srgbClr val="1E2A3A"/>
+                </a:solidFill>
+                <a:latin typeface="Georgia"/>
+              </a:rPr>
+              <a:t>766</a:t>
+            </a:r>
+          </a:p>
+          <a:p>
+            <a:pPr algn="ctr">
+              <a:spcAft>
+                <a:spcPts val="0"/>
+              </a:spcAft>
+            </a:pPr>
+            <a:r>
+              <a:rPr sz="1000" b="0" i="0">
+                <a:solidFill>
+                  <a:srgbClr val="6B7A99"/>
+                </a:solidFill>
+                <a:latin typeface="Arial"/>
+              </a:rPr>
+              <a:t>team, founders, office</a:t>
+            </a:r>
+          </a:p>
+        </p:txBody>
+      </p:sp>
+      <p:sp>
+        <p:nvSpPr>
+          <p:cNvPr id="26" name="TextBox 25"/>
+          <p:cNvSpPr txBox="1"/>
+          <p:nvPr/>
+        </p:nvSpPr>
+        <p:spPr>
+          <a:xfrm>
+            <a:off x="457200" y="5532120"/>
+            <a:ext cx="7315200" cy="731520"/>
+          </a:xfrm>
+          <a:prstGeom prst="rect">
+            <a:avLst/>
+          </a:prstGeom>
+          <a:noFill/>
+        </p:spPr>
+        <p:txBody>
+          <a:bodyPr wrap="square" anchor="t" lIns="18288" rIns="18288" tIns="36576" bIns="36576">
+            <a:spAutoFit/>
+          </a:bodyPr>
+          <a:lstStyle/>
+          <a:p>
+            <a:pPr algn="l">
+              <a:spcAft>
+                <a:spcPts val="400"/>
+              </a:spcAft>
+            </a:pPr>
+            <a:r>
+              <a:rPr sz="1100" b="1" i="0">
+                <a:solidFill>
+                  <a:srgbClr val="1E2A3A"/>
+                </a:solidFill>
+                <a:latin typeface="Arial"/>
+              </a:rPr>
+              <a:t>Net profit = sales − delivery cost − running cost − tax. </a:t>
+            </a:r>
+            <a:r>
+              <a:rPr sz="1100" b="0" i="0">
+                <a:solidFill>
+                  <a:srgbClr val="3D4F6A"/>
+                </a:solidFill>
+                <a:latin typeface="Arial"/>
+              </a:rPr>
+              <a:t>Follow the red numbers up: Rp34.5M less running cost is Rp34.5M more profit, so net margin rises from 26.1% to 27.8%. All money in Rp M, 2027.</a:t>
+            </a:r>
+          </a:p>
+        </p:txBody>
+      </p:sp>
+      <p:sp>
+        <p:nvSpPr>
+          <p:cNvPr id="27" name="Rounded Rectangle 26"/>
+          <p:cNvSpPr/>
+          <p:nvPr/>
+        </p:nvSpPr>
+        <p:spPr>
+          <a:xfrm>
+            <a:off x="8138160" y="1371600"/>
+            <a:ext cx="3566160" cy="1188720"/>
+          </a:xfrm>
+          <a:prstGeom prst="roundRect">
+            <a:avLst>
+              <a:gd name="adj" fmla="val 6000"/>
+            </a:avLst>
+          </a:prstGeom>
+          <a:solidFill>
+            <a:srgbClr val="EAF2FF"/>
+          </a:solidFill>
+          <a:ln>
+            <a:noFill/>
+          </a:ln>
+          <a:effectLst/>
+        </p:spPr>
+        <p:style>
+          <a:lnRef idx="1">
+            <a:schemeClr val="accent1"/>
+          </a:lnRef>
+          <a:fillRef idx="3">
+            <a:schemeClr val="accent1"/>
+          </a:fillRef>
+          <a:effectRef idx="2">
+            <a:schemeClr val="accent1"/>
+          </a:effectRef>
+          <a:fontRef idx="minor">
+            <a:schemeClr val="lt1"/>
+          </a:fontRef>
+        </p:style>
+        <p:txBody>
+          <a:bodyPr rtlCol="0" anchor="ctr" wrap="square" lIns="164592" rIns="164592" tIns="36576" bIns="36576"/>
+          <a:lstStyle/>
+          <a:p>
+            <a:pPr algn="l">
+              <a:spcAft>
+                <a:spcPts val="200"/>
+              </a:spcAft>
+            </a:pPr>
+            <a:r>
+              <a:rPr sz="2600" b="1" i="0">
+                <a:solidFill>
+                  <a:srgbClr val="9B3809"/>
+                </a:solidFill>
+                <a:latin typeface="Georgia"/>
+              </a:rPr>
+              <a:t>Rp51M</a:t>
+            </a:r>
+          </a:p>
+          <a:p>
+            <a:pPr algn="l">
+              <a:spcAft>
+                <a:spcPts val="200"/>
+              </a:spcAft>
+            </a:pPr>
+            <a:r>
+              <a:rPr sz="1100" b="0" i="0">
+                <a:solidFill>
+                  <a:srgbClr val="3D4F6A"/>
+                </a:solidFill>
+                <a:latin typeface="Arial"/>
+              </a:rPr>
+              <a:t>more sales would give the same Rp34.5M profit: about 2.5 more regional training days</a:t>
+            </a:r>
+          </a:p>
+        </p:txBody>
+      </p:sp>
+      <p:sp>
+        <p:nvSpPr>
+          <p:cNvPr id="28" name="Rounded Rectangle 27"/>
+          <p:cNvSpPr/>
+          <p:nvPr/>
+        </p:nvSpPr>
+        <p:spPr>
+          <a:xfrm>
+            <a:off x="8138160" y="2697480"/>
+            <a:ext cx="3566160" cy="1188720"/>
+          </a:xfrm>
+          <a:prstGeom prst="roundRect">
+            <a:avLst>
+              <a:gd name="adj" fmla="val 6000"/>
+            </a:avLst>
+          </a:prstGeom>
+          <a:solidFill>
+            <a:srgbClr val="EAF2FF"/>
+          </a:solidFill>
+          <a:ln>
+            <a:noFill/>
+          </a:ln>
+          <a:effectLst/>
+        </p:spPr>
+        <p:style>
+          <a:lnRef idx="1">
+            <a:schemeClr val="accent1"/>
+          </a:lnRef>
+          <a:fillRef idx="3">
+            <a:schemeClr val="accent1"/>
+          </a:fillRef>
+          <a:effectRef idx="2">
+            <a:schemeClr val="accent1"/>
+          </a:effectRef>
+          <a:fontRef idx="minor">
+            <a:schemeClr val="lt1"/>
+          </a:fontRef>
+        </p:style>
+        <p:txBody>
+          <a:bodyPr rtlCol="0" anchor="ctr" wrap="square" lIns="164592" rIns="164592" tIns="36576" bIns="36576"/>
+          <a:lstStyle/>
+          <a:p>
+            <a:pPr algn="l">
+              <a:spcAft>
+                <a:spcPts val="200"/>
+              </a:spcAft>
+            </a:pPr>
+            <a:r>
+              <a:rPr sz="2600" b="1" i="0">
+                <a:solidFill>
+                  <a:srgbClr val="9B3809"/>
+                </a:solidFill>
+                <a:latin typeface="Georgia"/>
+              </a:rPr>
+              <a:t>Rp1 = Rp1.5</a:t>
+            </a:r>
+          </a:p>
+          <a:p>
+            <a:pPr algn="l">
+              <a:spcAft>
+                <a:spcPts val="200"/>
+              </a:spcAft>
+            </a:pPr>
+            <a:r>
+              <a:rPr sz="1100" b="0" i="0">
+                <a:solidFill>
+                  <a:srgbClr val="3D4F6A"/>
+                </a:solidFill>
+                <a:latin typeface="Arial"/>
+              </a:rPr>
+              <a:t>a rupiah saved is worth Rp1.5 of sales for us. In the factory example it is $16.</a:t>
+            </a:r>
+          </a:p>
+        </p:txBody>
+      </p:sp>
+      <p:sp>
+        <p:nvSpPr>
+          <p:cNvPr id="29" name="Rounded Rectangle 28"/>
+          <p:cNvSpPr/>
+          <p:nvPr/>
+        </p:nvSpPr>
+        <p:spPr>
+          <a:xfrm>
+            <a:off x="8138160" y="4023360"/>
+            <a:ext cx="3566160" cy="2240280"/>
+          </a:xfrm>
+          <a:prstGeom prst="roundRect">
+            <a:avLst>
+              <a:gd name="adj" fmla="val 6000"/>
+            </a:avLst>
+          </a:prstGeom>
+          <a:solidFill>
+            <a:srgbClr val="F5EDD8"/>
+          </a:solidFill>
+          <a:ln>
+            <a:noFill/>
+          </a:ln>
+          <a:effectLst/>
+        </p:spPr>
+        <p:style>
+          <a:lnRef idx="1">
+            <a:schemeClr val="accent1"/>
+          </a:lnRef>
+          <a:fillRef idx="3">
+            <a:schemeClr val="accent1"/>
+          </a:fillRef>
+          <a:effectRef idx="2">
+            <a:schemeClr val="accent1"/>
+          </a:effectRef>
+          <a:fontRef idx="minor">
+            <a:schemeClr val="lt1"/>
+          </a:fontRef>
+        </p:style>
+        <p:txBody>
+          <a:bodyPr rtlCol="0" anchor="ctr" wrap="square" lIns="182880" rIns="182880" tIns="36576" bIns="36576"/>
+          <a:lstStyle/>
+          <a:p>
+            <a:pPr algn="l">
+              <a:spcAft>
+                <a:spcPts val="500"/>
+              </a:spcAft>
+            </a:pPr>
+            <a:r>
+              <a:rPr sz="1100" b="1" i="0">
+                <a:solidFill>
+                  <a:srgbClr val="1E2A3A"/>
+                </a:solidFill>
+                <a:latin typeface="Arial"/>
+              </a:rPr>
+              <a:t>What this means for us</a:t>
+            </a:r>
+          </a:p>
+          <a:p>
+            <a:pPr algn="l">
+              <a:spcAft>
+                <a:spcPts val="500"/>
+              </a:spcAft>
+            </a:pPr>
+            <a:r>
+              <a:rPr sz="1100" b="0" i="0">
+                <a:solidFill>
+                  <a:srgbClr val="3D4F6A"/>
+                </a:solidFill>
+                <a:latin typeface="Arial"/>
+              </a:rPr>
+              <a:t>Most of our costs do not grow with sales, so each extra rupiah of sales keeps 67%. Saving is not much stronger than selling.</a:t>
+            </a:r>
+          </a:p>
+          <a:p>
+            <a:pPr algn="l">
+              <a:spcAft>
+                <a:spcPts val="500"/>
+              </a:spcAft>
+            </a:pPr>
+            <a:r>
+              <a:rPr sz="1100" b="0" i="0">
+                <a:solidFill>
+                  <a:srgbClr val="3D4F6A"/>
+                </a:solidFill>
+                <a:latin typeface="Arial"/>
+              </a:rPr>
+              <a:t>So pick levers that do both: lower what it costs to win clients and trainers, and bring more sales.</a:t>
+            </a:r>
+          </a:p>
+        </p:txBody>
+      </p:sp>
+    </p:spTree>
+  </p:cSld>
+  <p:clrMapOvr>
+    <a:masterClrMapping/>
+  </p:clrMapOvr>
+</p:sld>
+</file>
+
+<file path=ppt/slides/slide37.xml><?xml version="1.0" encoding="utf-8"?>
+<p:sld xmlns:a="http://schemas.openxmlformats.org/drawingml/2006/main" xmlns:p="http://schemas.openxmlformats.org/presentationml/2006/main" xmlns:r="http://schemas.openxmlformats.org/officeDocument/2006/relationships">
+  <p:cSld>
+    <p:bg>
+      <p:bgPr>
+        <a:solidFill>
+          <a:srgbClr val="FAF7F2"/>
+        </a:solidFill>
+        <a:effectLst/>
+      </p:bgPr>
+    </p:bg>
+    <p:spTree>
+      <p:nvGrpSpPr>
+        <p:cNvPr id="1" name=""/>
+        <p:cNvGrpSpPr/>
+        <p:nvPr/>
+      </p:nvGrpSpPr>
+      <p:grpSpPr/>
+      <p:sp>
+        <p:nvSpPr>
+          <p:cNvPr id="2" name="Title"/>
+          <p:cNvSpPr txBox="1"/>
+          <p:nvPr/>
+        </p:nvSpPr>
+        <p:spPr>
+          <a:xfrm>
+            <a:off x="457200" y="329184"/>
+            <a:ext cx="9875520" cy="566928"/>
+          </a:xfrm>
+          <a:prstGeom prst="rect">
+            <a:avLst/>
+          </a:prstGeom>
+          <a:noFill/>
+        </p:spPr>
+        <p:txBody>
+          <a:bodyPr wrap="square" anchor="ctr" lIns="18288" rIns="18288" tIns="36576" bIns="36576">
+            <a:spAutoFit/>
+          </a:bodyPr>
+          <a:lstStyle/>
+          <a:p>
+            <a:pPr algn="l">
+              <a:spcAft>
+                <a:spcPts val="400"/>
+              </a:spcAft>
+            </a:pPr>
+            <a:r>
+              <a:rPr sz="2800" b="1" i="0">
+                <a:solidFill>
+                  <a:srgbClr val="1E2A3A"/>
+                </a:solidFill>
+                <a:latin typeface="Georgia"/>
+              </a:rPr>
+              <a:t>Better contracts in </a:t>
+            </a:r>
+            <a:r>
+              <a:rPr sz="2800" b="1" i="0">
+                <a:solidFill>
+                  <a:srgbClr val="9B3809"/>
+                </a:solidFill>
+                <a:latin typeface="Georgia"/>
+              </a:rPr>
+              <a:t>four areas</a:t>
+            </a:r>
+            <a:r>
+              <a:rPr sz="2800" b="1" i="0">
+                <a:solidFill>
+                  <a:srgbClr val="1E2A3A"/>
+                </a:solidFill>
+                <a:latin typeface="Georgia"/>
+              </a:rPr>
+              <a:t/>
+            </a:r>
+          </a:p>
+        </p:txBody>
+      </p:sp>
+      <p:sp>
+        <p:nvSpPr>
+          <p:cNvPr id="3" name="Subtitle"/>
+          <p:cNvSpPr txBox="1"/>
+          <p:nvPr/>
+        </p:nvSpPr>
+        <p:spPr>
+          <a:xfrm>
+            <a:off x="457200" y="877824"/>
+            <a:ext cx="9875520" cy="365760"/>
+          </a:xfrm>
+          <a:prstGeom prst="rect">
+            <a:avLst/>
+          </a:prstGeom>
+          <a:noFill/>
+        </p:spPr>
+        <p:txBody>
+          <a:bodyPr wrap="square" anchor="t" lIns="18288" rIns="18288" tIns="36576" bIns="36576">
+            <a:spAutoFit/>
+          </a:bodyPr>
+          <a:lstStyle/>
+          <a:p>
+            <a:pPr algn="l">
+              <a:spcAft>
+                <a:spcPts val="400"/>
+              </a:spcAft>
+            </a:pPr>
+            <a:r>
+              <a:rPr sz="1400" b="0" i="0">
+                <a:solidFill>
+                  <a:srgbClr val="3D4F6A"/>
+                </a:solidFill>
+                <a:latin typeface="Arial"/>
+              </a:rPr>
+              <a:t>We keep part-time pay levels. We change how the contracts work.</a:t>
+            </a:r>
+          </a:p>
+        </p:txBody>
+      </p:sp>
+      <p:sp>
+        <p:nvSpPr>
+          <p:cNvPr id="4" name="Tag"/>
+          <p:cNvSpPr/>
+          <p:nvPr/>
+        </p:nvSpPr>
+        <p:spPr>
+          <a:xfrm>
+            <a:off x="10469880" y="420624"/>
+            <a:ext cx="1280160" cy="310896"/>
+          </a:xfrm>
+          <a:prstGeom prst="roundRect">
+            <a:avLst>
+              <a:gd name="adj" fmla="val 50000"/>
+            </a:avLst>
+          </a:prstGeom>
+          <a:solidFill>
+            <a:srgbClr val="EEE9DF"/>
+          </a:solidFill>
+          <a:ln>
+            <a:noFill/>
+          </a:ln>
+          <a:effectLst/>
+        </p:spPr>
+        <p:style>
+          <a:lnRef idx="1">
+            <a:schemeClr val="accent1"/>
+          </a:lnRef>
+          <a:fillRef idx="3">
+            <a:schemeClr val="accent1"/>
+          </a:fillRef>
+          <a:effectRef idx="2">
+            <a:schemeClr val="accent1"/>
+          </a:effectRef>
+          <a:fontRef idx="minor">
+            <a:schemeClr val="lt1"/>
+          </a:fontRef>
+        </p:style>
+        <p:txBody>
+          <a:bodyPr rtlCol="0" anchor="ctr" wrap="square" lIns="18288" rIns="18288" tIns="36576" bIns="36576"/>
+          <a:lstStyle/>
+          <a:p>
+            <a:pPr algn="ctr">
+              <a:spcAft>
+                <a:spcPts val="400"/>
+              </a:spcAft>
+            </a:pPr>
+            <a:r>
+              <a:rPr sz="1000" b="1" i="0">
+                <a:solidFill>
+                  <a:srgbClr val="6B7A99"/>
+                </a:solidFill>
+                <a:latin typeface="Arial"/>
+              </a:rPr>
+              <a:t>APPENDIX</a:t>
+            </a:r>
+          </a:p>
+        </p:txBody>
+      </p:sp>
+      <p:sp>
+        <p:nvSpPr>
+          <p:cNvPr id="5" name="Source"/>
+          <p:cNvSpPr txBox="1"/>
+          <p:nvPr/>
+        </p:nvSpPr>
+        <p:spPr>
+          <a:xfrm>
+            <a:off x="457200" y="6419088"/>
+            <a:ext cx="10607040" cy="292608"/>
+          </a:xfrm>
+          <a:prstGeom prst="rect">
+            <a:avLst/>
+          </a:prstGeom>
+          <a:noFill/>
+        </p:spPr>
+        <p:txBody>
+          <a:bodyPr wrap="square" anchor="t" lIns="73152" rIns="73152" tIns="36576" bIns="36576">
+            <a:spAutoFit/>
+          </a:bodyPr>
+          <a:lstStyle/>
+          <a:p>
+            <a:pPr algn="l">
+              <a:spcAft>
+                <a:spcPts val="400"/>
+              </a:spcAft>
+            </a:pPr>
+            <a:r>
+              <a:rPr sz="900" b="0" i="0">
+                <a:solidFill>
+                  <a:srgbClr val="6B7A99"/>
+                </a:solidFill>
+                <a:latin typeface="Arial"/>
+              </a:rPr>
+              <a:t>Source: Session fees and day rates are estimates; compare them with the market before you sign.</a:t>
+            </a:r>
+          </a:p>
+        </p:txBody>
+      </p:sp>
+      <p:sp>
+        <p:nvSpPr>
+          <p:cNvPr id="6" name="Page"/>
+          <p:cNvSpPr txBox="1"/>
+          <p:nvPr/>
+        </p:nvSpPr>
+        <p:spPr>
+          <a:xfrm>
+            <a:off x="11247120" y="6419088"/>
+            <a:ext cx="502920" cy="292608"/>
+          </a:xfrm>
+          <a:prstGeom prst="rect">
+            <a:avLst/>
+          </a:prstGeom>
+          <a:noFill/>
+        </p:spPr>
+        <p:txBody>
+          <a:bodyPr wrap="square" anchor="t" lIns="73152" rIns="73152" tIns="36576" bIns="36576">
+            <a:spAutoFit/>
+          </a:bodyPr>
+          <a:lstStyle/>
+          <a:p>
+            <a:pPr algn="r">
+              <a:spcAft>
+                <a:spcPts val="400"/>
+              </a:spcAft>
+            </a:pPr>
+            <a:r>
+              <a:rPr sz="1000" b="1" i="0">
+                <a:solidFill>
+                  <a:srgbClr val="6B7A99"/>
+                </a:solidFill>
+                <a:latin typeface="Arial"/>
+              </a:rPr>
+              <a:t>37</a:t>
             </a:r>
           </a:p>
         </p:txBody>
@@ -48264,7 +51383,7 @@
 </p:sld>
 </file>
 
-<file path=ppt/slides/slide36.xml><?xml version="1.0" encoding="utf-8"?>
+<file path=ppt/slides/slide38.xml><?xml version="1.0" encoding="utf-8"?>
 <p:sld xmlns:a="http://schemas.openxmlformats.org/drawingml/2006/main" xmlns:p="http://schemas.openxmlformats.org/presentationml/2006/main" xmlns:r="http://schemas.openxmlformats.org/officeDocument/2006/relationships">
   <p:cSld>
     <p:bg>
@@ -48510,7 +51629,7 @@
                 </a:solidFill>
                 <a:latin typeface="Arial"/>
               </a:rPr>
-              <a:t>36</a:t>
+              <a:t>38</a:t>
             </a:r>
           </a:p>
         </p:txBody>
@@ -49430,7 +52549,7 @@
 </p:sld>
 </file>
 
-<file path=ppt/slides/slide37.xml><?xml version="1.0" encoding="utf-8"?>
+<file path=ppt/slides/slide39.xml><?xml version="1.0" encoding="utf-8"?>
 <p:sld xmlns:a="http://schemas.openxmlformats.org/drawingml/2006/main" xmlns:p="http://schemas.openxmlformats.org/presentationml/2006/main" xmlns:r="http://schemas.openxmlformats.org/officeDocument/2006/relationships">
   <p:cSld>
     <p:bg>
@@ -49676,7 +52795,7 @@
                 </a:solidFill>
                 <a:latin typeface="Arial"/>
               </a:rPr>
-              <a:t>37</a:t>
+              <a:t>39</a:t>
             </a:r>
           </a:p>
         </p:txBody>
@@ -50859,7 +53978,1991 @@
 </p:sld>
 </file>
 
-<file path=ppt/slides/slide38.xml><?xml version="1.0" encoding="utf-8"?>
+<file path=ppt/slides/slide4.xml><?xml version="1.0" encoding="utf-8"?>
+<p:sld xmlns:a="http://schemas.openxmlformats.org/drawingml/2006/main" xmlns:p="http://schemas.openxmlformats.org/presentationml/2006/main" xmlns:r="http://schemas.openxmlformats.org/officeDocument/2006/relationships">
+  <p:cSld>
+    <p:bg>
+      <p:bgPr>
+        <a:solidFill>
+          <a:srgbClr val="FAF7F2"/>
+        </a:solidFill>
+        <a:effectLst/>
+      </p:bgPr>
+    </p:bg>
+    <p:spTree>
+      <p:nvGrpSpPr>
+        <p:cNvPr id="1" name=""/>
+        <p:cNvGrpSpPr/>
+        <p:nvPr/>
+      </p:nvGrpSpPr>
+      <p:grpSpPr/>
+      <p:sp>
+        <p:nvSpPr>
+          <p:cNvPr id="2" name="Title"/>
+          <p:cNvSpPr txBox="1"/>
+          <p:nvPr/>
+        </p:nvSpPr>
+        <p:spPr>
+          <a:xfrm>
+            <a:off x="457200" y="329184"/>
+            <a:ext cx="9875520" cy="566928"/>
+          </a:xfrm>
+          <a:prstGeom prst="rect">
+            <a:avLst/>
+          </a:prstGeom>
+          <a:noFill/>
+        </p:spPr>
+        <p:txBody>
+          <a:bodyPr wrap="square" anchor="ctr" lIns="18288" rIns="18288" tIns="36576" bIns="36576">
+            <a:spAutoFit/>
+          </a:bodyPr>
+          <a:lstStyle/>
+          <a:p>
+            <a:pPr algn="l">
+              <a:spcAft>
+                <a:spcPts val="400"/>
+              </a:spcAft>
+            </a:pPr>
+            <a:r>
+              <a:rPr sz="2800" b="1" i="0">
+                <a:solidFill>
+                  <a:srgbClr val="1E2A3A"/>
+                </a:solidFill>
+                <a:latin typeface="Georgia"/>
+              </a:rPr>
+              <a:t>Two goals, </a:t>
+            </a:r>
+            <a:r>
+              <a:rPr sz="2800" b="1" i="0">
+                <a:solidFill>
+                  <a:srgbClr val="9B3809"/>
+                </a:solidFill>
+                <a:latin typeface="Georgia"/>
+              </a:rPr>
+              <a:t>four impact pillars</a:t>
+            </a:r>
+            <a:r>
+              <a:rPr sz="2800" b="1" i="0">
+                <a:solidFill>
+                  <a:srgbClr val="1E2A3A"/>
+                </a:solidFill>
+                <a:latin typeface="Georgia"/>
+              </a:rPr>
+              <a:t/>
+            </a:r>
+          </a:p>
+        </p:txBody>
+      </p:sp>
+      <p:sp>
+        <p:nvSpPr>
+          <p:cNvPr id="3" name="Subtitle"/>
+          <p:cNvSpPr txBox="1"/>
+          <p:nvPr/>
+        </p:nvSpPr>
+        <p:spPr>
+          <a:xfrm>
+            <a:off x="457200" y="877824"/>
+            <a:ext cx="9875520" cy="365760"/>
+          </a:xfrm>
+          <a:prstGeom prst="rect">
+            <a:avLst/>
+          </a:prstGeom>
+          <a:noFill/>
+        </p:spPr>
+        <p:txBody>
+          <a:bodyPr wrap="square" anchor="t" lIns="18288" rIns="18288" tIns="36576" bIns="36576">
+            <a:spAutoFit/>
+          </a:bodyPr>
+          <a:lstStyle/>
+          <a:p>
+            <a:pPr algn="l">
+              <a:spcAft>
+                <a:spcPts val="400"/>
+              </a:spcAft>
+            </a:pPr>
+            <a:r>
+              <a:rPr sz="1400" b="0" i="0">
+                <a:solidFill>
+                  <a:srgbClr val="3D4F6A"/>
+                </a:solidFill>
+                <a:latin typeface="Arial"/>
+              </a:rPr>
+              <a:t>The goals say why we exist. The pillars show, with numbers, that it is working.</a:t>
+            </a:r>
+          </a:p>
+        </p:txBody>
+      </p:sp>
+      <p:sp>
+        <p:nvSpPr>
+          <p:cNvPr id="4" name="Tag"/>
+          <p:cNvSpPr/>
+          <p:nvPr/>
+        </p:nvSpPr>
+        <p:spPr>
+          <a:xfrm>
+            <a:off x="10469880" y="420624"/>
+            <a:ext cx="1280160" cy="310896"/>
+          </a:xfrm>
+          <a:prstGeom prst="roundRect">
+            <a:avLst>
+              <a:gd name="adj" fmla="val 50000"/>
+            </a:avLst>
+          </a:prstGeom>
+          <a:solidFill>
+            <a:srgbClr val="F7DDD2"/>
+          </a:solidFill>
+          <a:ln>
+            <a:noFill/>
+          </a:ln>
+          <a:effectLst/>
+        </p:spPr>
+        <p:style>
+          <a:lnRef idx="1">
+            <a:schemeClr val="accent1"/>
+          </a:lnRef>
+          <a:fillRef idx="3">
+            <a:schemeClr val="accent1"/>
+          </a:fillRef>
+          <a:effectRef idx="2">
+            <a:schemeClr val="accent1"/>
+          </a:effectRef>
+          <a:fontRef idx="minor">
+            <a:schemeClr val="lt1"/>
+          </a:fontRef>
+        </p:style>
+        <p:txBody>
+          <a:bodyPr rtlCol="0" anchor="ctr" wrap="square" lIns="18288" rIns="18288" tIns="36576" bIns="36576"/>
+          <a:lstStyle/>
+          <a:p>
+            <a:pPr algn="ctr">
+              <a:spcAft>
+                <a:spcPts val="400"/>
+              </a:spcAft>
+            </a:pPr>
+            <a:r>
+              <a:rPr sz="1000" b="1" i="0">
+                <a:solidFill>
+                  <a:srgbClr val="9B3809"/>
+                </a:solidFill>
+                <a:latin typeface="Arial"/>
+              </a:rPr>
+              <a:t>OUR GOAL</a:t>
+            </a:r>
+          </a:p>
+        </p:txBody>
+      </p:sp>
+      <p:sp>
+        <p:nvSpPr>
+          <p:cNvPr id="5" name="Source"/>
+          <p:cNvSpPr txBox="1"/>
+          <p:nvPr/>
+        </p:nvSpPr>
+        <p:spPr>
+          <a:xfrm>
+            <a:off x="457200" y="6419088"/>
+            <a:ext cx="10607040" cy="292608"/>
+          </a:xfrm>
+          <a:prstGeom prst="rect">
+            <a:avLst/>
+          </a:prstGeom>
+          <a:noFill/>
+        </p:spPr>
+        <p:txBody>
+          <a:bodyPr wrap="square" anchor="t" lIns="73152" rIns="73152" tIns="36576" bIns="36576">
+            <a:spAutoFit/>
+          </a:bodyPr>
+          <a:lstStyle/>
+          <a:p>
+            <a:pPr algn="l">
+              <a:spcAft>
+                <a:spcPts val="400"/>
+              </a:spcAft>
+            </a:pPr>
+            <a:r>
+              <a:rPr sz="900" b="0" i="0">
+                <a:solidFill>
+                  <a:srgbClr val="6B7A99"/>
+                </a:solidFill>
+                <a:latin typeface="Arial"/>
+              </a:rPr>
+              <a:t>Source: Our model, current estimate for 2027, month by month. Fair-pay floor: Jakarta minimum wage 2026. Before/after scores and EAP renewals: new measures, tracked from Q4 2026.</a:t>
+            </a:r>
+          </a:p>
+        </p:txBody>
+      </p:sp>
+      <p:sp>
+        <p:nvSpPr>
+          <p:cNvPr id="6" name="Page"/>
+          <p:cNvSpPr txBox="1"/>
+          <p:nvPr/>
+        </p:nvSpPr>
+        <p:spPr>
+          <a:xfrm>
+            <a:off x="11247120" y="6419088"/>
+            <a:ext cx="502920" cy="292608"/>
+          </a:xfrm>
+          <a:prstGeom prst="rect">
+            <a:avLst/>
+          </a:prstGeom>
+          <a:noFill/>
+        </p:spPr>
+        <p:txBody>
+          <a:bodyPr wrap="square" anchor="t" lIns="73152" rIns="73152" tIns="36576" bIns="36576">
+            <a:spAutoFit/>
+          </a:bodyPr>
+          <a:lstStyle/>
+          <a:p>
+            <a:pPr algn="r">
+              <a:spcAft>
+                <a:spcPts val="400"/>
+              </a:spcAft>
+            </a:pPr>
+            <a:r>
+              <a:rPr sz="1000" b="1" i="0">
+                <a:solidFill>
+                  <a:srgbClr val="6B7A99"/>
+                </a:solidFill>
+                <a:latin typeface="Arial"/>
+              </a:rPr>
+              <a:t>4</a:t>
+            </a:r>
+          </a:p>
+        </p:txBody>
+      </p:sp>
+      <p:sp>
+        <p:nvSpPr>
+          <p:cNvPr id="7" name="Rounded Rectangle 6"/>
+          <p:cNvSpPr/>
+          <p:nvPr/>
+        </p:nvSpPr>
+        <p:spPr>
+          <a:xfrm>
+            <a:off x="457200" y="1371600"/>
+            <a:ext cx="5532120" cy="1097280"/>
+          </a:xfrm>
+          <a:prstGeom prst="roundRect">
+            <a:avLst>
+              <a:gd name="adj" fmla="val 6000"/>
+            </a:avLst>
+          </a:prstGeom>
+          <a:solidFill>
+            <a:srgbClr val="1E2A3A"/>
+          </a:solidFill>
+          <a:ln>
+            <a:noFill/>
+          </a:ln>
+          <a:effectLst/>
+        </p:spPr>
+        <p:style>
+          <a:lnRef idx="1">
+            <a:schemeClr val="accent1"/>
+          </a:lnRef>
+          <a:fillRef idx="3">
+            <a:schemeClr val="accent1"/>
+          </a:fillRef>
+          <a:effectRef idx="2">
+            <a:schemeClr val="accent1"/>
+          </a:effectRef>
+          <a:fontRef idx="minor">
+            <a:schemeClr val="lt1"/>
+          </a:fontRef>
+        </p:style>
+        <p:txBody>
+          <a:bodyPr rtlCol="0" anchor="t" wrap="square" lIns="182880" rIns="182880" tIns="36576" bIns="36576"/>
+          <a:lstStyle/>
+          <a:p>
+            <a:pPr algn="l">
+              <a:spcAft>
+                <a:spcPts val="400"/>
+              </a:spcAft>
+            </a:pPr>
+            <a:r>
+              <a:rPr sz="1300" b="0" i="0">
+                <a:solidFill>
+                  <a:srgbClr val="3D4F6A"/>
+                </a:solidFill>
+                <a:latin typeface="Arial"/>
+              </a:rPr>
+              <a:t/>
+            </a:r>
+          </a:p>
+        </p:txBody>
+      </p:sp>
+      <p:sp>
+        <p:nvSpPr>
+          <p:cNvPr id="8" name="Oval 7"/>
+          <p:cNvSpPr/>
+          <p:nvPr/>
+        </p:nvSpPr>
+        <p:spPr>
+          <a:xfrm>
+            <a:off x="640080" y="1645920"/>
+            <a:ext cx="548640" cy="548640"/>
+          </a:xfrm>
+          <a:prstGeom prst="ellipse">
+            <a:avLst/>
+          </a:prstGeom>
+          <a:solidFill>
+            <a:srgbClr val="E8904A"/>
+          </a:solidFill>
+          <a:ln>
+            <a:noFill/>
+          </a:ln>
+          <a:effectLst/>
+        </p:spPr>
+        <p:style>
+          <a:lnRef idx="1">
+            <a:schemeClr val="accent1"/>
+          </a:lnRef>
+          <a:fillRef idx="3">
+            <a:schemeClr val="accent1"/>
+          </a:fillRef>
+          <a:effectRef idx="2">
+            <a:schemeClr val="accent1"/>
+          </a:effectRef>
+          <a:fontRef idx="minor">
+            <a:schemeClr val="lt1"/>
+          </a:fontRef>
+        </p:style>
+        <p:txBody>
+          <a:bodyPr rtlCol="0" anchor="ctr" wrap="square" lIns="0" rIns="0" tIns="36576" bIns="36576"/>
+          <a:lstStyle/>
+          <a:p>
+            <a:pPr algn="ctr">
+              <a:spcAft>
+                <a:spcPts val="400"/>
+              </a:spcAft>
+            </a:pPr>
+            <a:r>
+              <a:rPr sz="2000" b="1" i="0">
+                <a:solidFill>
+                  <a:srgbClr val="FFFFFF"/>
+                </a:solidFill>
+                <a:latin typeface="Georgia"/>
+              </a:rPr>
+              <a:t>1</a:t>
+            </a:r>
+          </a:p>
+        </p:txBody>
+      </p:sp>
+      <p:sp>
+        <p:nvSpPr>
+          <p:cNvPr id="9" name="TextBox 8"/>
+          <p:cNvSpPr txBox="1"/>
+          <p:nvPr/>
+        </p:nvSpPr>
+        <p:spPr>
+          <a:xfrm>
+            <a:off x="1325880" y="1444752"/>
+            <a:ext cx="4526280" cy="960120"/>
+          </a:xfrm>
+          <a:prstGeom prst="rect">
+            <a:avLst/>
+          </a:prstGeom>
+          <a:noFill/>
+        </p:spPr>
+        <p:txBody>
+          <a:bodyPr wrap="square" anchor="ctr" lIns="18288" rIns="18288" tIns="36576" bIns="36576">
+            <a:spAutoFit/>
+          </a:bodyPr>
+          <a:lstStyle/>
+          <a:p>
+            <a:pPr algn="l">
+              <a:spcAft>
+                <a:spcPts val="200"/>
+              </a:spcAft>
+            </a:pPr>
+            <a:r>
+              <a:rPr sz="1800" b="1" i="0">
+                <a:solidFill>
+                  <a:srgbClr val="FFFFFF"/>
+                </a:solidFill>
+                <a:latin typeface="Georgia"/>
+              </a:rPr>
+              <a:t>Create real value for our clients</a:t>
+            </a:r>
+          </a:p>
+          <a:p>
+            <a:pPr algn="l">
+              <a:spcAft>
+                <a:spcPts val="200"/>
+              </a:spcAft>
+            </a:pPr>
+            <a:r>
+              <a:rPr sz="1100" b="0" i="0">
+                <a:solidFill>
+                  <a:srgbClr val="C9D2E3"/>
+                </a:solidFill>
+                <a:latin typeface="Arial"/>
+              </a:rPr>
+              <a:t>The people we train and counsel change what they know and do, and clients can see it.</a:t>
+            </a:r>
+          </a:p>
+        </p:txBody>
+      </p:sp>
+      <p:sp>
+        <p:nvSpPr>
+          <p:cNvPr id="10" name="Rounded Rectangle 9"/>
+          <p:cNvSpPr/>
+          <p:nvPr/>
+        </p:nvSpPr>
+        <p:spPr>
+          <a:xfrm>
+            <a:off x="6172200" y="1371600"/>
+            <a:ext cx="5532120" cy="1097280"/>
+          </a:xfrm>
+          <a:prstGeom prst="roundRect">
+            <a:avLst>
+              <a:gd name="adj" fmla="val 6000"/>
+            </a:avLst>
+          </a:prstGeom>
+          <a:solidFill>
+            <a:srgbClr val="1E2A3A"/>
+          </a:solidFill>
+          <a:ln>
+            <a:noFill/>
+          </a:ln>
+          <a:effectLst/>
+        </p:spPr>
+        <p:style>
+          <a:lnRef idx="1">
+            <a:schemeClr val="accent1"/>
+          </a:lnRef>
+          <a:fillRef idx="3">
+            <a:schemeClr val="accent1"/>
+          </a:fillRef>
+          <a:effectRef idx="2">
+            <a:schemeClr val="accent1"/>
+          </a:effectRef>
+          <a:fontRef idx="minor">
+            <a:schemeClr val="lt1"/>
+          </a:fontRef>
+        </p:style>
+        <p:txBody>
+          <a:bodyPr rtlCol="0" anchor="t" wrap="square" lIns="182880" rIns="182880" tIns="36576" bIns="36576"/>
+          <a:lstStyle/>
+          <a:p>
+            <a:pPr algn="l">
+              <a:spcAft>
+                <a:spcPts val="400"/>
+              </a:spcAft>
+            </a:pPr>
+            <a:r>
+              <a:rPr sz="1300" b="0" i="0">
+                <a:solidFill>
+                  <a:srgbClr val="3D4F6A"/>
+                </a:solidFill>
+                <a:latin typeface="Arial"/>
+              </a:rPr>
+              <a:t/>
+            </a:r>
+          </a:p>
+        </p:txBody>
+      </p:sp>
+      <p:sp>
+        <p:nvSpPr>
+          <p:cNvPr id="11" name="Oval 10"/>
+          <p:cNvSpPr/>
+          <p:nvPr/>
+        </p:nvSpPr>
+        <p:spPr>
+          <a:xfrm>
+            <a:off x="6355080" y="1645920"/>
+            <a:ext cx="548640" cy="548640"/>
+          </a:xfrm>
+          <a:prstGeom prst="ellipse">
+            <a:avLst/>
+          </a:prstGeom>
+          <a:solidFill>
+            <a:srgbClr val="E8904A"/>
+          </a:solidFill>
+          <a:ln>
+            <a:noFill/>
+          </a:ln>
+          <a:effectLst/>
+        </p:spPr>
+        <p:style>
+          <a:lnRef idx="1">
+            <a:schemeClr val="accent1"/>
+          </a:lnRef>
+          <a:fillRef idx="3">
+            <a:schemeClr val="accent1"/>
+          </a:fillRef>
+          <a:effectRef idx="2">
+            <a:schemeClr val="accent1"/>
+          </a:effectRef>
+          <a:fontRef idx="minor">
+            <a:schemeClr val="lt1"/>
+          </a:fontRef>
+        </p:style>
+        <p:txBody>
+          <a:bodyPr rtlCol="0" anchor="ctr" wrap="square" lIns="0" rIns="0" tIns="36576" bIns="36576"/>
+          <a:lstStyle/>
+          <a:p>
+            <a:pPr algn="ctr">
+              <a:spcAft>
+                <a:spcPts val="400"/>
+              </a:spcAft>
+            </a:pPr>
+            <a:r>
+              <a:rPr sz="2000" b="1" i="0">
+                <a:solidFill>
+                  <a:srgbClr val="FFFFFF"/>
+                </a:solidFill>
+                <a:latin typeface="Georgia"/>
+              </a:rPr>
+              <a:t>2</a:t>
+            </a:r>
+          </a:p>
+        </p:txBody>
+      </p:sp>
+      <p:sp>
+        <p:nvSpPr>
+          <p:cNvPr id="12" name="TextBox 11"/>
+          <p:cNvSpPr txBox="1"/>
+          <p:nvPr/>
+        </p:nvSpPr>
+        <p:spPr>
+          <a:xfrm>
+            <a:off x="7040880" y="1444752"/>
+            <a:ext cx="4526280" cy="960120"/>
+          </a:xfrm>
+          <a:prstGeom prst="rect">
+            <a:avLst/>
+          </a:prstGeom>
+          <a:noFill/>
+        </p:spPr>
+        <p:txBody>
+          <a:bodyPr wrap="square" anchor="ctr" lIns="18288" rIns="18288" tIns="36576" bIns="36576">
+            <a:spAutoFit/>
+          </a:bodyPr>
+          <a:lstStyle/>
+          <a:p>
+            <a:pPr algn="l">
+              <a:spcAft>
+                <a:spcPts val="200"/>
+              </a:spcAft>
+            </a:pPr>
+            <a:r>
+              <a:rPr sz="1800" b="1" i="0">
+                <a:solidFill>
+                  <a:srgbClr val="FFFFFF"/>
+                </a:solidFill>
+                <a:latin typeface="Georgia"/>
+              </a:rPr>
+              <a:t>Build a business that pays for itself</a:t>
+            </a:r>
+          </a:p>
+          <a:p>
+            <a:pPr algn="l">
+              <a:spcAft>
+                <a:spcPts val="200"/>
+              </a:spcAft>
+            </a:pPr>
+            <a:r>
+              <a:rPr sz="1100" b="0" i="0">
+                <a:solidFill>
+                  <a:srgbClr val="C9D2E3"/>
+                </a:solidFill>
+                <a:latin typeface="Arial"/>
+              </a:rPr>
+              <a:t>A 15%+ margin and safe cash, without outside money, so we can keep doing goal 1.</a:t>
+            </a:r>
+          </a:p>
+        </p:txBody>
+      </p:sp>
+      <p:sp>
+        <p:nvSpPr>
+          <p:cNvPr id="13" name="TextBox 12"/>
+          <p:cNvSpPr txBox="1"/>
+          <p:nvPr/>
+        </p:nvSpPr>
+        <p:spPr>
+          <a:xfrm>
+            <a:off x="457200" y="2542032"/>
+            <a:ext cx="11247120" cy="274320"/>
+          </a:xfrm>
+          <a:prstGeom prst="rect">
+            <a:avLst/>
+          </a:prstGeom>
+          <a:noFill/>
+        </p:spPr>
+        <p:txBody>
+          <a:bodyPr wrap="square" anchor="t" lIns="0" rIns="0" tIns="36576" bIns="36576">
+            <a:spAutoFit/>
+          </a:bodyPr>
+          <a:lstStyle/>
+          <a:p>
+            <a:pPr algn="ctr">
+              <a:spcAft>
+                <a:spcPts val="400"/>
+              </a:spcAft>
+            </a:pPr>
+            <a:r>
+              <a:rPr sz="1100" b="1" i="0">
+                <a:solidFill>
+                  <a:srgbClr val="6B7A99"/>
+                </a:solidFill>
+                <a:latin typeface="Arial"/>
+              </a:rPr>
+              <a:t>WE KNOW IT IS WORKING WHEN THESE NUMBERS MOVE</a:t>
+            </a:r>
+          </a:p>
+        </p:txBody>
+      </p:sp>
+      <p:sp>
+        <p:nvSpPr>
+          <p:cNvPr id="14" name="Rounded Rectangle 13"/>
+          <p:cNvSpPr/>
+          <p:nvPr/>
+        </p:nvSpPr>
+        <p:spPr>
+          <a:xfrm>
+            <a:off x="457200" y="2880360"/>
+            <a:ext cx="2697480" cy="3246120"/>
+          </a:xfrm>
+          <a:prstGeom prst="roundRect">
+            <a:avLst>
+              <a:gd name="adj" fmla="val 6000"/>
+            </a:avLst>
+          </a:prstGeom>
+          <a:solidFill>
+            <a:srgbClr val="EAF2FF"/>
+          </a:solidFill>
+          <a:ln>
+            <a:noFill/>
+          </a:ln>
+          <a:effectLst/>
+        </p:spPr>
+        <p:style>
+          <a:lnRef idx="1">
+            <a:schemeClr val="accent1"/>
+          </a:lnRef>
+          <a:fillRef idx="3">
+            <a:schemeClr val="accent1"/>
+          </a:fillRef>
+          <a:effectRef idx="2">
+            <a:schemeClr val="accent1"/>
+          </a:effectRef>
+          <a:fontRef idx="minor">
+            <a:schemeClr val="lt1"/>
+          </a:fontRef>
+        </p:style>
+        <p:txBody>
+          <a:bodyPr rtlCol="0" anchor="t" wrap="square" lIns="182880" rIns="182880" tIns="36576" bIns="36576"/>
+          <a:lstStyle/>
+          <a:p>
+            <a:pPr algn="l">
+              <a:spcAft>
+                <a:spcPts val="400"/>
+              </a:spcAft>
+            </a:pPr>
+            <a:r>
+              <a:rPr sz="1300" b="0" i="0">
+                <a:solidFill>
+                  <a:srgbClr val="3D4F6A"/>
+                </a:solidFill>
+                <a:latin typeface="Arial"/>
+              </a:rPr>
+              <a:t/>
+            </a:r>
+          </a:p>
+        </p:txBody>
+      </p:sp>
+      <p:sp>
+        <p:nvSpPr>
+          <p:cNvPr id="15" name="Oval 14"/>
+          <p:cNvSpPr/>
+          <p:nvPr/>
+        </p:nvSpPr>
+        <p:spPr>
+          <a:xfrm>
+            <a:off x="621792" y="3017520"/>
+            <a:ext cx="438912" cy="438912"/>
+          </a:xfrm>
+          <a:prstGeom prst="ellipse">
+            <a:avLst/>
+          </a:prstGeom>
+          <a:solidFill>
+            <a:srgbClr val="1E2A3A"/>
+          </a:solidFill>
+          <a:ln>
+            <a:noFill/>
+          </a:ln>
+          <a:effectLst/>
+        </p:spPr>
+        <p:style>
+          <a:lnRef idx="1">
+            <a:schemeClr val="accent1"/>
+          </a:lnRef>
+          <a:fillRef idx="3">
+            <a:schemeClr val="accent1"/>
+          </a:fillRef>
+          <a:effectRef idx="2">
+            <a:schemeClr val="accent1"/>
+          </a:effectRef>
+          <a:fontRef idx="minor">
+            <a:schemeClr val="lt1"/>
+          </a:fontRef>
+        </p:style>
+        <p:txBody>
+          <a:bodyPr rtlCol="0" anchor="ctr" wrap="square" lIns="0" rIns="0" tIns="36576" bIns="36576"/>
+          <a:lstStyle/>
+          <a:p>
+            <a:pPr algn="ctr">
+              <a:spcAft>
+                <a:spcPts val="400"/>
+              </a:spcAft>
+            </a:pPr>
+            <a:r>
+              <a:rPr sz="1500" b="1" i="0">
+                <a:solidFill>
+                  <a:srgbClr val="FFFFFF"/>
+                </a:solidFill>
+                <a:latin typeface="Georgia"/>
+              </a:rPr>
+              <a:t>1</a:t>
+            </a:r>
+          </a:p>
+        </p:txBody>
+      </p:sp>
+      <p:sp>
+        <p:nvSpPr>
+          <p:cNvPr id="16" name="TextBox 15"/>
+          <p:cNvSpPr txBox="1"/>
+          <p:nvPr/>
+        </p:nvSpPr>
+        <p:spPr>
+          <a:xfrm>
+            <a:off x="1143000" y="2990088"/>
+            <a:ext cx="1965960" cy="502920"/>
+          </a:xfrm>
+          <a:prstGeom prst="rect">
+            <a:avLst/>
+          </a:prstGeom>
+          <a:noFill/>
+        </p:spPr>
+        <p:txBody>
+          <a:bodyPr wrap="square" anchor="ctr" lIns="18288" rIns="18288" tIns="36576" bIns="36576">
+            <a:spAutoFit/>
+          </a:bodyPr>
+          <a:lstStyle/>
+          <a:p>
+            <a:pPr algn="l">
+              <a:spcAft>
+                <a:spcPts val="0"/>
+              </a:spcAft>
+            </a:pPr>
+            <a:r>
+              <a:rPr sz="1600" b="1" i="0">
+                <a:solidFill>
+                  <a:srgbClr val="1E2A3A"/>
+                </a:solidFill>
+                <a:latin typeface="Georgia"/>
+              </a:rPr>
+              <a:t>Clients</a:t>
+            </a:r>
+          </a:p>
+          <a:p>
+            <a:pPr algn="l">
+              <a:spcAft>
+                <a:spcPts val="0"/>
+              </a:spcAft>
+            </a:pPr>
+            <a:r>
+              <a:rPr sz="1000" b="0" i="0">
+                <a:solidFill>
+                  <a:srgbClr val="6B7A99"/>
+                </a:solidFill>
+                <a:latin typeface="Arial"/>
+              </a:rPr>
+              <a:t>BI, banks, EAP clients</a:t>
+            </a:r>
+          </a:p>
+        </p:txBody>
+      </p:sp>
+      <p:sp>
+        <p:nvSpPr>
+          <p:cNvPr id="17" name="TextBox 16"/>
+          <p:cNvSpPr txBox="1"/>
+          <p:nvPr/>
+        </p:nvSpPr>
+        <p:spPr>
+          <a:xfrm>
+            <a:off x="621792" y="3611880"/>
+            <a:ext cx="2423160" cy="804672"/>
+          </a:xfrm>
+          <a:prstGeom prst="rect">
+            <a:avLst/>
+          </a:prstGeom>
+          <a:noFill/>
+        </p:spPr>
+        <p:txBody>
+          <a:bodyPr wrap="square" anchor="t" lIns="18288" rIns="18288" tIns="36576" bIns="36576">
+            <a:spAutoFit/>
+          </a:bodyPr>
+          <a:lstStyle/>
+          <a:p>
+            <a:pPr algn="l">
+              <a:spcAft>
+                <a:spcPts val="0"/>
+              </a:spcAft>
+            </a:pPr>
+            <a:r>
+              <a:rPr sz="1700" b="1" i="0">
+                <a:solidFill>
+                  <a:srgbClr val="9B3809"/>
+                </a:solidFill>
+                <a:latin typeface="Georgia"/>
+              </a:rPr>
+              <a:t>1 → 3</a:t>
+            </a:r>
+          </a:p>
+          <a:p>
+            <a:pPr algn="l">
+              <a:spcAft>
+                <a:spcPts val="0"/>
+              </a:spcAft>
+            </a:pPr>
+            <a:r>
+              <a:rPr sz="1000" b="0" i="0">
+                <a:solidFill>
+                  <a:srgbClr val="3D4F6A"/>
+                </a:solidFill>
+                <a:latin typeface="Arial"/>
+              </a:rPr>
+              <a:t>EAP contracts active, by Jul 2027; then we track renewals (slide 10)</a:t>
+            </a:r>
+          </a:p>
+        </p:txBody>
+      </p:sp>
+      <p:sp>
+        <p:nvSpPr>
+          <p:cNvPr id="18" name="TextBox 17"/>
+          <p:cNvSpPr txBox="1"/>
+          <p:nvPr/>
+        </p:nvSpPr>
+        <p:spPr>
+          <a:xfrm>
+            <a:off x="621792" y="4434840"/>
+            <a:ext cx="2423160" cy="804672"/>
+          </a:xfrm>
+          <a:prstGeom prst="rect">
+            <a:avLst/>
+          </a:prstGeom>
+          <a:noFill/>
+        </p:spPr>
+        <p:txBody>
+          <a:bodyPr wrap="square" anchor="t" lIns="18288" rIns="18288" tIns="36576" bIns="36576">
+            <a:spAutoFit/>
+          </a:bodyPr>
+          <a:lstStyle/>
+          <a:p>
+            <a:pPr algn="l">
+              <a:spcAft>
+                <a:spcPts val="0"/>
+              </a:spcAft>
+            </a:pPr>
+            <a:r>
+              <a:rPr sz="1700" b="1" i="0">
+                <a:solidFill>
+                  <a:srgbClr val="9B3809"/>
+                </a:solidFill>
+                <a:latin typeface="Georgia"/>
+              </a:rPr>
+              <a:t>Before / after</a:t>
+            </a:r>
+          </a:p>
+          <a:p>
+            <a:pPr algn="l">
+              <a:spcAft>
+                <a:spcPts val="0"/>
+              </a:spcAft>
+            </a:pPr>
+            <a:r>
+              <a:rPr sz="1000" b="0" i="0">
+                <a:solidFill>
+                  <a:srgbClr val="3D4F6A"/>
+                </a:solidFill>
+                <a:latin typeface="Arial"/>
+              </a:rPr>
+              <a:t>scores on every training, from Q4 2026</a:t>
+            </a:r>
+          </a:p>
+        </p:txBody>
+      </p:sp>
+      <p:sp>
+        <p:nvSpPr>
+          <p:cNvPr id="19" name="TextBox 18"/>
+          <p:cNvSpPr txBox="1"/>
+          <p:nvPr/>
+        </p:nvSpPr>
+        <p:spPr>
+          <a:xfrm>
+            <a:off x="621792" y="5257800"/>
+            <a:ext cx="2423160" cy="804672"/>
+          </a:xfrm>
+          <a:prstGeom prst="rect">
+            <a:avLst/>
+          </a:prstGeom>
+          <a:noFill/>
+        </p:spPr>
+        <p:txBody>
+          <a:bodyPr wrap="square" anchor="t" lIns="18288" rIns="18288" tIns="36576" bIns="36576">
+            <a:spAutoFit/>
+          </a:bodyPr>
+          <a:lstStyle/>
+          <a:p>
+            <a:pPr algn="l">
+              <a:spcAft>
+                <a:spcPts val="0"/>
+              </a:spcAft>
+            </a:pPr>
+            <a:r>
+              <a:rPr sz="1700" b="1" i="0">
+                <a:solidFill>
+                  <a:srgbClr val="9B3809"/>
+                </a:solidFill>
+                <a:latin typeface="Georgia"/>
+              </a:rPr>
+              <a:t>1.4</a:t>
+            </a:r>
+          </a:p>
+          <a:p>
+            <a:pPr algn="l">
+              <a:spcAft>
+                <a:spcPts val="0"/>
+              </a:spcAft>
+            </a:pPr>
+            <a:r>
+              <a:rPr sz="1000" b="0" i="0">
+                <a:solidFill>
+                  <a:srgbClr val="3D4F6A"/>
+                </a:solidFill>
+                <a:latin typeface="Arial"/>
+              </a:rPr>
+              <a:t>sessions per B2C client from Q3 2027: our plan (slide 17)</a:t>
+            </a:r>
+          </a:p>
+        </p:txBody>
+      </p:sp>
+      <p:sp>
+        <p:nvSpPr>
+          <p:cNvPr id="20" name="Rounded Rectangle 19"/>
+          <p:cNvSpPr/>
+          <p:nvPr/>
+        </p:nvSpPr>
+        <p:spPr>
+          <a:xfrm>
+            <a:off x="3291840" y="2880360"/>
+            <a:ext cx="2697480" cy="3246120"/>
+          </a:xfrm>
+          <a:prstGeom prst="roundRect">
+            <a:avLst>
+              <a:gd name="adj" fmla="val 6000"/>
+            </a:avLst>
+          </a:prstGeom>
+          <a:solidFill>
+            <a:srgbClr val="EAF2FF"/>
+          </a:solidFill>
+          <a:ln>
+            <a:noFill/>
+          </a:ln>
+          <a:effectLst/>
+        </p:spPr>
+        <p:style>
+          <a:lnRef idx="1">
+            <a:schemeClr val="accent1"/>
+          </a:lnRef>
+          <a:fillRef idx="3">
+            <a:schemeClr val="accent1"/>
+          </a:fillRef>
+          <a:effectRef idx="2">
+            <a:schemeClr val="accent1"/>
+          </a:effectRef>
+          <a:fontRef idx="minor">
+            <a:schemeClr val="lt1"/>
+          </a:fontRef>
+        </p:style>
+        <p:txBody>
+          <a:bodyPr rtlCol="0" anchor="t" wrap="square" lIns="182880" rIns="182880" tIns="36576" bIns="36576"/>
+          <a:lstStyle/>
+          <a:p>
+            <a:pPr algn="l">
+              <a:spcAft>
+                <a:spcPts val="400"/>
+              </a:spcAft>
+            </a:pPr>
+            <a:r>
+              <a:rPr sz="1300" b="0" i="0">
+                <a:solidFill>
+                  <a:srgbClr val="3D4F6A"/>
+                </a:solidFill>
+                <a:latin typeface="Arial"/>
+              </a:rPr>
+              <a:t/>
+            </a:r>
+          </a:p>
+        </p:txBody>
+      </p:sp>
+      <p:sp>
+        <p:nvSpPr>
+          <p:cNvPr id="21" name="Oval 20"/>
+          <p:cNvSpPr/>
+          <p:nvPr/>
+        </p:nvSpPr>
+        <p:spPr>
+          <a:xfrm>
+            <a:off x="3456432" y="3017520"/>
+            <a:ext cx="438912" cy="438912"/>
+          </a:xfrm>
+          <a:prstGeom prst="ellipse">
+            <a:avLst/>
+          </a:prstGeom>
+          <a:solidFill>
+            <a:srgbClr val="576C94"/>
+          </a:solidFill>
+          <a:ln>
+            <a:noFill/>
+          </a:ln>
+          <a:effectLst/>
+        </p:spPr>
+        <p:style>
+          <a:lnRef idx="1">
+            <a:schemeClr val="accent1"/>
+          </a:lnRef>
+          <a:fillRef idx="3">
+            <a:schemeClr val="accent1"/>
+          </a:fillRef>
+          <a:effectRef idx="2">
+            <a:schemeClr val="accent1"/>
+          </a:effectRef>
+          <a:fontRef idx="minor">
+            <a:schemeClr val="lt1"/>
+          </a:fontRef>
+        </p:style>
+        <p:txBody>
+          <a:bodyPr rtlCol="0" anchor="ctr" wrap="square" lIns="0" rIns="0" tIns="36576" bIns="36576"/>
+          <a:lstStyle/>
+          <a:p>
+            <a:pPr algn="ctr">
+              <a:spcAft>
+                <a:spcPts val="400"/>
+              </a:spcAft>
+            </a:pPr>
+            <a:r>
+              <a:rPr sz="1500" b="1" i="0">
+                <a:solidFill>
+                  <a:srgbClr val="FFFFFF"/>
+                </a:solidFill>
+                <a:latin typeface="Georgia"/>
+              </a:rPr>
+              <a:t>2</a:t>
+            </a:r>
+          </a:p>
+        </p:txBody>
+      </p:sp>
+      <p:sp>
+        <p:nvSpPr>
+          <p:cNvPr id="22" name="TextBox 21"/>
+          <p:cNvSpPr txBox="1"/>
+          <p:nvPr/>
+        </p:nvSpPr>
+        <p:spPr>
+          <a:xfrm>
+            <a:off x="3977639" y="2990088"/>
+            <a:ext cx="1965960" cy="502920"/>
+          </a:xfrm>
+          <a:prstGeom prst="rect">
+            <a:avLst/>
+          </a:prstGeom>
+          <a:noFill/>
+        </p:spPr>
+        <p:txBody>
+          <a:bodyPr wrap="square" anchor="ctr" lIns="18288" rIns="18288" tIns="36576" bIns="36576">
+            <a:spAutoFit/>
+          </a:bodyPr>
+          <a:lstStyle/>
+          <a:p>
+            <a:pPr algn="l">
+              <a:spcAft>
+                <a:spcPts val="0"/>
+              </a:spcAft>
+            </a:pPr>
+            <a:r>
+              <a:rPr sz="1600" b="1" i="0">
+                <a:solidFill>
+                  <a:srgbClr val="1E2A3A"/>
+                </a:solidFill>
+                <a:latin typeface="Georgia"/>
+              </a:rPr>
+              <a:t>People</a:t>
+            </a:r>
+          </a:p>
+          <a:p>
+            <a:pPr algn="l">
+              <a:spcAft>
+                <a:spcPts val="0"/>
+              </a:spcAft>
+            </a:pPr>
+            <a:r>
+              <a:rPr sz="1000" b="0" i="0">
+                <a:solidFill>
+                  <a:srgbClr val="6B7A99"/>
+                </a:solidFill>
+                <a:latin typeface="Arial"/>
+              </a:rPr>
+              <a:t>Staff and psychologists</a:t>
+            </a:r>
+          </a:p>
+        </p:txBody>
+      </p:sp>
+      <p:sp>
+        <p:nvSpPr>
+          <p:cNvPr id="23" name="TextBox 22"/>
+          <p:cNvSpPr txBox="1"/>
+          <p:nvPr/>
+        </p:nvSpPr>
+        <p:spPr>
+          <a:xfrm>
+            <a:off x="3456432" y="3611880"/>
+            <a:ext cx="2423160" cy="804672"/>
+          </a:xfrm>
+          <a:prstGeom prst="rect">
+            <a:avLst/>
+          </a:prstGeom>
+          <a:noFill/>
+        </p:spPr>
+        <p:txBody>
+          <a:bodyPr wrap="square" anchor="t" lIns="18288" rIns="18288" tIns="36576" bIns="36576">
+            <a:spAutoFit/>
+          </a:bodyPr>
+          <a:lstStyle/>
+          <a:p>
+            <a:pPr algn="l">
+              <a:spcAft>
+                <a:spcPts val="0"/>
+              </a:spcAft>
+            </a:pPr>
+            <a:r>
+              <a:rPr sz="1700" b="1" i="0">
+                <a:solidFill>
+                  <a:srgbClr val="576C94"/>
+                </a:solidFill>
+                <a:latin typeface="Georgia"/>
+              </a:rPr>
+              <a:t>Rp5.73M</a:t>
+            </a:r>
+          </a:p>
+          <a:p>
+            <a:pPr algn="l">
+              <a:spcAft>
+                <a:spcPts val="0"/>
+              </a:spcAft>
+            </a:pPr>
+            <a:r>
+              <a:rPr sz="1000" b="0" i="0">
+                <a:solidFill>
+                  <a:srgbClr val="3D4F6A"/>
+                </a:solidFill>
+                <a:latin typeface="Arial"/>
+              </a:rPr>
+              <a:t>fair-pay floor + BPJS and THR (slide 21)</a:t>
+            </a:r>
+          </a:p>
+        </p:txBody>
+      </p:sp>
+      <p:sp>
+        <p:nvSpPr>
+          <p:cNvPr id="24" name="TextBox 23"/>
+          <p:cNvSpPr txBox="1"/>
+          <p:nvPr/>
+        </p:nvSpPr>
+        <p:spPr>
+          <a:xfrm>
+            <a:off x="3456432" y="4434840"/>
+            <a:ext cx="2423160" cy="804672"/>
+          </a:xfrm>
+          <a:prstGeom prst="rect">
+            <a:avLst/>
+          </a:prstGeom>
+          <a:noFill/>
+        </p:spPr>
+        <p:txBody>
+          <a:bodyPr wrap="square" anchor="t" lIns="18288" rIns="18288" tIns="36576" bIns="36576">
+            <a:spAutoFit/>
+          </a:bodyPr>
+          <a:lstStyle/>
+          <a:p>
+            <a:pPr algn="l">
+              <a:spcAft>
+                <a:spcPts val="0"/>
+              </a:spcAft>
+            </a:pPr>
+            <a:r>
+              <a:rPr sz="1700" b="1" i="0">
+                <a:solidFill>
+                  <a:srgbClr val="576C94"/>
+                </a:solidFill>
+                <a:latin typeface="Georgia"/>
+              </a:rPr>
+              <a:t>Rp100/150/200M</a:t>
+            </a:r>
+          </a:p>
+          <a:p>
+            <a:pPr algn="l">
+              <a:spcAft>
+                <a:spcPts val="0"/>
+              </a:spcAft>
+            </a:pPr>
+            <a:r>
+              <a:rPr sz="1000" b="0" i="0">
+                <a:solidFill>
+                  <a:srgbClr val="3D4F6A"/>
+                </a:solidFill>
+                <a:latin typeface="Arial"/>
+              </a:rPr>
+              <a:t>monthly sales that unlock the 3 pay steps</a:t>
+            </a:r>
+          </a:p>
+        </p:txBody>
+      </p:sp>
+      <p:sp>
+        <p:nvSpPr>
+          <p:cNvPr id="25" name="TextBox 24"/>
+          <p:cNvSpPr txBox="1"/>
+          <p:nvPr/>
+        </p:nvSpPr>
+        <p:spPr>
+          <a:xfrm>
+            <a:off x="3456432" y="5257800"/>
+            <a:ext cx="2423160" cy="804672"/>
+          </a:xfrm>
+          <a:prstGeom prst="rect">
+            <a:avLst/>
+          </a:prstGeom>
+          <a:noFill/>
+        </p:spPr>
+        <p:txBody>
+          <a:bodyPr wrap="square" anchor="t" lIns="18288" rIns="18288" tIns="36576" bIns="36576">
+            <a:spAutoFit/>
+          </a:bodyPr>
+          <a:lstStyle/>
+          <a:p>
+            <a:pPr algn="l">
+              <a:spcAft>
+                <a:spcPts val="0"/>
+              </a:spcAft>
+            </a:pPr>
+            <a:r>
+              <a:rPr sz="1700" b="1" i="0">
+                <a:solidFill>
+                  <a:srgbClr val="576C94"/>
+                </a:solidFill>
+                <a:latin typeface="Georgia"/>
+              </a:rPr>
+              <a:t>74%</a:t>
+            </a:r>
+          </a:p>
+          <a:p>
+            <a:pPr algn="l">
+              <a:spcAft>
+                <a:spcPts val="0"/>
+              </a:spcAft>
+            </a:pPr>
+            <a:r>
+              <a:rPr sz="1000" b="0" i="0">
+                <a:solidFill>
+                  <a:srgbClr val="3D4F6A"/>
+                </a:solidFill>
+                <a:latin typeface="Arial"/>
+              </a:rPr>
+              <a:t>busiest load on paid part-timers (healthy 60-80%) (slide 38)</a:t>
+            </a:r>
+          </a:p>
+        </p:txBody>
+      </p:sp>
+      <p:sp>
+        <p:nvSpPr>
+          <p:cNvPr id="26" name="Rounded Rectangle 25"/>
+          <p:cNvSpPr/>
+          <p:nvPr/>
+        </p:nvSpPr>
+        <p:spPr>
+          <a:xfrm>
+            <a:off x="6126480" y="2880360"/>
+            <a:ext cx="2697480" cy="3246120"/>
+          </a:xfrm>
+          <a:prstGeom prst="roundRect">
+            <a:avLst>
+              <a:gd name="adj" fmla="val 6000"/>
+            </a:avLst>
+          </a:prstGeom>
+          <a:solidFill>
+            <a:srgbClr val="EAF2FF"/>
+          </a:solidFill>
+          <a:ln>
+            <a:noFill/>
+          </a:ln>
+          <a:effectLst/>
+        </p:spPr>
+        <p:style>
+          <a:lnRef idx="1">
+            <a:schemeClr val="accent1"/>
+          </a:lnRef>
+          <a:fillRef idx="3">
+            <a:schemeClr val="accent1"/>
+          </a:fillRef>
+          <a:effectRef idx="2">
+            <a:schemeClr val="accent1"/>
+          </a:effectRef>
+          <a:fontRef idx="minor">
+            <a:schemeClr val="lt1"/>
+          </a:fontRef>
+        </p:style>
+        <p:txBody>
+          <a:bodyPr rtlCol="0" anchor="t" wrap="square" lIns="182880" rIns="182880" tIns="36576" bIns="36576"/>
+          <a:lstStyle/>
+          <a:p>
+            <a:pPr algn="l">
+              <a:spcAft>
+                <a:spcPts val="400"/>
+              </a:spcAft>
+            </a:pPr>
+            <a:r>
+              <a:rPr sz="1300" b="0" i="0">
+                <a:solidFill>
+                  <a:srgbClr val="3D4F6A"/>
+                </a:solidFill>
+                <a:latin typeface="Arial"/>
+              </a:rPr>
+              <a:t/>
+            </a:r>
+          </a:p>
+        </p:txBody>
+      </p:sp>
+      <p:sp>
+        <p:nvSpPr>
+          <p:cNvPr id="27" name="Oval 26"/>
+          <p:cNvSpPr/>
+          <p:nvPr/>
+        </p:nvSpPr>
+        <p:spPr>
+          <a:xfrm>
+            <a:off x="6291072" y="3017520"/>
+            <a:ext cx="438912" cy="438912"/>
+          </a:xfrm>
+          <a:prstGeom prst="ellipse">
+            <a:avLst/>
+          </a:prstGeom>
+          <a:solidFill>
+            <a:srgbClr val="9B3809"/>
+          </a:solidFill>
+          <a:ln>
+            <a:noFill/>
+          </a:ln>
+          <a:effectLst/>
+        </p:spPr>
+        <p:style>
+          <a:lnRef idx="1">
+            <a:schemeClr val="accent1"/>
+          </a:lnRef>
+          <a:fillRef idx="3">
+            <a:schemeClr val="accent1"/>
+          </a:fillRef>
+          <a:effectRef idx="2">
+            <a:schemeClr val="accent1"/>
+          </a:effectRef>
+          <a:fontRef idx="minor">
+            <a:schemeClr val="lt1"/>
+          </a:fontRef>
+        </p:style>
+        <p:txBody>
+          <a:bodyPr rtlCol="0" anchor="ctr" wrap="square" lIns="0" rIns="0" tIns="36576" bIns="36576"/>
+          <a:lstStyle/>
+          <a:p>
+            <a:pPr algn="ctr">
+              <a:spcAft>
+                <a:spcPts val="400"/>
+              </a:spcAft>
+            </a:pPr>
+            <a:r>
+              <a:rPr sz="1500" b="1" i="0">
+                <a:solidFill>
+                  <a:srgbClr val="FFFFFF"/>
+                </a:solidFill>
+                <a:latin typeface="Georgia"/>
+              </a:rPr>
+              <a:t>3</a:t>
+            </a:r>
+          </a:p>
+        </p:txBody>
+      </p:sp>
+      <p:sp>
+        <p:nvSpPr>
+          <p:cNvPr id="28" name="TextBox 27"/>
+          <p:cNvSpPr txBox="1"/>
+          <p:nvPr/>
+        </p:nvSpPr>
+        <p:spPr>
+          <a:xfrm>
+            <a:off x="6812280" y="2990088"/>
+            <a:ext cx="1965960" cy="502920"/>
+          </a:xfrm>
+          <a:prstGeom prst="rect">
+            <a:avLst/>
+          </a:prstGeom>
+          <a:noFill/>
+        </p:spPr>
+        <p:txBody>
+          <a:bodyPr wrap="square" anchor="ctr" lIns="18288" rIns="18288" tIns="36576" bIns="36576">
+            <a:spAutoFit/>
+          </a:bodyPr>
+          <a:lstStyle/>
+          <a:p>
+            <a:pPr algn="l">
+              <a:spcAft>
+                <a:spcPts val="0"/>
+              </a:spcAft>
+            </a:pPr>
+            <a:r>
+              <a:rPr sz="1600" b="1" i="0">
+                <a:solidFill>
+                  <a:srgbClr val="1E2A3A"/>
+                </a:solidFill>
+                <a:latin typeface="Georgia"/>
+              </a:rPr>
+              <a:t>Company</a:t>
+            </a:r>
+          </a:p>
+          <a:p>
+            <a:pPr algn="l">
+              <a:spcAft>
+                <a:spcPts val="0"/>
+              </a:spcAft>
+            </a:pPr>
+            <a:r>
+              <a:rPr sz="1000" b="0" i="0">
+                <a:solidFill>
+                  <a:srgbClr val="6B7A99"/>
+                </a:solidFill>
+                <a:latin typeface="Arial"/>
+              </a:rPr>
+              <a:t>Founders and future investors</a:t>
+            </a:r>
+          </a:p>
+        </p:txBody>
+      </p:sp>
+      <p:sp>
+        <p:nvSpPr>
+          <p:cNvPr id="29" name="TextBox 28"/>
+          <p:cNvSpPr txBox="1"/>
+          <p:nvPr/>
+        </p:nvSpPr>
+        <p:spPr>
+          <a:xfrm>
+            <a:off x="6291072" y="3611880"/>
+            <a:ext cx="2423160" cy="804672"/>
+          </a:xfrm>
+          <a:prstGeom prst="rect">
+            <a:avLst/>
+          </a:prstGeom>
+          <a:noFill/>
+        </p:spPr>
+        <p:txBody>
+          <a:bodyPr wrap="square" anchor="t" lIns="18288" rIns="18288" tIns="36576" bIns="36576">
+            <a:spAutoFit/>
+          </a:bodyPr>
+          <a:lstStyle/>
+          <a:p>
+            <a:pPr algn="l">
+              <a:spcAft>
+                <a:spcPts val="0"/>
+              </a:spcAft>
+            </a:pPr>
+            <a:r>
+              <a:rPr sz="1700" b="1" i="0">
+                <a:solidFill>
+                  <a:srgbClr val="9B3809"/>
+                </a:solidFill>
+                <a:latin typeface="Georgia"/>
+              </a:rPr>
+              <a:t>26.1%</a:t>
+            </a:r>
+          </a:p>
+          <a:p>
+            <a:pPr algn="l">
+              <a:spcAft>
+                <a:spcPts val="0"/>
+              </a:spcAft>
+            </a:pPr>
+            <a:r>
+              <a:rPr sz="1000" b="0" i="0">
+                <a:solidFill>
+                  <a:srgbClr val="3D4F6A"/>
+                </a:solidFill>
+                <a:latin typeface="Arial"/>
+              </a:rPr>
+              <a:t>net margin in 2027; we need 15%+ (slide 26)</a:t>
+            </a:r>
+          </a:p>
+        </p:txBody>
+      </p:sp>
+      <p:sp>
+        <p:nvSpPr>
+          <p:cNvPr id="30" name="TextBox 29"/>
+          <p:cNvSpPr txBox="1"/>
+          <p:nvPr/>
+        </p:nvSpPr>
+        <p:spPr>
+          <a:xfrm>
+            <a:off x="6291072" y="4434840"/>
+            <a:ext cx="2423160" cy="804672"/>
+          </a:xfrm>
+          <a:prstGeom prst="rect">
+            <a:avLst/>
+          </a:prstGeom>
+          <a:noFill/>
+        </p:spPr>
+        <p:txBody>
+          <a:bodyPr wrap="square" anchor="t" lIns="18288" rIns="18288" tIns="36576" bIns="36576">
+            <a:spAutoFit/>
+          </a:bodyPr>
+          <a:lstStyle/>
+          <a:p>
+            <a:pPr algn="l">
+              <a:spcAft>
+                <a:spcPts val="0"/>
+              </a:spcAft>
+            </a:pPr>
+            <a:r>
+              <a:rPr sz="1700" b="1" i="0">
+                <a:solidFill>
+                  <a:srgbClr val="9B3809"/>
+                </a:solidFill>
+                <a:latin typeface="Georgia"/>
+              </a:rPr>
+              <a:t>Rp82M</a:t>
+            </a:r>
+          </a:p>
+          <a:p>
+            <a:pPr algn="l">
+              <a:spcAft>
+                <a:spcPts val="0"/>
+              </a:spcAft>
+            </a:pPr>
+            <a:r>
+              <a:rPr sz="1000" b="0" i="0">
+                <a:solidFill>
+                  <a:srgbClr val="3D4F6A"/>
+                </a:solidFill>
+                <a:latin typeface="Arial"/>
+              </a:rPr>
+              <a:t>lowest cash (Feb 2027) (slide 27)</a:t>
+            </a:r>
+          </a:p>
+        </p:txBody>
+      </p:sp>
+      <p:sp>
+        <p:nvSpPr>
+          <p:cNvPr id="31" name="TextBox 30"/>
+          <p:cNvSpPr txBox="1"/>
+          <p:nvPr/>
+        </p:nvSpPr>
+        <p:spPr>
+          <a:xfrm>
+            <a:off x="6291072" y="5257800"/>
+            <a:ext cx="2423160" cy="804672"/>
+          </a:xfrm>
+          <a:prstGeom prst="rect">
+            <a:avLst/>
+          </a:prstGeom>
+          <a:noFill/>
+        </p:spPr>
+        <p:txBody>
+          <a:bodyPr wrap="square" anchor="t" lIns="18288" rIns="18288" tIns="36576" bIns="36576">
+            <a:spAutoFit/>
+          </a:bodyPr>
+          <a:lstStyle/>
+          <a:p>
+            <a:pPr algn="l">
+              <a:spcAft>
+                <a:spcPts val="0"/>
+              </a:spcAft>
+            </a:pPr>
+            <a:r>
+              <a:rPr sz="1700" b="1" i="0">
+                <a:solidFill>
+                  <a:srgbClr val="9B3809"/>
+                </a:solidFill>
+                <a:latin typeface="Georgia"/>
+              </a:rPr>
+              <a:t>61% → 38%</a:t>
+            </a:r>
+          </a:p>
+          <a:p>
+            <a:pPr algn="l">
+              <a:spcAft>
+                <a:spcPts val="0"/>
+              </a:spcAft>
+            </a:pPr>
+            <a:r>
+              <a:rPr sz="1000" b="0" i="0">
+                <a:solidFill>
+                  <a:srgbClr val="3D4F6A"/>
+                </a:solidFill>
+                <a:latin typeface="Arial"/>
+              </a:rPr>
+              <a:t>BI's share of sales, new prices only → full plan (slide 14)</a:t>
+            </a:r>
+          </a:p>
+        </p:txBody>
+      </p:sp>
+      <p:sp>
+        <p:nvSpPr>
+          <p:cNvPr id="32" name="Rounded Rectangle 31"/>
+          <p:cNvSpPr/>
+          <p:nvPr/>
+        </p:nvSpPr>
+        <p:spPr>
+          <a:xfrm>
+            <a:off x="8961120" y="2880360"/>
+            <a:ext cx="2697480" cy="3246120"/>
+          </a:xfrm>
+          <a:prstGeom prst="roundRect">
+            <a:avLst>
+              <a:gd name="adj" fmla="val 6000"/>
+            </a:avLst>
+          </a:prstGeom>
+          <a:solidFill>
+            <a:srgbClr val="EAF2FF"/>
+          </a:solidFill>
+          <a:ln>
+            <a:noFill/>
+          </a:ln>
+          <a:effectLst/>
+        </p:spPr>
+        <p:style>
+          <a:lnRef idx="1">
+            <a:schemeClr val="accent1"/>
+          </a:lnRef>
+          <a:fillRef idx="3">
+            <a:schemeClr val="accent1"/>
+          </a:fillRef>
+          <a:effectRef idx="2">
+            <a:schemeClr val="accent1"/>
+          </a:effectRef>
+          <a:fontRef idx="minor">
+            <a:schemeClr val="lt1"/>
+          </a:fontRef>
+        </p:style>
+        <p:txBody>
+          <a:bodyPr rtlCol="0" anchor="t" wrap="square" lIns="182880" rIns="182880" tIns="36576" bIns="36576"/>
+          <a:lstStyle/>
+          <a:p>
+            <a:pPr algn="l">
+              <a:spcAft>
+                <a:spcPts val="400"/>
+              </a:spcAft>
+            </a:pPr>
+            <a:r>
+              <a:rPr sz="1300" b="0" i="0">
+                <a:solidFill>
+                  <a:srgbClr val="3D4F6A"/>
+                </a:solidFill>
+                <a:latin typeface="Arial"/>
+              </a:rPr>
+              <a:t/>
+            </a:r>
+          </a:p>
+        </p:txBody>
+      </p:sp>
+      <p:sp>
+        <p:nvSpPr>
+          <p:cNvPr id="33" name="Oval 32"/>
+          <p:cNvSpPr/>
+          <p:nvPr/>
+        </p:nvSpPr>
+        <p:spPr>
+          <a:xfrm>
+            <a:off x="9125712" y="3017520"/>
+            <a:ext cx="438912" cy="438912"/>
+          </a:xfrm>
+          <a:prstGeom prst="ellipse">
+            <a:avLst/>
+          </a:prstGeom>
+          <a:solidFill>
+            <a:srgbClr val="6379A1"/>
+          </a:solidFill>
+          <a:ln>
+            <a:noFill/>
+          </a:ln>
+          <a:effectLst/>
+        </p:spPr>
+        <p:style>
+          <a:lnRef idx="1">
+            <a:schemeClr val="accent1"/>
+          </a:lnRef>
+          <a:fillRef idx="3">
+            <a:schemeClr val="accent1"/>
+          </a:fillRef>
+          <a:effectRef idx="2">
+            <a:schemeClr val="accent1"/>
+          </a:effectRef>
+          <a:fontRef idx="minor">
+            <a:schemeClr val="lt1"/>
+          </a:fontRef>
+        </p:style>
+        <p:txBody>
+          <a:bodyPr rtlCol="0" anchor="ctr" wrap="square" lIns="0" rIns="0" tIns="36576" bIns="36576"/>
+          <a:lstStyle/>
+          <a:p>
+            <a:pPr algn="ctr">
+              <a:spcAft>
+                <a:spcPts val="400"/>
+              </a:spcAft>
+            </a:pPr>
+            <a:r>
+              <a:rPr sz="1500" b="1" i="0">
+                <a:solidFill>
+                  <a:srgbClr val="FFFFFF"/>
+                </a:solidFill>
+                <a:latin typeface="Georgia"/>
+              </a:rPr>
+              <a:t>4</a:t>
+            </a:r>
+          </a:p>
+        </p:txBody>
+      </p:sp>
+      <p:sp>
+        <p:nvSpPr>
+          <p:cNvPr id="34" name="TextBox 33"/>
+          <p:cNvSpPr txBox="1"/>
+          <p:nvPr/>
+        </p:nvSpPr>
+        <p:spPr>
+          <a:xfrm>
+            <a:off x="9646920" y="2990088"/>
+            <a:ext cx="1965960" cy="502920"/>
+          </a:xfrm>
+          <a:prstGeom prst="rect">
+            <a:avLst/>
+          </a:prstGeom>
+          <a:noFill/>
+        </p:spPr>
+        <p:txBody>
+          <a:bodyPr wrap="square" anchor="ctr" lIns="18288" rIns="18288" tIns="36576" bIns="36576">
+            <a:spAutoFit/>
+          </a:bodyPr>
+          <a:lstStyle/>
+          <a:p>
+            <a:pPr algn="l">
+              <a:spcAft>
+                <a:spcPts val="0"/>
+              </a:spcAft>
+            </a:pPr>
+            <a:r>
+              <a:rPr sz="1600" b="1" i="0">
+                <a:solidFill>
+                  <a:srgbClr val="1E2A3A"/>
+                </a:solidFill>
+                <a:latin typeface="Georgia"/>
+              </a:rPr>
+              <a:t>Community</a:t>
+            </a:r>
+          </a:p>
+          <a:p>
+            <a:pPr algn="l">
+              <a:spcAft>
+                <a:spcPts val="0"/>
+              </a:spcAft>
+            </a:pPr>
+            <a:r>
+              <a:rPr sz="1000" b="0" i="0">
+                <a:solidFill>
+                  <a:srgbClr val="6B7A99"/>
+                </a:solidFill>
+                <a:latin typeface="Arial"/>
+              </a:rPr>
+              <a:t>People beyond our clients</a:t>
+            </a:r>
+          </a:p>
+        </p:txBody>
+      </p:sp>
+      <p:sp>
+        <p:nvSpPr>
+          <p:cNvPr id="35" name="TextBox 34"/>
+          <p:cNvSpPr txBox="1"/>
+          <p:nvPr/>
+        </p:nvSpPr>
+        <p:spPr>
+          <a:xfrm>
+            <a:off x="9125712" y="3611880"/>
+            <a:ext cx="2423160" cy="804672"/>
+          </a:xfrm>
+          <a:prstGeom prst="rect">
+            <a:avLst/>
+          </a:prstGeom>
+          <a:noFill/>
+        </p:spPr>
+        <p:txBody>
+          <a:bodyPr wrap="square" anchor="t" lIns="18288" rIns="18288" tIns="36576" bIns="36576">
+            <a:spAutoFit/>
+          </a:bodyPr>
+          <a:lstStyle/>
+          <a:p>
+            <a:pPr algn="l">
+              <a:spcAft>
+                <a:spcPts val="0"/>
+              </a:spcAft>
+            </a:pPr>
+            <a:r>
+              <a:rPr sz="1700" b="1" i="0">
+                <a:solidFill>
+                  <a:srgbClr val="6379A1"/>
+                </a:solidFill>
+                <a:latin typeface="Georgia"/>
+              </a:rPr>
+              <a:t>710 + ~1,400</a:t>
+            </a:r>
+          </a:p>
+          <a:p>
+            <a:pPr algn="l">
+              <a:spcAft>
+                <a:spcPts val="0"/>
+              </a:spcAft>
+            </a:pPr>
+            <a:r>
+              <a:rPr sz="1000" b="0" i="0">
+                <a:solidFill>
+                  <a:srgbClr val="3D4F6A"/>
+                </a:solidFill>
+                <a:latin typeface="Arial"/>
+              </a:rPr>
+              <a:t>people we train in 2027 + people they reach (estimate: 2 each)</a:t>
+            </a:r>
+          </a:p>
+        </p:txBody>
+      </p:sp>
+      <p:sp>
+        <p:nvSpPr>
+          <p:cNvPr id="36" name="TextBox 35"/>
+          <p:cNvSpPr txBox="1"/>
+          <p:nvPr/>
+        </p:nvSpPr>
+        <p:spPr>
+          <a:xfrm>
+            <a:off x="9125712" y="4434840"/>
+            <a:ext cx="2423160" cy="804672"/>
+          </a:xfrm>
+          <a:prstGeom prst="rect">
+            <a:avLst/>
+          </a:prstGeom>
+          <a:noFill/>
+        </p:spPr>
+        <p:txBody>
+          <a:bodyPr wrap="square" anchor="t" lIns="18288" rIns="18288" tIns="36576" bIns="36576">
+            <a:spAutoFit/>
+          </a:bodyPr>
+          <a:lstStyle/>
+          <a:p>
+            <a:pPr algn="l">
+              <a:spcAft>
+                <a:spcPts val="0"/>
+              </a:spcAft>
+            </a:pPr>
+            <a:r>
+              <a:rPr sz="1700" b="1" i="0">
+                <a:solidFill>
+                  <a:srgbClr val="6379A1"/>
+                </a:solidFill>
+                <a:latin typeface="Georgia"/>
+              </a:rPr>
+              <a:t>480 + 166</a:t>
+            </a:r>
+          </a:p>
+          <a:p>
+            <a:pPr algn="l">
+              <a:spcAft>
+                <a:spcPts val="0"/>
+              </a:spcAft>
+            </a:pPr>
+            <a:r>
+              <a:rPr sz="1000" b="0" i="0">
+                <a:solidFill>
+                  <a:srgbClr val="3D4F6A"/>
+                </a:solidFill>
+                <a:latin typeface="Arial"/>
+              </a:rPr>
+              <a:t>people at our bank and public events + counseling sessions (slide 17)</a:t>
+            </a:r>
+          </a:p>
+        </p:txBody>
+      </p:sp>
+      <p:sp>
+        <p:nvSpPr>
+          <p:cNvPr id="37" name="TextBox 36"/>
+          <p:cNvSpPr txBox="1"/>
+          <p:nvPr/>
+        </p:nvSpPr>
+        <p:spPr>
+          <a:xfrm>
+            <a:off x="9125712" y="5257800"/>
+            <a:ext cx="2423160" cy="804672"/>
+          </a:xfrm>
+          <a:prstGeom prst="rect">
+            <a:avLst/>
+          </a:prstGeom>
+          <a:noFill/>
+        </p:spPr>
+        <p:txBody>
+          <a:bodyPr wrap="square" anchor="t" lIns="18288" rIns="18288" tIns="36576" bIns="36576">
+            <a:spAutoFit/>
+          </a:bodyPr>
+          <a:lstStyle/>
+          <a:p>
+            <a:pPr algn="l">
+              <a:spcAft>
+                <a:spcPts val="0"/>
+              </a:spcAft>
+            </a:pPr>
+            <a:r>
+              <a:rPr sz="1700" b="1" i="0">
+                <a:solidFill>
+                  <a:srgbClr val="6379A1"/>
+                </a:solidFill>
+                <a:latin typeface="Georgia"/>
+              </a:rPr>
+              <a:t>20%</a:t>
+            </a:r>
+          </a:p>
+          <a:p>
+            <a:pPr algn="l">
+              <a:spcAft>
+                <a:spcPts val="0"/>
+              </a:spcAft>
+            </a:pPr>
+            <a:r>
+              <a:rPr sz="1000" b="0" i="0">
+                <a:solidFill>
+                  <a:srgbClr val="3D4F6A"/>
+                </a:solidFill>
+                <a:latin typeface="Arial"/>
+              </a:rPr>
+              <a:t>new clients from referral by Q4 2027 (slide 18)</a:t>
+            </a:r>
+          </a:p>
+        </p:txBody>
+      </p:sp>
+    </p:spTree>
+  </p:cSld>
+  <p:clrMapOvr>
+    <a:masterClrMapping/>
+  </p:clrMapOvr>
+</p:sld>
+</file>
+
+<file path=ppt/slides/slide40.xml><?xml version="1.0" encoding="utf-8"?>
 <p:sld xmlns:a="http://schemas.openxmlformats.org/drawingml/2006/main" xmlns:p="http://schemas.openxmlformats.org/presentationml/2006/main" xmlns:r="http://schemas.openxmlformats.org/officeDocument/2006/relationships">
   <p:cSld>
     <p:bg>
@@ -51105,7 +56208,7 @@
                 </a:solidFill>
                 <a:latin typeface="Arial"/>
               </a:rPr>
-              <a:t>38</a:t>
+              <a:t>40</a:t>
             </a:r>
           </a:p>
         </p:txBody>
@@ -52090,7 +57193,7 @@
 </p:sld>
 </file>
 
-<file path=ppt/slides/slide39.xml><?xml version="1.0" encoding="utf-8"?>
+<file path=ppt/slides/slide41.xml><?xml version="1.0" encoding="utf-8"?>
 <p:sld xmlns:a="http://schemas.openxmlformats.org/drawingml/2006/main" xmlns:p="http://schemas.openxmlformats.org/presentationml/2006/main" xmlns:r="http://schemas.openxmlformats.org/officeDocument/2006/relationships">
   <p:cSld>
     <p:bg>
@@ -52336,7 +57439,7 @@
                 </a:solidFill>
                 <a:latin typeface="Arial"/>
               </a:rPr>
-              <a:t>39</a:t>
+              <a:t>41</a:t>
             </a:r>
           </a:p>
         </p:txBody>
@@ -53443,1991 +58546,7 @@
 </p:sld>
 </file>
 
-<file path=ppt/slides/slide4.xml><?xml version="1.0" encoding="utf-8"?>
-<p:sld xmlns:a="http://schemas.openxmlformats.org/drawingml/2006/main" xmlns:p="http://schemas.openxmlformats.org/presentationml/2006/main" xmlns:r="http://schemas.openxmlformats.org/officeDocument/2006/relationships">
-  <p:cSld>
-    <p:bg>
-      <p:bgPr>
-        <a:solidFill>
-          <a:srgbClr val="FAF7F2"/>
-        </a:solidFill>
-        <a:effectLst/>
-      </p:bgPr>
-    </p:bg>
-    <p:spTree>
-      <p:nvGrpSpPr>
-        <p:cNvPr id="1" name=""/>
-        <p:cNvGrpSpPr/>
-        <p:nvPr/>
-      </p:nvGrpSpPr>
-      <p:grpSpPr/>
-      <p:sp>
-        <p:nvSpPr>
-          <p:cNvPr id="2" name="Title"/>
-          <p:cNvSpPr txBox="1"/>
-          <p:nvPr/>
-        </p:nvSpPr>
-        <p:spPr>
-          <a:xfrm>
-            <a:off x="457200" y="329184"/>
-            <a:ext cx="9875520" cy="566928"/>
-          </a:xfrm>
-          <a:prstGeom prst="rect">
-            <a:avLst/>
-          </a:prstGeom>
-          <a:noFill/>
-        </p:spPr>
-        <p:txBody>
-          <a:bodyPr wrap="square" anchor="ctr" lIns="18288" rIns="18288" tIns="36576" bIns="36576">
-            <a:spAutoFit/>
-          </a:bodyPr>
-          <a:lstStyle/>
-          <a:p>
-            <a:pPr algn="l">
-              <a:spcAft>
-                <a:spcPts val="400"/>
-              </a:spcAft>
-            </a:pPr>
-            <a:r>
-              <a:rPr sz="2800" b="1" i="0">
-                <a:solidFill>
-                  <a:srgbClr val="1E2A3A"/>
-                </a:solidFill>
-                <a:latin typeface="Georgia"/>
-              </a:rPr>
-              <a:t>Two goals, </a:t>
-            </a:r>
-            <a:r>
-              <a:rPr sz="2800" b="1" i="0">
-                <a:solidFill>
-                  <a:srgbClr val="9B3809"/>
-                </a:solidFill>
-                <a:latin typeface="Georgia"/>
-              </a:rPr>
-              <a:t>four impact pillars</a:t>
-            </a:r>
-            <a:r>
-              <a:rPr sz="2800" b="1" i="0">
-                <a:solidFill>
-                  <a:srgbClr val="1E2A3A"/>
-                </a:solidFill>
-                <a:latin typeface="Georgia"/>
-              </a:rPr>
-              <a:t/>
-            </a:r>
-          </a:p>
-        </p:txBody>
-      </p:sp>
-      <p:sp>
-        <p:nvSpPr>
-          <p:cNvPr id="3" name="Subtitle"/>
-          <p:cNvSpPr txBox="1"/>
-          <p:nvPr/>
-        </p:nvSpPr>
-        <p:spPr>
-          <a:xfrm>
-            <a:off x="457200" y="877824"/>
-            <a:ext cx="9875520" cy="365760"/>
-          </a:xfrm>
-          <a:prstGeom prst="rect">
-            <a:avLst/>
-          </a:prstGeom>
-          <a:noFill/>
-        </p:spPr>
-        <p:txBody>
-          <a:bodyPr wrap="square" anchor="t" lIns="18288" rIns="18288" tIns="36576" bIns="36576">
-            <a:spAutoFit/>
-          </a:bodyPr>
-          <a:lstStyle/>
-          <a:p>
-            <a:pPr algn="l">
-              <a:spcAft>
-                <a:spcPts val="400"/>
-              </a:spcAft>
-            </a:pPr>
-            <a:r>
-              <a:rPr sz="1400" b="0" i="0">
-                <a:solidFill>
-                  <a:srgbClr val="3D4F6A"/>
-                </a:solidFill>
-                <a:latin typeface="Arial"/>
-              </a:rPr>
-              <a:t>The goals say why we exist. The pillars show, with numbers, that it is working.</a:t>
-            </a:r>
-          </a:p>
-        </p:txBody>
-      </p:sp>
-      <p:sp>
-        <p:nvSpPr>
-          <p:cNvPr id="4" name="Tag"/>
-          <p:cNvSpPr/>
-          <p:nvPr/>
-        </p:nvSpPr>
-        <p:spPr>
-          <a:xfrm>
-            <a:off x="10469880" y="420624"/>
-            <a:ext cx="1280160" cy="310896"/>
-          </a:xfrm>
-          <a:prstGeom prst="roundRect">
-            <a:avLst>
-              <a:gd name="adj" fmla="val 50000"/>
-            </a:avLst>
-          </a:prstGeom>
-          <a:solidFill>
-            <a:srgbClr val="F7DDD2"/>
-          </a:solidFill>
-          <a:ln>
-            <a:noFill/>
-          </a:ln>
-          <a:effectLst/>
-        </p:spPr>
-        <p:style>
-          <a:lnRef idx="1">
-            <a:schemeClr val="accent1"/>
-          </a:lnRef>
-          <a:fillRef idx="3">
-            <a:schemeClr val="accent1"/>
-          </a:fillRef>
-          <a:effectRef idx="2">
-            <a:schemeClr val="accent1"/>
-          </a:effectRef>
-          <a:fontRef idx="minor">
-            <a:schemeClr val="lt1"/>
-          </a:fontRef>
-        </p:style>
-        <p:txBody>
-          <a:bodyPr rtlCol="0" anchor="ctr" wrap="square" lIns="18288" rIns="18288" tIns="36576" bIns="36576"/>
-          <a:lstStyle/>
-          <a:p>
-            <a:pPr algn="ctr">
-              <a:spcAft>
-                <a:spcPts val="400"/>
-              </a:spcAft>
-            </a:pPr>
-            <a:r>
-              <a:rPr sz="1000" b="1" i="0">
-                <a:solidFill>
-                  <a:srgbClr val="9B3809"/>
-                </a:solidFill>
-                <a:latin typeface="Arial"/>
-              </a:rPr>
-              <a:t>OUR GOAL</a:t>
-            </a:r>
-          </a:p>
-        </p:txBody>
-      </p:sp>
-      <p:sp>
-        <p:nvSpPr>
-          <p:cNvPr id="5" name="Source"/>
-          <p:cNvSpPr txBox="1"/>
-          <p:nvPr/>
-        </p:nvSpPr>
-        <p:spPr>
-          <a:xfrm>
-            <a:off x="457200" y="6419088"/>
-            <a:ext cx="10607040" cy="292608"/>
-          </a:xfrm>
-          <a:prstGeom prst="rect">
-            <a:avLst/>
-          </a:prstGeom>
-          <a:noFill/>
-        </p:spPr>
-        <p:txBody>
-          <a:bodyPr wrap="square" anchor="t" lIns="73152" rIns="73152" tIns="36576" bIns="36576">
-            <a:spAutoFit/>
-          </a:bodyPr>
-          <a:lstStyle/>
-          <a:p>
-            <a:pPr algn="l">
-              <a:spcAft>
-                <a:spcPts val="400"/>
-              </a:spcAft>
-            </a:pPr>
-            <a:r>
-              <a:rPr sz="900" b="0" i="0">
-                <a:solidFill>
-                  <a:srgbClr val="6B7A99"/>
-                </a:solidFill>
-                <a:latin typeface="Arial"/>
-              </a:rPr>
-              <a:t>Source: Our model, current estimate for 2027, month by month. Fair-pay floor: Jakarta minimum wage 2026. Before/after scores and EAP renewals: new measures, tracked from Q4 2026.</a:t>
-            </a:r>
-          </a:p>
-        </p:txBody>
-      </p:sp>
-      <p:sp>
-        <p:nvSpPr>
-          <p:cNvPr id="6" name="Page"/>
-          <p:cNvSpPr txBox="1"/>
-          <p:nvPr/>
-        </p:nvSpPr>
-        <p:spPr>
-          <a:xfrm>
-            <a:off x="11247120" y="6419088"/>
-            <a:ext cx="502920" cy="292608"/>
-          </a:xfrm>
-          <a:prstGeom prst="rect">
-            <a:avLst/>
-          </a:prstGeom>
-          <a:noFill/>
-        </p:spPr>
-        <p:txBody>
-          <a:bodyPr wrap="square" anchor="t" lIns="73152" rIns="73152" tIns="36576" bIns="36576">
-            <a:spAutoFit/>
-          </a:bodyPr>
-          <a:lstStyle/>
-          <a:p>
-            <a:pPr algn="r">
-              <a:spcAft>
-                <a:spcPts val="400"/>
-              </a:spcAft>
-            </a:pPr>
-            <a:r>
-              <a:rPr sz="1000" b="1" i="0">
-                <a:solidFill>
-                  <a:srgbClr val="6B7A99"/>
-                </a:solidFill>
-                <a:latin typeface="Arial"/>
-              </a:rPr>
-              <a:t>4</a:t>
-            </a:r>
-          </a:p>
-        </p:txBody>
-      </p:sp>
-      <p:sp>
-        <p:nvSpPr>
-          <p:cNvPr id="7" name="Rounded Rectangle 6"/>
-          <p:cNvSpPr/>
-          <p:nvPr/>
-        </p:nvSpPr>
-        <p:spPr>
-          <a:xfrm>
-            <a:off x="457200" y="1371600"/>
-            <a:ext cx="5532120" cy="1097280"/>
-          </a:xfrm>
-          <a:prstGeom prst="roundRect">
-            <a:avLst>
-              <a:gd name="adj" fmla="val 6000"/>
-            </a:avLst>
-          </a:prstGeom>
-          <a:solidFill>
-            <a:srgbClr val="1E2A3A"/>
-          </a:solidFill>
-          <a:ln>
-            <a:noFill/>
-          </a:ln>
-          <a:effectLst/>
-        </p:spPr>
-        <p:style>
-          <a:lnRef idx="1">
-            <a:schemeClr val="accent1"/>
-          </a:lnRef>
-          <a:fillRef idx="3">
-            <a:schemeClr val="accent1"/>
-          </a:fillRef>
-          <a:effectRef idx="2">
-            <a:schemeClr val="accent1"/>
-          </a:effectRef>
-          <a:fontRef idx="minor">
-            <a:schemeClr val="lt1"/>
-          </a:fontRef>
-        </p:style>
-        <p:txBody>
-          <a:bodyPr rtlCol="0" anchor="t" wrap="square" lIns="182880" rIns="182880" tIns="36576" bIns="36576"/>
-          <a:lstStyle/>
-          <a:p>
-            <a:pPr algn="l">
-              <a:spcAft>
-                <a:spcPts val="400"/>
-              </a:spcAft>
-            </a:pPr>
-            <a:r>
-              <a:rPr sz="1300" b="0" i="0">
-                <a:solidFill>
-                  <a:srgbClr val="3D4F6A"/>
-                </a:solidFill>
-                <a:latin typeface="Arial"/>
-              </a:rPr>
-              <a:t/>
-            </a:r>
-          </a:p>
-        </p:txBody>
-      </p:sp>
-      <p:sp>
-        <p:nvSpPr>
-          <p:cNvPr id="8" name="Oval 7"/>
-          <p:cNvSpPr/>
-          <p:nvPr/>
-        </p:nvSpPr>
-        <p:spPr>
-          <a:xfrm>
-            <a:off x="640080" y="1645920"/>
-            <a:ext cx="548640" cy="548640"/>
-          </a:xfrm>
-          <a:prstGeom prst="ellipse">
-            <a:avLst/>
-          </a:prstGeom>
-          <a:solidFill>
-            <a:srgbClr val="E8904A"/>
-          </a:solidFill>
-          <a:ln>
-            <a:noFill/>
-          </a:ln>
-          <a:effectLst/>
-        </p:spPr>
-        <p:style>
-          <a:lnRef idx="1">
-            <a:schemeClr val="accent1"/>
-          </a:lnRef>
-          <a:fillRef idx="3">
-            <a:schemeClr val="accent1"/>
-          </a:fillRef>
-          <a:effectRef idx="2">
-            <a:schemeClr val="accent1"/>
-          </a:effectRef>
-          <a:fontRef idx="minor">
-            <a:schemeClr val="lt1"/>
-          </a:fontRef>
-        </p:style>
-        <p:txBody>
-          <a:bodyPr rtlCol="0" anchor="ctr" wrap="square" lIns="0" rIns="0" tIns="36576" bIns="36576"/>
-          <a:lstStyle/>
-          <a:p>
-            <a:pPr algn="ctr">
-              <a:spcAft>
-                <a:spcPts val="400"/>
-              </a:spcAft>
-            </a:pPr>
-            <a:r>
-              <a:rPr sz="2000" b="1" i="0">
-                <a:solidFill>
-                  <a:srgbClr val="FFFFFF"/>
-                </a:solidFill>
-                <a:latin typeface="Georgia"/>
-              </a:rPr>
-              <a:t>1</a:t>
-            </a:r>
-          </a:p>
-        </p:txBody>
-      </p:sp>
-      <p:sp>
-        <p:nvSpPr>
-          <p:cNvPr id="9" name="TextBox 8"/>
-          <p:cNvSpPr txBox="1"/>
-          <p:nvPr/>
-        </p:nvSpPr>
-        <p:spPr>
-          <a:xfrm>
-            <a:off x="1325880" y="1444752"/>
-            <a:ext cx="4526280" cy="960120"/>
-          </a:xfrm>
-          <a:prstGeom prst="rect">
-            <a:avLst/>
-          </a:prstGeom>
-          <a:noFill/>
-        </p:spPr>
-        <p:txBody>
-          <a:bodyPr wrap="square" anchor="ctr" lIns="18288" rIns="18288" tIns="36576" bIns="36576">
-            <a:spAutoFit/>
-          </a:bodyPr>
-          <a:lstStyle/>
-          <a:p>
-            <a:pPr algn="l">
-              <a:spcAft>
-                <a:spcPts val="200"/>
-              </a:spcAft>
-            </a:pPr>
-            <a:r>
-              <a:rPr sz="1800" b="1" i="0">
-                <a:solidFill>
-                  <a:srgbClr val="FFFFFF"/>
-                </a:solidFill>
-                <a:latin typeface="Georgia"/>
-              </a:rPr>
-              <a:t>Create real value for our clients</a:t>
-            </a:r>
-          </a:p>
-          <a:p>
-            <a:pPr algn="l">
-              <a:spcAft>
-                <a:spcPts val="200"/>
-              </a:spcAft>
-            </a:pPr>
-            <a:r>
-              <a:rPr sz="1100" b="0" i="0">
-                <a:solidFill>
-                  <a:srgbClr val="C9D2E3"/>
-                </a:solidFill>
-                <a:latin typeface="Arial"/>
-              </a:rPr>
-              <a:t>The people we train and counsel change what they know and do, and clients can see it.</a:t>
-            </a:r>
-          </a:p>
-        </p:txBody>
-      </p:sp>
-      <p:sp>
-        <p:nvSpPr>
-          <p:cNvPr id="10" name="Rounded Rectangle 9"/>
-          <p:cNvSpPr/>
-          <p:nvPr/>
-        </p:nvSpPr>
-        <p:spPr>
-          <a:xfrm>
-            <a:off x="6172200" y="1371600"/>
-            <a:ext cx="5532120" cy="1097280"/>
-          </a:xfrm>
-          <a:prstGeom prst="roundRect">
-            <a:avLst>
-              <a:gd name="adj" fmla="val 6000"/>
-            </a:avLst>
-          </a:prstGeom>
-          <a:solidFill>
-            <a:srgbClr val="1E2A3A"/>
-          </a:solidFill>
-          <a:ln>
-            <a:noFill/>
-          </a:ln>
-          <a:effectLst/>
-        </p:spPr>
-        <p:style>
-          <a:lnRef idx="1">
-            <a:schemeClr val="accent1"/>
-          </a:lnRef>
-          <a:fillRef idx="3">
-            <a:schemeClr val="accent1"/>
-          </a:fillRef>
-          <a:effectRef idx="2">
-            <a:schemeClr val="accent1"/>
-          </a:effectRef>
-          <a:fontRef idx="minor">
-            <a:schemeClr val="lt1"/>
-          </a:fontRef>
-        </p:style>
-        <p:txBody>
-          <a:bodyPr rtlCol="0" anchor="t" wrap="square" lIns="182880" rIns="182880" tIns="36576" bIns="36576"/>
-          <a:lstStyle/>
-          <a:p>
-            <a:pPr algn="l">
-              <a:spcAft>
-                <a:spcPts val="400"/>
-              </a:spcAft>
-            </a:pPr>
-            <a:r>
-              <a:rPr sz="1300" b="0" i="0">
-                <a:solidFill>
-                  <a:srgbClr val="3D4F6A"/>
-                </a:solidFill>
-                <a:latin typeface="Arial"/>
-              </a:rPr>
-              <a:t/>
-            </a:r>
-          </a:p>
-        </p:txBody>
-      </p:sp>
-      <p:sp>
-        <p:nvSpPr>
-          <p:cNvPr id="11" name="Oval 10"/>
-          <p:cNvSpPr/>
-          <p:nvPr/>
-        </p:nvSpPr>
-        <p:spPr>
-          <a:xfrm>
-            <a:off x="6355080" y="1645920"/>
-            <a:ext cx="548640" cy="548640"/>
-          </a:xfrm>
-          <a:prstGeom prst="ellipse">
-            <a:avLst/>
-          </a:prstGeom>
-          <a:solidFill>
-            <a:srgbClr val="E8904A"/>
-          </a:solidFill>
-          <a:ln>
-            <a:noFill/>
-          </a:ln>
-          <a:effectLst/>
-        </p:spPr>
-        <p:style>
-          <a:lnRef idx="1">
-            <a:schemeClr val="accent1"/>
-          </a:lnRef>
-          <a:fillRef idx="3">
-            <a:schemeClr val="accent1"/>
-          </a:fillRef>
-          <a:effectRef idx="2">
-            <a:schemeClr val="accent1"/>
-          </a:effectRef>
-          <a:fontRef idx="minor">
-            <a:schemeClr val="lt1"/>
-          </a:fontRef>
-        </p:style>
-        <p:txBody>
-          <a:bodyPr rtlCol="0" anchor="ctr" wrap="square" lIns="0" rIns="0" tIns="36576" bIns="36576"/>
-          <a:lstStyle/>
-          <a:p>
-            <a:pPr algn="ctr">
-              <a:spcAft>
-                <a:spcPts val="400"/>
-              </a:spcAft>
-            </a:pPr>
-            <a:r>
-              <a:rPr sz="2000" b="1" i="0">
-                <a:solidFill>
-                  <a:srgbClr val="FFFFFF"/>
-                </a:solidFill>
-                <a:latin typeface="Georgia"/>
-              </a:rPr>
-              <a:t>2</a:t>
-            </a:r>
-          </a:p>
-        </p:txBody>
-      </p:sp>
-      <p:sp>
-        <p:nvSpPr>
-          <p:cNvPr id="12" name="TextBox 11"/>
-          <p:cNvSpPr txBox="1"/>
-          <p:nvPr/>
-        </p:nvSpPr>
-        <p:spPr>
-          <a:xfrm>
-            <a:off x="7040880" y="1444752"/>
-            <a:ext cx="4526280" cy="960120"/>
-          </a:xfrm>
-          <a:prstGeom prst="rect">
-            <a:avLst/>
-          </a:prstGeom>
-          <a:noFill/>
-        </p:spPr>
-        <p:txBody>
-          <a:bodyPr wrap="square" anchor="ctr" lIns="18288" rIns="18288" tIns="36576" bIns="36576">
-            <a:spAutoFit/>
-          </a:bodyPr>
-          <a:lstStyle/>
-          <a:p>
-            <a:pPr algn="l">
-              <a:spcAft>
-                <a:spcPts val="200"/>
-              </a:spcAft>
-            </a:pPr>
-            <a:r>
-              <a:rPr sz="1800" b="1" i="0">
-                <a:solidFill>
-                  <a:srgbClr val="FFFFFF"/>
-                </a:solidFill>
-                <a:latin typeface="Georgia"/>
-              </a:rPr>
-              <a:t>Build a business that pays for itself</a:t>
-            </a:r>
-          </a:p>
-          <a:p>
-            <a:pPr algn="l">
-              <a:spcAft>
-                <a:spcPts val="200"/>
-              </a:spcAft>
-            </a:pPr>
-            <a:r>
-              <a:rPr sz="1100" b="0" i="0">
-                <a:solidFill>
-                  <a:srgbClr val="C9D2E3"/>
-                </a:solidFill>
-                <a:latin typeface="Arial"/>
-              </a:rPr>
-              <a:t>A 15%+ margin and safe cash, without outside money, so we can keep doing goal 1.</a:t>
-            </a:r>
-          </a:p>
-        </p:txBody>
-      </p:sp>
-      <p:sp>
-        <p:nvSpPr>
-          <p:cNvPr id="13" name="TextBox 12"/>
-          <p:cNvSpPr txBox="1"/>
-          <p:nvPr/>
-        </p:nvSpPr>
-        <p:spPr>
-          <a:xfrm>
-            <a:off x="457200" y="2542032"/>
-            <a:ext cx="11247120" cy="274320"/>
-          </a:xfrm>
-          <a:prstGeom prst="rect">
-            <a:avLst/>
-          </a:prstGeom>
-          <a:noFill/>
-        </p:spPr>
-        <p:txBody>
-          <a:bodyPr wrap="square" anchor="t" lIns="0" rIns="0" tIns="36576" bIns="36576">
-            <a:spAutoFit/>
-          </a:bodyPr>
-          <a:lstStyle/>
-          <a:p>
-            <a:pPr algn="ctr">
-              <a:spcAft>
-                <a:spcPts val="400"/>
-              </a:spcAft>
-            </a:pPr>
-            <a:r>
-              <a:rPr sz="1100" b="1" i="0">
-                <a:solidFill>
-                  <a:srgbClr val="6B7A99"/>
-                </a:solidFill>
-                <a:latin typeface="Arial"/>
-              </a:rPr>
-              <a:t>WE KNOW IT IS WORKING WHEN THESE NUMBERS MOVE</a:t>
-            </a:r>
-          </a:p>
-        </p:txBody>
-      </p:sp>
-      <p:sp>
-        <p:nvSpPr>
-          <p:cNvPr id="14" name="Rounded Rectangle 13"/>
-          <p:cNvSpPr/>
-          <p:nvPr/>
-        </p:nvSpPr>
-        <p:spPr>
-          <a:xfrm>
-            <a:off x="457200" y="2880360"/>
-            <a:ext cx="2697480" cy="3246120"/>
-          </a:xfrm>
-          <a:prstGeom prst="roundRect">
-            <a:avLst>
-              <a:gd name="adj" fmla="val 6000"/>
-            </a:avLst>
-          </a:prstGeom>
-          <a:solidFill>
-            <a:srgbClr val="EAF2FF"/>
-          </a:solidFill>
-          <a:ln>
-            <a:noFill/>
-          </a:ln>
-          <a:effectLst/>
-        </p:spPr>
-        <p:style>
-          <a:lnRef idx="1">
-            <a:schemeClr val="accent1"/>
-          </a:lnRef>
-          <a:fillRef idx="3">
-            <a:schemeClr val="accent1"/>
-          </a:fillRef>
-          <a:effectRef idx="2">
-            <a:schemeClr val="accent1"/>
-          </a:effectRef>
-          <a:fontRef idx="minor">
-            <a:schemeClr val="lt1"/>
-          </a:fontRef>
-        </p:style>
-        <p:txBody>
-          <a:bodyPr rtlCol="0" anchor="t" wrap="square" lIns="182880" rIns="182880" tIns="36576" bIns="36576"/>
-          <a:lstStyle/>
-          <a:p>
-            <a:pPr algn="l">
-              <a:spcAft>
-                <a:spcPts val="400"/>
-              </a:spcAft>
-            </a:pPr>
-            <a:r>
-              <a:rPr sz="1300" b="0" i="0">
-                <a:solidFill>
-                  <a:srgbClr val="3D4F6A"/>
-                </a:solidFill>
-                <a:latin typeface="Arial"/>
-              </a:rPr>
-              <a:t/>
-            </a:r>
-          </a:p>
-        </p:txBody>
-      </p:sp>
-      <p:sp>
-        <p:nvSpPr>
-          <p:cNvPr id="15" name="Oval 14"/>
-          <p:cNvSpPr/>
-          <p:nvPr/>
-        </p:nvSpPr>
-        <p:spPr>
-          <a:xfrm>
-            <a:off x="621792" y="3017520"/>
-            <a:ext cx="438912" cy="438912"/>
-          </a:xfrm>
-          <a:prstGeom prst="ellipse">
-            <a:avLst/>
-          </a:prstGeom>
-          <a:solidFill>
-            <a:srgbClr val="1E2A3A"/>
-          </a:solidFill>
-          <a:ln>
-            <a:noFill/>
-          </a:ln>
-          <a:effectLst/>
-        </p:spPr>
-        <p:style>
-          <a:lnRef idx="1">
-            <a:schemeClr val="accent1"/>
-          </a:lnRef>
-          <a:fillRef idx="3">
-            <a:schemeClr val="accent1"/>
-          </a:fillRef>
-          <a:effectRef idx="2">
-            <a:schemeClr val="accent1"/>
-          </a:effectRef>
-          <a:fontRef idx="minor">
-            <a:schemeClr val="lt1"/>
-          </a:fontRef>
-        </p:style>
-        <p:txBody>
-          <a:bodyPr rtlCol="0" anchor="ctr" wrap="square" lIns="0" rIns="0" tIns="36576" bIns="36576"/>
-          <a:lstStyle/>
-          <a:p>
-            <a:pPr algn="ctr">
-              <a:spcAft>
-                <a:spcPts val="400"/>
-              </a:spcAft>
-            </a:pPr>
-            <a:r>
-              <a:rPr sz="1500" b="1" i="0">
-                <a:solidFill>
-                  <a:srgbClr val="FFFFFF"/>
-                </a:solidFill>
-                <a:latin typeface="Georgia"/>
-              </a:rPr>
-              <a:t>1</a:t>
-            </a:r>
-          </a:p>
-        </p:txBody>
-      </p:sp>
-      <p:sp>
-        <p:nvSpPr>
-          <p:cNvPr id="16" name="TextBox 15"/>
-          <p:cNvSpPr txBox="1"/>
-          <p:nvPr/>
-        </p:nvSpPr>
-        <p:spPr>
-          <a:xfrm>
-            <a:off x="1143000" y="2990088"/>
-            <a:ext cx="1965960" cy="502920"/>
-          </a:xfrm>
-          <a:prstGeom prst="rect">
-            <a:avLst/>
-          </a:prstGeom>
-          <a:noFill/>
-        </p:spPr>
-        <p:txBody>
-          <a:bodyPr wrap="square" anchor="ctr" lIns="18288" rIns="18288" tIns="36576" bIns="36576">
-            <a:spAutoFit/>
-          </a:bodyPr>
-          <a:lstStyle/>
-          <a:p>
-            <a:pPr algn="l">
-              <a:spcAft>
-                <a:spcPts val="0"/>
-              </a:spcAft>
-            </a:pPr>
-            <a:r>
-              <a:rPr sz="1600" b="1" i="0">
-                <a:solidFill>
-                  <a:srgbClr val="1E2A3A"/>
-                </a:solidFill>
-                <a:latin typeface="Georgia"/>
-              </a:rPr>
-              <a:t>Clients</a:t>
-            </a:r>
-          </a:p>
-          <a:p>
-            <a:pPr algn="l">
-              <a:spcAft>
-                <a:spcPts val="0"/>
-              </a:spcAft>
-            </a:pPr>
-            <a:r>
-              <a:rPr sz="1000" b="0" i="0">
-                <a:solidFill>
-                  <a:srgbClr val="6B7A99"/>
-                </a:solidFill>
-                <a:latin typeface="Arial"/>
-              </a:rPr>
-              <a:t>BI, banks, EAP clients</a:t>
-            </a:r>
-          </a:p>
-        </p:txBody>
-      </p:sp>
-      <p:sp>
-        <p:nvSpPr>
-          <p:cNvPr id="17" name="TextBox 16"/>
-          <p:cNvSpPr txBox="1"/>
-          <p:nvPr/>
-        </p:nvSpPr>
-        <p:spPr>
-          <a:xfrm>
-            <a:off x="621792" y="3611880"/>
-            <a:ext cx="2423160" cy="804672"/>
-          </a:xfrm>
-          <a:prstGeom prst="rect">
-            <a:avLst/>
-          </a:prstGeom>
-          <a:noFill/>
-        </p:spPr>
-        <p:txBody>
-          <a:bodyPr wrap="square" anchor="t" lIns="18288" rIns="18288" tIns="36576" bIns="36576">
-            <a:spAutoFit/>
-          </a:bodyPr>
-          <a:lstStyle/>
-          <a:p>
-            <a:pPr algn="l">
-              <a:spcAft>
-                <a:spcPts val="0"/>
-              </a:spcAft>
-            </a:pPr>
-            <a:r>
-              <a:rPr sz="1700" b="1" i="0">
-                <a:solidFill>
-                  <a:srgbClr val="9B3809"/>
-                </a:solidFill>
-                <a:latin typeface="Georgia"/>
-              </a:rPr>
-              <a:t>1 → 3</a:t>
-            </a:r>
-          </a:p>
-          <a:p>
-            <a:pPr algn="l">
-              <a:spcAft>
-                <a:spcPts val="0"/>
-              </a:spcAft>
-            </a:pPr>
-            <a:r>
-              <a:rPr sz="1000" b="0" i="0">
-                <a:solidFill>
-                  <a:srgbClr val="3D4F6A"/>
-                </a:solidFill>
-                <a:latin typeface="Arial"/>
-              </a:rPr>
-              <a:t>EAP contracts active, by Jul 2027; then we track renewals (slide 10)</a:t>
-            </a:r>
-          </a:p>
-        </p:txBody>
-      </p:sp>
-      <p:sp>
-        <p:nvSpPr>
-          <p:cNvPr id="18" name="TextBox 17"/>
-          <p:cNvSpPr txBox="1"/>
-          <p:nvPr/>
-        </p:nvSpPr>
-        <p:spPr>
-          <a:xfrm>
-            <a:off x="621792" y="4434840"/>
-            <a:ext cx="2423160" cy="804672"/>
-          </a:xfrm>
-          <a:prstGeom prst="rect">
-            <a:avLst/>
-          </a:prstGeom>
-          <a:noFill/>
-        </p:spPr>
-        <p:txBody>
-          <a:bodyPr wrap="square" anchor="t" lIns="18288" rIns="18288" tIns="36576" bIns="36576">
-            <a:spAutoFit/>
-          </a:bodyPr>
-          <a:lstStyle/>
-          <a:p>
-            <a:pPr algn="l">
-              <a:spcAft>
-                <a:spcPts val="0"/>
-              </a:spcAft>
-            </a:pPr>
-            <a:r>
-              <a:rPr sz="1700" b="1" i="0">
-                <a:solidFill>
-                  <a:srgbClr val="9B3809"/>
-                </a:solidFill>
-                <a:latin typeface="Georgia"/>
-              </a:rPr>
-              <a:t>Before / after</a:t>
-            </a:r>
-          </a:p>
-          <a:p>
-            <a:pPr algn="l">
-              <a:spcAft>
-                <a:spcPts val="0"/>
-              </a:spcAft>
-            </a:pPr>
-            <a:r>
-              <a:rPr sz="1000" b="0" i="0">
-                <a:solidFill>
-                  <a:srgbClr val="3D4F6A"/>
-                </a:solidFill>
-                <a:latin typeface="Arial"/>
-              </a:rPr>
-              <a:t>scores on every training, from Q4 2026</a:t>
-            </a:r>
-          </a:p>
-        </p:txBody>
-      </p:sp>
-      <p:sp>
-        <p:nvSpPr>
-          <p:cNvPr id="19" name="TextBox 18"/>
-          <p:cNvSpPr txBox="1"/>
-          <p:nvPr/>
-        </p:nvSpPr>
-        <p:spPr>
-          <a:xfrm>
-            <a:off x="621792" y="5257800"/>
-            <a:ext cx="2423160" cy="804672"/>
-          </a:xfrm>
-          <a:prstGeom prst="rect">
-            <a:avLst/>
-          </a:prstGeom>
-          <a:noFill/>
-        </p:spPr>
-        <p:txBody>
-          <a:bodyPr wrap="square" anchor="t" lIns="18288" rIns="18288" tIns="36576" bIns="36576">
-            <a:spAutoFit/>
-          </a:bodyPr>
-          <a:lstStyle/>
-          <a:p>
-            <a:pPr algn="l">
-              <a:spcAft>
-                <a:spcPts val="0"/>
-              </a:spcAft>
-            </a:pPr>
-            <a:r>
-              <a:rPr sz="1700" b="1" i="0">
-                <a:solidFill>
-                  <a:srgbClr val="9B3809"/>
-                </a:solidFill>
-                <a:latin typeface="Georgia"/>
-              </a:rPr>
-              <a:t>1.4</a:t>
-            </a:r>
-          </a:p>
-          <a:p>
-            <a:pPr algn="l">
-              <a:spcAft>
-                <a:spcPts val="0"/>
-              </a:spcAft>
-            </a:pPr>
-            <a:r>
-              <a:rPr sz="1000" b="0" i="0">
-                <a:solidFill>
-                  <a:srgbClr val="3D4F6A"/>
-                </a:solidFill>
-                <a:latin typeface="Arial"/>
-              </a:rPr>
-              <a:t>sessions per B2C client from Q3 2027: our plan (slide 17)</a:t>
-            </a:r>
-          </a:p>
-        </p:txBody>
-      </p:sp>
-      <p:sp>
-        <p:nvSpPr>
-          <p:cNvPr id="20" name="Rounded Rectangle 19"/>
-          <p:cNvSpPr/>
-          <p:nvPr/>
-        </p:nvSpPr>
-        <p:spPr>
-          <a:xfrm>
-            <a:off x="3291840" y="2880360"/>
-            <a:ext cx="2697480" cy="3246120"/>
-          </a:xfrm>
-          <a:prstGeom prst="roundRect">
-            <a:avLst>
-              <a:gd name="adj" fmla="val 6000"/>
-            </a:avLst>
-          </a:prstGeom>
-          <a:solidFill>
-            <a:srgbClr val="EAF2FF"/>
-          </a:solidFill>
-          <a:ln>
-            <a:noFill/>
-          </a:ln>
-          <a:effectLst/>
-        </p:spPr>
-        <p:style>
-          <a:lnRef idx="1">
-            <a:schemeClr val="accent1"/>
-          </a:lnRef>
-          <a:fillRef idx="3">
-            <a:schemeClr val="accent1"/>
-          </a:fillRef>
-          <a:effectRef idx="2">
-            <a:schemeClr val="accent1"/>
-          </a:effectRef>
-          <a:fontRef idx="minor">
-            <a:schemeClr val="lt1"/>
-          </a:fontRef>
-        </p:style>
-        <p:txBody>
-          <a:bodyPr rtlCol="0" anchor="t" wrap="square" lIns="182880" rIns="182880" tIns="36576" bIns="36576"/>
-          <a:lstStyle/>
-          <a:p>
-            <a:pPr algn="l">
-              <a:spcAft>
-                <a:spcPts val="400"/>
-              </a:spcAft>
-            </a:pPr>
-            <a:r>
-              <a:rPr sz="1300" b="0" i="0">
-                <a:solidFill>
-                  <a:srgbClr val="3D4F6A"/>
-                </a:solidFill>
-                <a:latin typeface="Arial"/>
-              </a:rPr>
-              <a:t/>
-            </a:r>
-          </a:p>
-        </p:txBody>
-      </p:sp>
-      <p:sp>
-        <p:nvSpPr>
-          <p:cNvPr id="21" name="Oval 20"/>
-          <p:cNvSpPr/>
-          <p:nvPr/>
-        </p:nvSpPr>
-        <p:spPr>
-          <a:xfrm>
-            <a:off x="3456432" y="3017520"/>
-            <a:ext cx="438912" cy="438912"/>
-          </a:xfrm>
-          <a:prstGeom prst="ellipse">
-            <a:avLst/>
-          </a:prstGeom>
-          <a:solidFill>
-            <a:srgbClr val="576C94"/>
-          </a:solidFill>
-          <a:ln>
-            <a:noFill/>
-          </a:ln>
-          <a:effectLst/>
-        </p:spPr>
-        <p:style>
-          <a:lnRef idx="1">
-            <a:schemeClr val="accent1"/>
-          </a:lnRef>
-          <a:fillRef idx="3">
-            <a:schemeClr val="accent1"/>
-          </a:fillRef>
-          <a:effectRef idx="2">
-            <a:schemeClr val="accent1"/>
-          </a:effectRef>
-          <a:fontRef idx="minor">
-            <a:schemeClr val="lt1"/>
-          </a:fontRef>
-        </p:style>
-        <p:txBody>
-          <a:bodyPr rtlCol="0" anchor="ctr" wrap="square" lIns="0" rIns="0" tIns="36576" bIns="36576"/>
-          <a:lstStyle/>
-          <a:p>
-            <a:pPr algn="ctr">
-              <a:spcAft>
-                <a:spcPts val="400"/>
-              </a:spcAft>
-            </a:pPr>
-            <a:r>
-              <a:rPr sz="1500" b="1" i="0">
-                <a:solidFill>
-                  <a:srgbClr val="FFFFFF"/>
-                </a:solidFill>
-                <a:latin typeface="Georgia"/>
-              </a:rPr>
-              <a:t>2</a:t>
-            </a:r>
-          </a:p>
-        </p:txBody>
-      </p:sp>
-      <p:sp>
-        <p:nvSpPr>
-          <p:cNvPr id="22" name="TextBox 21"/>
-          <p:cNvSpPr txBox="1"/>
-          <p:nvPr/>
-        </p:nvSpPr>
-        <p:spPr>
-          <a:xfrm>
-            <a:off x="3977639" y="2990088"/>
-            <a:ext cx="1965960" cy="502920"/>
-          </a:xfrm>
-          <a:prstGeom prst="rect">
-            <a:avLst/>
-          </a:prstGeom>
-          <a:noFill/>
-        </p:spPr>
-        <p:txBody>
-          <a:bodyPr wrap="square" anchor="ctr" lIns="18288" rIns="18288" tIns="36576" bIns="36576">
-            <a:spAutoFit/>
-          </a:bodyPr>
-          <a:lstStyle/>
-          <a:p>
-            <a:pPr algn="l">
-              <a:spcAft>
-                <a:spcPts val="0"/>
-              </a:spcAft>
-            </a:pPr>
-            <a:r>
-              <a:rPr sz="1600" b="1" i="0">
-                <a:solidFill>
-                  <a:srgbClr val="1E2A3A"/>
-                </a:solidFill>
-                <a:latin typeface="Georgia"/>
-              </a:rPr>
-              <a:t>People</a:t>
-            </a:r>
-          </a:p>
-          <a:p>
-            <a:pPr algn="l">
-              <a:spcAft>
-                <a:spcPts val="0"/>
-              </a:spcAft>
-            </a:pPr>
-            <a:r>
-              <a:rPr sz="1000" b="0" i="0">
-                <a:solidFill>
-                  <a:srgbClr val="6B7A99"/>
-                </a:solidFill>
-                <a:latin typeface="Arial"/>
-              </a:rPr>
-              <a:t>Staff and psychologists</a:t>
-            </a:r>
-          </a:p>
-        </p:txBody>
-      </p:sp>
-      <p:sp>
-        <p:nvSpPr>
-          <p:cNvPr id="23" name="TextBox 22"/>
-          <p:cNvSpPr txBox="1"/>
-          <p:nvPr/>
-        </p:nvSpPr>
-        <p:spPr>
-          <a:xfrm>
-            <a:off x="3456432" y="3611880"/>
-            <a:ext cx="2423160" cy="804672"/>
-          </a:xfrm>
-          <a:prstGeom prst="rect">
-            <a:avLst/>
-          </a:prstGeom>
-          <a:noFill/>
-        </p:spPr>
-        <p:txBody>
-          <a:bodyPr wrap="square" anchor="t" lIns="18288" rIns="18288" tIns="36576" bIns="36576">
-            <a:spAutoFit/>
-          </a:bodyPr>
-          <a:lstStyle/>
-          <a:p>
-            <a:pPr algn="l">
-              <a:spcAft>
-                <a:spcPts val="0"/>
-              </a:spcAft>
-            </a:pPr>
-            <a:r>
-              <a:rPr sz="1700" b="1" i="0">
-                <a:solidFill>
-                  <a:srgbClr val="576C94"/>
-                </a:solidFill>
-                <a:latin typeface="Georgia"/>
-              </a:rPr>
-              <a:t>Rp5.73M</a:t>
-            </a:r>
-          </a:p>
-          <a:p>
-            <a:pPr algn="l">
-              <a:spcAft>
-                <a:spcPts val="0"/>
-              </a:spcAft>
-            </a:pPr>
-            <a:r>
-              <a:rPr sz="1000" b="0" i="0">
-                <a:solidFill>
-                  <a:srgbClr val="3D4F6A"/>
-                </a:solidFill>
-                <a:latin typeface="Arial"/>
-              </a:rPr>
-              <a:t>fair-pay floor + BPJS and THR (slide 21)</a:t>
-            </a:r>
-          </a:p>
-        </p:txBody>
-      </p:sp>
-      <p:sp>
-        <p:nvSpPr>
-          <p:cNvPr id="24" name="TextBox 23"/>
-          <p:cNvSpPr txBox="1"/>
-          <p:nvPr/>
-        </p:nvSpPr>
-        <p:spPr>
-          <a:xfrm>
-            <a:off x="3456432" y="4434840"/>
-            <a:ext cx="2423160" cy="804672"/>
-          </a:xfrm>
-          <a:prstGeom prst="rect">
-            <a:avLst/>
-          </a:prstGeom>
-          <a:noFill/>
-        </p:spPr>
-        <p:txBody>
-          <a:bodyPr wrap="square" anchor="t" lIns="18288" rIns="18288" tIns="36576" bIns="36576">
-            <a:spAutoFit/>
-          </a:bodyPr>
-          <a:lstStyle/>
-          <a:p>
-            <a:pPr algn="l">
-              <a:spcAft>
-                <a:spcPts val="0"/>
-              </a:spcAft>
-            </a:pPr>
-            <a:r>
-              <a:rPr sz="1700" b="1" i="0">
-                <a:solidFill>
-                  <a:srgbClr val="576C94"/>
-                </a:solidFill>
-                <a:latin typeface="Georgia"/>
-              </a:rPr>
-              <a:t>Rp100/150/200M</a:t>
-            </a:r>
-          </a:p>
-          <a:p>
-            <a:pPr algn="l">
-              <a:spcAft>
-                <a:spcPts val="0"/>
-              </a:spcAft>
-            </a:pPr>
-            <a:r>
-              <a:rPr sz="1000" b="0" i="0">
-                <a:solidFill>
-                  <a:srgbClr val="3D4F6A"/>
-                </a:solidFill>
-                <a:latin typeface="Arial"/>
-              </a:rPr>
-              <a:t>monthly sales that unlock the 3 pay steps</a:t>
-            </a:r>
-          </a:p>
-        </p:txBody>
-      </p:sp>
-      <p:sp>
-        <p:nvSpPr>
-          <p:cNvPr id="25" name="TextBox 24"/>
-          <p:cNvSpPr txBox="1"/>
-          <p:nvPr/>
-        </p:nvSpPr>
-        <p:spPr>
-          <a:xfrm>
-            <a:off x="3456432" y="5257800"/>
-            <a:ext cx="2423160" cy="804672"/>
-          </a:xfrm>
-          <a:prstGeom prst="rect">
-            <a:avLst/>
-          </a:prstGeom>
-          <a:noFill/>
-        </p:spPr>
-        <p:txBody>
-          <a:bodyPr wrap="square" anchor="t" lIns="18288" rIns="18288" tIns="36576" bIns="36576">
-            <a:spAutoFit/>
-          </a:bodyPr>
-          <a:lstStyle/>
-          <a:p>
-            <a:pPr algn="l">
-              <a:spcAft>
-                <a:spcPts val="0"/>
-              </a:spcAft>
-            </a:pPr>
-            <a:r>
-              <a:rPr sz="1700" b="1" i="0">
-                <a:solidFill>
-                  <a:srgbClr val="576C94"/>
-                </a:solidFill>
-                <a:latin typeface="Georgia"/>
-              </a:rPr>
-              <a:t>74%</a:t>
-            </a:r>
-          </a:p>
-          <a:p>
-            <a:pPr algn="l">
-              <a:spcAft>
-                <a:spcPts val="0"/>
-              </a:spcAft>
-            </a:pPr>
-            <a:r>
-              <a:rPr sz="1000" b="0" i="0">
-                <a:solidFill>
-                  <a:srgbClr val="3D4F6A"/>
-                </a:solidFill>
-                <a:latin typeface="Arial"/>
-              </a:rPr>
-              <a:t>busiest load on paid part-timers (healthy 60-80%) (slide 36)</a:t>
-            </a:r>
-          </a:p>
-        </p:txBody>
-      </p:sp>
-      <p:sp>
-        <p:nvSpPr>
-          <p:cNvPr id="26" name="Rounded Rectangle 25"/>
-          <p:cNvSpPr/>
-          <p:nvPr/>
-        </p:nvSpPr>
-        <p:spPr>
-          <a:xfrm>
-            <a:off x="6126480" y="2880360"/>
-            <a:ext cx="2697480" cy="3246120"/>
-          </a:xfrm>
-          <a:prstGeom prst="roundRect">
-            <a:avLst>
-              <a:gd name="adj" fmla="val 6000"/>
-            </a:avLst>
-          </a:prstGeom>
-          <a:solidFill>
-            <a:srgbClr val="EAF2FF"/>
-          </a:solidFill>
-          <a:ln>
-            <a:noFill/>
-          </a:ln>
-          <a:effectLst/>
-        </p:spPr>
-        <p:style>
-          <a:lnRef idx="1">
-            <a:schemeClr val="accent1"/>
-          </a:lnRef>
-          <a:fillRef idx="3">
-            <a:schemeClr val="accent1"/>
-          </a:fillRef>
-          <a:effectRef idx="2">
-            <a:schemeClr val="accent1"/>
-          </a:effectRef>
-          <a:fontRef idx="minor">
-            <a:schemeClr val="lt1"/>
-          </a:fontRef>
-        </p:style>
-        <p:txBody>
-          <a:bodyPr rtlCol="0" anchor="t" wrap="square" lIns="182880" rIns="182880" tIns="36576" bIns="36576"/>
-          <a:lstStyle/>
-          <a:p>
-            <a:pPr algn="l">
-              <a:spcAft>
-                <a:spcPts val="400"/>
-              </a:spcAft>
-            </a:pPr>
-            <a:r>
-              <a:rPr sz="1300" b="0" i="0">
-                <a:solidFill>
-                  <a:srgbClr val="3D4F6A"/>
-                </a:solidFill>
-                <a:latin typeface="Arial"/>
-              </a:rPr>
-              <a:t/>
-            </a:r>
-          </a:p>
-        </p:txBody>
-      </p:sp>
-      <p:sp>
-        <p:nvSpPr>
-          <p:cNvPr id="27" name="Oval 26"/>
-          <p:cNvSpPr/>
-          <p:nvPr/>
-        </p:nvSpPr>
-        <p:spPr>
-          <a:xfrm>
-            <a:off x="6291072" y="3017520"/>
-            <a:ext cx="438912" cy="438912"/>
-          </a:xfrm>
-          <a:prstGeom prst="ellipse">
-            <a:avLst/>
-          </a:prstGeom>
-          <a:solidFill>
-            <a:srgbClr val="9B3809"/>
-          </a:solidFill>
-          <a:ln>
-            <a:noFill/>
-          </a:ln>
-          <a:effectLst/>
-        </p:spPr>
-        <p:style>
-          <a:lnRef idx="1">
-            <a:schemeClr val="accent1"/>
-          </a:lnRef>
-          <a:fillRef idx="3">
-            <a:schemeClr val="accent1"/>
-          </a:fillRef>
-          <a:effectRef idx="2">
-            <a:schemeClr val="accent1"/>
-          </a:effectRef>
-          <a:fontRef idx="minor">
-            <a:schemeClr val="lt1"/>
-          </a:fontRef>
-        </p:style>
-        <p:txBody>
-          <a:bodyPr rtlCol="0" anchor="ctr" wrap="square" lIns="0" rIns="0" tIns="36576" bIns="36576"/>
-          <a:lstStyle/>
-          <a:p>
-            <a:pPr algn="ctr">
-              <a:spcAft>
-                <a:spcPts val="400"/>
-              </a:spcAft>
-            </a:pPr>
-            <a:r>
-              <a:rPr sz="1500" b="1" i="0">
-                <a:solidFill>
-                  <a:srgbClr val="FFFFFF"/>
-                </a:solidFill>
-                <a:latin typeface="Georgia"/>
-              </a:rPr>
-              <a:t>3</a:t>
-            </a:r>
-          </a:p>
-        </p:txBody>
-      </p:sp>
-      <p:sp>
-        <p:nvSpPr>
-          <p:cNvPr id="28" name="TextBox 27"/>
-          <p:cNvSpPr txBox="1"/>
-          <p:nvPr/>
-        </p:nvSpPr>
-        <p:spPr>
-          <a:xfrm>
-            <a:off x="6812280" y="2990088"/>
-            <a:ext cx="1965960" cy="502920"/>
-          </a:xfrm>
-          <a:prstGeom prst="rect">
-            <a:avLst/>
-          </a:prstGeom>
-          <a:noFill/>
-        </p:spPr>
-        <p:txBody>
-          <a:bodyPr wrap="square" anchor="ctr" lIns="18288" rIns="18288" tIns="36576" bIns="36576">
-            <a:spAutoFit/>
-          </a:bodyPr>
-          <a:lstStyle/>
-          <a:p>
-            <a:pPr algn="l">
-              <a:spcAft>
-                <a:spcPts val="0"/>
-              </a:spcAft>
-            </a:pPr>
-            <a:r>
-              <a:rPr sz="1600" b="1" i="0">
-                <a:solidFill>
-                  <a:srgbClr val="1E2A3A"/>
-                </a:solidFill>
-                <a:latin typeface="Georgia"/>
-              </a:rPr>
-              <a:t>Company</a:t>
-            </a:r>
-          </a:p>
-          <a:p>
-            <a:pPr algn="l">
-              <a:spcAft>
-                <a:spcPts val="0"/>
-              </a:spcAft>
-            </a:pPr>
-            <a:r>
-              <a:rPr sz="1000" b="0" i="0">
-                <a:solidFill>
-                  <a:srgbClr val="6B7A99"/>
-                </a:solidFill>
-                <a:latin typeface="Arial"/>
-              </a:rPr>
-              <a:t>Founders and future investors</a:t>
-            </a:r>
-          </a:p>
-        </p:txBody>
-      </p:sp>
-      <p:sp>
-        <p:nvSpPr>
-          <p:cNvPr id="29" name="TextBox 28"/>
-          <p:cNvSpPr txBox="1"/>
-          <p:nvPr/>
-        </p:nvSpPr>
-        <p:spPr>
-          <a:xfrm>
-            <a:off x="6291072" y="3611880"/>
-            <a:ext cx="2423160" cy="804672"/>
-          </a:xfrm>
-          <a:prstGeom prst="rect">
-            <a:avLst/>
-          </a:prstGeom>
-          <a:noFill/>
-        </p:spPr>
-        <p:txBody>
-          <a:bodyPr wrap="square" anchor="t" lIns="18288" rIns="18288" tIns="36576" bIns="36576">
-            <a:spAutoFit/>
-          </a:bodyPr>
-          <a:lstStyle/>
-          <a:p>
-            <a:pPr algn="l">
-              <a:spcAft>
-                <a:spcPts val="0"/>
-              </a:spcAft>
-            </a:pPr>
-            <a:r>
-              <a:rPr sz="1700" b="1" i="0">
-                <a:solidFill>
-                  <a:srgbClr val="9B3809"/>
-                </a:solidFill>
-                <a:latin typeface="Georgia"/>
-              </a:rPr>
-              <a:t>26.1%</a:t>
-            </a:r>
-          </a:p>
-          <a:p>
-            <a:pPr algn="l">
-              <a:spcAft>
-                <a:spcPts val="0"/>
-              </a:spcAft>
-            </a:pPr>
-            <a:r>
-              <a:rPr sz="1000" b="0" i="0">
-                <a:solidFill>
-                  <a:srgbClr val="3D4F6A"/>
-                </a:solidFill>
-                <a:latin typeface="Arial"/>
-              </a:rPr>
-              <a:t>net margin in 2027; we need 15%+ (slide 26)</a:t>
-            </a:r>
-          </a:p>
-        </p:txBody>
-      </p:sp>
-      <p:sp>
-        <p:nvSpPr>
-          <p:cNvPr id="30" name="TextBox 29"/>
-          <p:cNvSpPr txBox="1"/>
-          <p:nvPr/>
-        </p:nvSpPr>
-        <p:spPr>
-          <a:xfrm>
-            <a:off x="6291072" y="4434840"/>
-            <a:ext cx="2423160" cy="804672"/>
-          </a:xfrm>
-          <a:prstGeom prst="rect">
-            <a:avLst/>
-          </a:prstGeom>
-          <a:noFill/>
-        </p:spPr>
-        <p:txBody>
-          <a:bodyPr wrap="square" anchor="t" lIns="18288" rIns="18288" tIns="36576" bIns="36576">
-            <a:spAutoFit/>
-          </a:bodyPr>
-          <a:lstStyle/>
-          <a:p>
-            <a:pPr algn="l">
-              <a:spcAft>
-                <a:spcPts val="0"/>
-              </a:spcAft>
-            </a:pPr>
-            <a:r>
-              <a:rPr sz="1700" b="1" i="0">
-                <a:solidFill>
-                  <a:srgbClr val="9B3809"/>
-                </a:solidFill>
-                <a:latin typeface="Georgia"/>
-              </a:rPr>
-              <a:t>Rp82M</a:t>
-            </a:r>
-          </a:p>
-          <a:p>
-            <a:pPr algn="l">
-              <a:spcAft>
-                <a:spcPts val="0"/>
-              </a:spcAft>
-            </a:pPr>
-            <a:r>
-              <a:rPr sz="1000" b="0" i="0">
-                <a:solidFill>
-                  <a:srgbClr val="3D4F6A"/>
-                </a:solidFill>
-                <a:latin typeface="Arial"/>
-              </a:rPr>
-              <a:t>lowest cash (Feb 2027) (slide 27)</a:t>
-            </a:r>
-          </a:p>
-        </p:txBody>
-      </p:sp>
-      <p:sp>
-        <p:nvSpPr>
-          <p:cNvPr id="31" name="TextBox 30"/>
-          <p:cNvSpPr txBox="1"/>
-          <p:nvPr/>
-        </p:nvSpPr>
-        <p:spPr>
-          <a:xfrm>
-            <a:off x="6291072" y="5257800"/>
-            <a:ext cx="2423160" cy="804672"/>
-          </a:xfrm>
-          <a:prstGeom prst="rect">
-            <a:avLst/>
-          </a:prstGeom>
-          <a:noFill/>
-        </p:spPr>
-        <p:txBody>
-          <a:bodyPr wrap="square" anchor="t" lIns="18288" rIns="18288" tIns="36576" bIns="36576">
-            <a:spAutoFit/>
-          </a:bodyPr>
-          <a:lstStyle/>
-          <a:p>
-            <a:pPr algn="l">
-              <a:spcAft>
-                <a:spcPts val="0"/>
-              </a:spcAft>
-            </a:pPr>
-            <a:r>
-              <a:rPr sz="1700" b="1" i="0">
-                <a:solidFill>
-                  <a:srgbClr val="9B3809"/>
-                </a:solidFill>
-                <a:latin typeface="Georgia"/>
-              </a:rPr>
-              <a:t>61% → 38%</a:t>
-            </a:r>
-          </a:p>
-          <a:p>
-            <a:pPr algn="l">
-              <a:spcAft>
-                <a:spcPts val="0"/>
-              </a:spcAft>
-            </a:pPr>
-            <a:r>
-              <a:rPr sz="1000" b="0" i="0">
-                <a:solidFill>
-                  <a:srgbClr val="3D4F6A"/>
-                </a:solidFill>
-                <a:latin typeface="Arial"/>
-              </a:rPr>
-              <a:t>BI's share of sales, new prices only → full plan (slide 14)</a:t>
-            </a:r>
-          </a:p>
-        </p:txBody>
-      </p:sp>
-      <p:sp>
-        <p:nvSpPr>
-          <p:cNvPr id="32" name="Rounded Rectangle 31"/>
-          <p:cNvSpPr/>
-          <p:nvPr/>
-        </p:nvSpPr>
-        <p:spPr>
-          <a:xfrm>
-            <a:off x="8961120" y="2880360"/>
-            <a:ext cx="2697480" cy="3246120"/>
-          </a:xfrm>
-          <a:prstGeom prst="roundRect">
-            <a:avLst>
-              <a:gd name="adj" fmla="val 6000"/>
-            </a:avLst>
-          </a:prstGeom>
-          <a:solidFill>
-            <a:srgbClr val="EAF2FF"/>
-          </a:solidFill>
-          <a:ln>
-            <a:noFill/>
-          </a:ln>
-          <a:effectLst/>
-        </p:spPr>
-        <p:style>
-          <a:lnRef idx="1">
-            <a:schemeClr val="accent1"/>
-          </a:lnRef>
-          <a:fillRef idx="3">
-            <a:schemeClr val="accent1"/>
-          </a:fillRef>
-          <a:effectRef idx="2">
-            <a:schemeClr val="accent1"/>
-          </a:effectRef>
-          <a:fontRef idx="minor">
-            <a:schemeClr val="lt1"/>
-          </a:fontRef>
-        </p:style>
-        <p:txBody>
-          <a:bodyPr rtlCol="0" anchor="t" wrap="square" lIns="182880" rIns="182880" tIns="36576" bIns="36576"/>
-          <a:lstStyle/>
-          <a:p>
-            <a:pPr algn="l">
-              <a:spcAft>
-                <a:spcPts val="400"/>
-              </a:spcAft>
-            </a:pPr>
-            <a:r>
-              <a:rPr sz="1300" b="0" i="0">
-                <a:solidFill>
-                  <a:srgbClr val="3D4F6A"/>
-                </a:solidFill>
-                <a:latin typeface="Arial"/>
-              </a:rPr>
-              <a:t/>
-            </a:r>
-          </a:p>
-        </p:txBody>
-      </p:sp>
-      <p:sp>
-        <p:nvSpPr>
-          <p:cNvPr id="33" name="Oval 32"/>
-          <p:cNvSpPr/>
-          <p:nvPr/>
-        </p:nvSpPr>
-        <p:spPr>
-          <a:xfrm>
-            <a:off x="9125712" y="3017520"/>
-            <a:ext cx="438912" cy="438912"/>
-          </a:xfrm>
-          <a:prstGeom prst="ellipse">
-            <a:avLst/>
-          </a:prstGeom>
-          <a:solidFill>
-            <a:srgbClr val="6379A1"/>
-          </a:solidFill>
-          <a:ln>
-            <a:noFill/>
-          </a:ln>
-          <a:effectLst/>
-        </p:spPr>
-        <p:style>
-          <a:lnRef idx="1">
-            <a:schemeClr val="accent1"/>
-          </a:lnRef>
-          <a:fillRef idx="3">
-            <a:schemeClr val="accent1"/>
-          </a:fillRef>
-          <a:effectRef idx="2">
-            <a:schemeClr val="accent1"/>
-          </a:effectRef>
-          <a:fontRef idx="minor">
-            <a:schemeClr val="lt1"/>
-          </a:fontRef>
-        </p:style>
-        <p:txBody>
-          <a:bodyPr rtlCol="0" anchor="ctr" wrap="square" lIns="0" rIns="0" tIns="36576" bIns="36576"/>
-          <a:lstStyle/>
-          <a:p>
-            <a:pPr algn="ctr">
-              <a:spcAft>
-                <a:spcPts val="400"/>
-              </a:spcAft>
-            </a:pPr>
-            <a:r>
-              <a:rPr sz="1500" b="1" i="0">
-                <a:solidFill>
-                  <a:srgbClr val="FFFFFF"/>
-                </a:solidFill>
-                <a:latin typeface="Georgia"/>
-              </a:rPr>
-              <a:t>4</a:t>
-            </a:r>
-          </a:p>
-        </p:txBody>
-      </p:sp>
-      <p:sp>
-        <p:nvSpPr>
-          <p:cNvPr id="34" name="TextBox 33"/>
-          <p:cNvSpPr txBox="1"/>
-          <p:nvPr/>
-        </p:nvSpPr>
-        <p:spPr>
-          <a:xfrm>
-            <a:off x="9646920" y="2990088"/>
-            <a:ext cx="1965960" cy="502920"/>
-          </a:xfrm>
-          <a:prstGeom prst="rect">
-            <a:avLst/>
-          </a:prstGeom>
-          <a:noFill/>
-        </p:spPr>
-        <p:txBody>
-          <a:bodyPr wrap="square" anchor="ctr" lIns="18288" rIns="18288" tIns="36576" bIns="36576">
-            <a:spAutoFit/>
-          </a:bodyPr>
-          <a:lstStyle/>
-          <a:p>
-            <a:pPr algn="l">
-              <a:spcAft>
-                <a:spcPts val="0"/>
-              </a:spcAft>
-            </a:pPr>
-            <a:r>
-              <a:rPr sz="1600" b="1" i="0">
-                <a:solidFill>
-                  <a:srgbClr val="1E2A3A"/>
-                </a:solidFill>
-                <a:latin typeface="Georgia"/>
-              </a:rPr>
-              <a:t>Community</a:t>
-            </a:r>
-          </a:p>
-          <a:p>
-            <a:pPr algn="l">
-              <a:spcAft>
-                <a:spcPts val="0"/>
-              </a:spcAft>
-            </a:pPr>
-            <a:r>
-              <a:rPr sz="1000" b="0" i="0">
-                <a:solidFill>
-                  <a:srgbClr val="6B7A99"/>
-                </a:solidFill>
-                <a:latin typeface="Arial"/>
-              </a:rPr>
-              <a:t>People beyond our clients</a:t>
-            </a:r>
-          </a:p>
-        </p:txBody>
-      </p:sp>
-      <p:sp>
-        <p:nvSpPr>
-          <p:cNvPr id="35" name="TextBox 34"/>
-          <p:cNvSpPr txBox="1"/>
-          <p:nvPr/>
-        </p:nvSpPr>
-        <p:spPr>
-          <a:xfrm>
-            <a:off x="9125712" y="3611880"/>
-            <a:ext cx="2423160" cy="804672"/>
-          </a:xfrm>
-          <a:prstGeom prst="rect">
-            <a:avLst/>
-          </a:prstGeom>
-          <a:noFill/>
-        </p:spPr>
-        <p:txBody>
-          <a:bodyPr wrap="square" anchor="t" lIns="18288" rIns="18288" tIns="36576" bIns="36576">
-            <a:spAutoFit/>
-          </a:bodyPr>
-          <a:lstStyle/>
-          <a:p>
-            <a:pPr algn="l">
-              <a:spcAft>
-                <a:spcPts val="0"/>
-              </a:spcAft>
-            </a:pPr>
-            <a:r>
-              <a:rPr sz="1700" b="1" i="0">
-                <a:solidFill>
-                  <a:srgbClr val="6379A1"/>
-                </a:solidFill>
-                <a:latin typeface="Georgia"/>
-              </a:rPr>
-              <a:t>710 + ~1,400</a:t>
-            </a:r>
-          </a:p>
-          <a:p>
-            <a:pPr algn="l">
-              <a:spcAft>
-                <a:spcPts val="0"/>
-              </a:spcAft>
-            </a:pPr>
-            <a:r>
-              <a:rPr sz="1000" b="0" i="0">
-                <a:solidFill>
-                  <a:srgbClr val="3D4F6A"/>
-                </a:solidFill>
-                <a:latin typeface="Arial"/>
-              </a:rPr>
-              <a:t>people we train in 2027 + people they reach (estimate: 2 each)</a:t>
-            </a:r>
-          </a:p>
-        </p:txBody>
-      </p:sp>
-      <p:sp>
-        <p:nvSpPr>
-          <p:cNvPr id="36" name="TextBox 35"/>
-          <p:cNvSpPr txBox="1"/>
-          <p:nvPr/>
-        </p:nvSpPr>
-        <p:spPr>
-          <a:xfrm>
-            <a:off x="9125712" y="4434840"/>
-            <a:ext cx="2423160" cy="804672"/>
-          </a:xfrm>
-          <a:prstGeom prst="rect">
-            <a:avLst/>
-          </a:prstGeom>
-          <a:noFill/>
-        </p:spPr>
-        <p:txBody>
-          <a:bodyPr wrap="square" anchor="t" lIns="18288" rIns="18288" tIns="36576" bIns="36576">
-            <a:spAutoFit/>
-          </a:bodyPr>
-          <a:lstStyle/>
-          <a:p>
-            <a:pPr algn="l">
-              <a:spcAft>
-                <a:spcPts val="0"/>
-              </a:spcAft>
-            </a:pPr>
-            <a:r>
-              <a:rPr sz="1700" b="1" i="0">
-                <a:solidFill>
-                  <a:srgbClr val="6379A1"/>
-                </a:solidFill>
-                <a:latin typeface="Georgia"/>
-              </a:rPr>
-              <a:t>480 + 166</a:t>
-            </a:r>
-          </a:p>
-          <a:p>
-            <a:pPr algn="l">
-              <a:spcAft>
-                <a:spcPts val="0"/>
-              </a:spcAft>
-            </a:pPr>
-            <a:r>
-              <a:rPr sz="1000" b="0" i="0">
-                <a:solidFill>
-                  <a:srgbClr val="3D4F6A"/>
-                </a:solidFill>
-                <a:latin typeface="Arial"/>
-              </a:rPr>
-              <a:t>people at our bank and public events + counseling sessions (slide 17)</a:t>
-            </a:r>
-          </a:p>
-        </p:txBody>
-      </p:sp>
-      <p:sp>
-        <p:nvSpPr>
-          <p:cNvPr id="37" name="TextBox 36"/>
-          <p:cNvSpPr txBox="1"/>
-          <p:nvPr/>
-        </p:nvSpPr>
-        <p:spPr>
-          <a:xfrm>
-            <a:off x="9125712" y="5257800"/>
-            <a:ext cx="2423160" cy="804672"/>
-          </a:xfrm>
-          <a:prstGeom prst="rect">
-            <a:avLst/>
-          </a:prstGeom>
-          <a:noFill/>
-        </p:spPr>
-        <p:txBody>
-          <a:bodyPr wrap="square" anchor="t" lIns="18288" rIns="18288" tIns="36576" bIns="36576">
-            <a:spAutoFit/>
-          </a:bodyPr>
-          <a:lstStyle/>
-          <a:p>
-            <a:pPr algn="l">
-              <a:spcAft>
-                <a:spcPts val="0"/>
-              </a:spcAft>
-            </a:pPr>
-            <a:r>
-              <a:rPr sz="1700" b="1" i="0">
-                <a:solidFill>
-                  <a:srgbClr val="6379A1"/>
-                </a:solidFill>
-                <a:latin typeface="Georgia"/>
-              </a:rPr>
-              <a:t>20%</a:t>
-            </a:r>
-          </a:p>
-          <a:p>
-            <a:pPr algn="l">
-              <a:spcAft>
-                <a:spcPts val="0"/>
-              </a:spcAft>
-            </a:pPr>
-            <a:r>
-              <a:rPr sz="1000" b="0" i="0">
-                <a:solidFill>
-                  <a:srgbClr val="3D4F6A"/>
-                </a:solidFill>
-                <a:latin typeface="Arial"/>
-              </a:rPr>
-              <a:t>new clients from referral by Q4 2027 (slide 18)</a:t>
-            </a:r>
-          </a:p>
-        </p:txBody>
-      </p:sp>
-    </p:spTree>
-  </p:cSld>
-  <p:clrMapOvr>
-    <a:masterClrMapping/>
-  </p:clrMapOvr>
-</p:sld>
-</file>
-
-<file path=ppt/slides/slide40.xml><?xml version="1.0" encoding="utf-8"?>
+<file path=ppt/slides/slide42.xml><?xml version="1.0" encoding="utf-8"?>
 <p:sld xmlns:a="http://schemas.openxmlformats.org/drawingml/2006/main" xmlns:p="http://schemas.openxmlformats.org/presentationml/2006/main" xmlns:r="http://schemas.openxmlformats.org/officeDocument/2006/relationships">
   <p:cSld>
     <p:bg>
@@ -55673,7 +58792,7 @@
                 </a:solidFill>
                 <a:latin typeface="Arial"/>
               </a:rPr>
-              <a:t>40</a:t>
+              <a:t>42</a:t>
             </a:r>
           </a:p>
         </p:txBody>
